--- a/.claude/skills/frontier-commons/examples/decks/auto-deck.pptx
+++ b/.claude/skills/frontier-commons/examples/decks/auto-deck.pptx
@@ -3301,7 +3301,7 @@
     <p:bg>
       <p:bgPr>
         <a:solidFill>
-          <a:srgbClr val="FFEFD5"/>
+          <a:srgbClr val="0D145F"/>
         </a:solidFill>
         <a:effectLst/>
       </p:bgPr>
@@ -3315,20 +3315,24 @@
       <p:grpSpPr/>
       <p:sp>
         <p:nvSpPr>
-          <p:cNvPr id="2" name="Oval 1"/>
+          <p:cNvPr id="2" name="Parallelogram 1"/>
           <p:cNvSpPr/>
           <p:nvPr/>
         </p:nvSpPr>
         <p:spPr>
           <a:xfrm>
-            <a:off x="7589520" y="548640"/>
-            <a:ext cx="5120640" cy="5120640"/>
-          </a:xfrm>
-          <a:prstGeom prst="ellipse">
-            <a:avLst/>
+            <a:off x="-1280160" y="-182880"/>
+            <a:ext cx="4023360" cy="7406640"/>
+          </a:xfrm>
+          <a:prstGeom prst="parallelogram">
+            <a:avLst>
+              <a:gd name="adj" fmla="val 28000"/>
+            </a:avLst>
           </a:prstGeom>
           <a:solidFill>
-            <a:srgbClr val="9C90E6"/>
+            <a:srgbClr val="15219D">
+              <a:alpha val="55000"/>
+            </a:srgbClr>
           </a:solidFill>
           <a:ln>
             <a:noFill/>
@@ -3357,55 +3361,9 @@
           </a:p>
         </p:txBody>
       </p:sp>
-      <p:sp>
-        <p:nvSpPr>
-          <p:cNvPr id="3" name="Rounded Rectangle 2"/>
-          <p:cNvSpPr/>
-          <p:nvPr/>
-        </p:nvSpPr>
-        <p:spPr>
-          <a:xfrm>
-            <a:off x="6949440" y="3566160"/>
-            <a:ext cx="2286000" cy="2286000"/>
-          </a:xfrm>
-          <a:prstGeom prst="roundRect">
-            <a:avLst>
-              <a:gd name="adj" fmla="val 18000"/>
-            </a:avLst>
-          </a:prstGeom>
-          <a:solidFill>
-            <a:srgbClr val="0D145F"/>
-          </a:solidFill>
-          <a:ln>
-            <a:noFill/>
-          </a:ln>
-          <a:effectLst/>
-        </p:spPr>
-        <p:style>
-          <a:lnRef idx="1">
-            <a:schemeClr val="accent1"/>
-          </a:lnRef>
-          <a:fillRef idx="3">
-            <a:schemeClr val="accent1"/>
-          </a:fillRef>
-          <a:effectRef idx="2">
-            <a:schemeClr val="accent1"/>
-          </a:effectRef>
-          <a:fontRef idx="minor">
-            <a:schemeClr val="lt1"/>
-          </a:fontRef>
-        </p:style>
-        <p:txBody>
-          <a:bodyPr rtlCol="0" anchor="ctr"/>
-          <a:lstStyle/>
-          <a:p>
-            <a:pPr algn="ctr"/>
-          </a:p>
-        </p:txBody>
-      </p:sp>
       <p:pic>
         <p:nvPicPr>
-          <p:cNvPr id="4" name="Picture 3" descr="users-round.png"/>
+          <p:cNvPr id="3" name="Picture 2" descr="dots-periwinkle.png"/>
           <p:cNvPicPr>
             <a:picLocks noChangeAspect="1"/>
           </p:cNvPicPr>
@@ -3419,8 +3377,8 @@
         </p:blipFill>
         <p:spPr>
           <a:xfrm>
-            <a:off x="7452360" y="4069080"/>
-            <a:ext cx="1280160" cy="1280160"/>
+            <a:off x="-256032" y="2029968"/>
+            <a:ext cx="2286000" cy="4828032"/>
           </a:xfrm>
           <a:prstGeom prst="rect">
             <a:avLst/>
@@ -3429,58 +3387,14 @@
       </p:pic>
       <p:sp>
         <p:nvSpPr>
-          <p:cNvPr id="5" name="Oval 4"/>
-          <p:cNvSpPr/>
-          <p:nvPr/>
-        </p:nvSpPr>
-        <p:spPr>
-          <a:xfrm>
-            <a:off x="9509760" y="5074920"/>
-            <a:ext cx="822960" cy="822960"/>
-          </a:xfrm>
-          <a:prstGeom prst="ellipse">
-            <a:avLst/>
-          </a:prstGeom>
-          <a:solidFill>
-            <a:srgbClr val="FABC20"/>
-          </a:solidFill>
-          <a:ln>
-            <a:noFill/>
-          </a:ln>
-          <a:effectLst/>
-        </p:spPr>
-        <p:style>
-          <a:lnRef idx="1">
-            <a:schemeClr val="accent1"/>
-          </a:lnRef>
-          <a:fillRef idx="3">
-            <a:schemeClr val="accent1"/>
-          </a:fillRef>
-          <a:effectRef idx="2">
-            <a:schemeClr val="accent1"/>
-          </a:effectRef>
-          <a:fontRef idx="minor">
-            <a:schemeClr val="lt1"/>
-          </a:fontRef>
-        </p:style>
-        <p:txBody>
-          <a:bodyPr rtlCol="0" anchor="ctr"/>
-          <a:lstStyle/>
-          <a:p>
-            <a:pPr algn="ctr"/>
-          </a:p>
-        </p:txBody>
-      </p:sp>
-      <p:sp>
-        <p:nvSpPr>
-          <p:cNvPr id="6" name="TextBox 5"/>
+          <p:cNvPr id="4" name="TextBox 3"/>
           <p:cNvSpPr txBox="1"/>
           <p:nvPr/>
         </p:nvSpPr>
         <p:spPr>
           <a:xfrm>
-            <a:off x="731520" y="1920240"/>
-            <a:ext cx="6035040" cy="2651760"/>
+            <a:off x="694944" y="1234440"/>
+            <a:ext cx="7315200" cy="411480"/>
           </a:xfrm>
           <a:prstGeom prst="rect">
             <a:avLst/>
@@ -3495,47 +3409,31 @@
           <a:p>
             <a:pPr algn="l">
               <a:lnSpc>
-                <a:spcPct val="102000"/>
+                <a:spcPct val="120000"/>
               </a:lnSpc>
             </a:pPr>
             <a:r>
-              <a:rPr sz="5400" b="1" i="0" spc="-108">
-                <a:solidFill>
-                  <a:srgbClr val="0D145F"/>
-                </a:solidFill>
-                <a:latin typeface="Inter"/>
+              <a:rPr sz="1530" b="1" i="0" spc="245">
+                <a:solidFill>
+                  <a:srgbClr val="FFFFFF"/>
+                </a:solidFill>
+                <a:latin typeface="DM Sans"/>
               </a:rPr>
-              <a:t>Frontier</a:t>
-            </a:r>
-          </a:p>
-          <a:p>
-            <a:pPr algn="l">
-              <a:lnSpc>
-                <a:spcPct val="102000"/>
-              </a:lnSpc>
-            </a:pPr>
-            <a:r>
-              <a:rPr sz="5400" b="1" i="0" spc="-108">
-                <a:solidFill>
-                  <a:srgbClr val="0D145F"/>
-                </a:solidFill>
-                <a:latin typeface="Inter"/>
-              </a:rPr>
-              <a:t>Commons</a:t>
-            </a:r>
-          </a:p>
-        </p:txBody>
-      </p:sp>
-      <p:sp>
-        <p:nvSpPr>
-          <p:cNvPr id="7" name="TextBox 6"/>
+              <a:t>FRONTIER COMMONS</a:t>
+            </a:r>
+          </a:p>
+        </p:txBody>
+      </p:sp>
+      <p:sp>
+        <p:nvSpPr>
+          <p:cNvPr id="5" name="TextBox 4"/>
           <p:cNvSpPr txBox="1"/>
           <p:nvPr/>
         </p:nvSpPr>
         <p:spPr>
           <a:xfrm>
-            <a:off x="731520" y="4766310"/>
-            <a:ext cx="5852160" cy="1097280"/>
+            <a:off x="694944" y="1783080"/>
+            <a:ext cx="10515600" cy="2687320"/>
           </a:xfrm>
           <a:prstGeom prst="rect">
             <a:avLst/>
@@ -3550,13 +3448,68 @@
           <a:p>
             <a:pPr algn="l">
               <a:lnSpc>
-                <a:spcPct val="125000"/>
+                <a:spcPct val="88000"/>
               </a:lnSpc>
             </a:pPr>
             <a:r>
-              <a:rPr sz="2200" b="0" i="0" spc="-44">
-                <a:solidFill>
-                  <a:srgbClr val="131416"/>
+              <a:rPr sz="9000" b="1" i="0" spc="-405">
+                <a:solidFill>
+                  <a:srgbClr val="FFFFFF"/>
+                </a:solidFill>
+                <a:latin typeface="Inter"/>
+              </a:rPr>
+              <a:t>FRONTIER</a:t>
+            </a:r>
+          </a:p>
+          <a:p>
+            <a:pPr algn="l">
+              <a:lnSpc>
+                <a:spcPct val="88000"/>
+              </a:lnSpc>
+            </a:pPr>
+            <a:r>
+              <a:rPr sz="9000" b="1" i="0" spc="-405">
+                <a:solidFill>
+                  <a:srgbClr val="FFFFFF"/>
+                </a:solidFill>
+                <a:latin typeface="Inter"/>
+              </a:rPr>
+              <a:t>COMMONS</a:t>
+            </a:r>
+          </a:p>
+        </p:txBody>
+      </p:sp>
+      <p:sp>
+        <p:nvSpPr>
+          <p:cNvPr id="6" name="TextBox 5"/>
+          <p:cNvSpPr txBox="1"/>
+          <p:nvPr/>
+        </p:nvSpPr>
+        <p:spPr>
+          <a:xfrm>
+            <a:off x="694944" y="4480560"/>
+            <a:ext cx="9144000" cy="1097280"/>
+          </a:xfrm>
+          <a:prstGeom prst="rect">
+            <a:avLst/>
+          </a:prstGeom>
+          <a:noFill/>
+        </p:spPr>
+        <p:txBody>
+          <a:bodyPr wrap="square" lIns="0" rIns="0" tIns="0" bIns="0" anchor="t">
+            <a:spAutoFit/>
+          </a:bodyPr>
+          <a:lstStyle/>
+          <a:p>
+            <a:pPr algn="l">
+              <a:lnSpc>
+                <a:spcPct val="120000"/>
+              </a:lnSpc>
+            </a:pPr>
+            <a:r>
+              <a:rPr sz="2520" b="0" i="0">
+                <a:solidFill>
+                  <a:srgbClr val="BCB4EE"/>
                 </a:solidFill>
                 <a:latin typeface="Inter"/>
               </a:rPr>
@@ -3567,14 +3520,14 @@
       </p:sp>
       <p:sp>
         <p:nvSpPr>
-          <p:cNvPr id="8" name="TextBox 7"/>
+          <p:cNvPr id="7" name="TextBox 6"/>
           <p:cNvSpPr txBox="1"/>
           <p:nvPr/>
         </p:nvSpPr>
         <p:spPr>
           <a:xfrm>
-            <a:off x="731520" y="5532120"/>
-            <a:ext cx="5943600" cy="365760"/>
+            <a:off x="694944" y="5989320"/>
+            <a:ext cx="7315200" cy="365760"/>
           </a:xfrm>
           <a:prstGeom prst="rect">
             <a:avLst/>
@@ -3593,9 +3546,9 @@
               </a:lnSpc>
             </a:pPr>
             <a:r>
-              <a:rPr sz="1400" b="0" i="0">
-                <a:solidFill>
-                  <a:srgbClr val="131416"/>
+              <a:rPr sz="1260" b="0" i="0">
+                <a:solidFill>
+                  <a:srgbClr val="FFFFFF"/>
                 </a:solidFill>
                 <a:latin typeface="DM Sans"/>
               </a:rPr>
@@ -3606,7 +3559,7 @@
       </p:sp>
       <p:pic>
         <p:nvPicPr>
-          <p:cNvPr id="9" name="Picture 8" descr="wordmark-horizontal-deep-blue.png"/>
+          <p:cNvPr id="8" name="Picture 7" descr="wordmark-horizontal-mist.png"/>
           <p:cNvPicPr>
             <a:picLocks noChangeAspect="1"/>
           </p:cNvPicPr>
@@ -3620,8 +3573,8 @@
         </p:blipFill>
         <p:spPr>
           <a:xfrm>
-            <a:off x="731520" y="6080760"/>
-            <a:ext cx="2113511" cy="274320"/>
+            <a:off x="8808415" y="5961888"/>
+            <a:ext cx="2254412" cy="292608"/>
           </a:xfrm>
           <a:prstGeom prst="rect">
             <a:avLst/>
@@ -3642,7 +3595,7 @@
     <p:bg>
       <p:bgPr>
         <a:solidFill>
-          <a:srgbClr val="F3F4FA"/>
+          <a:srgbClr val="FFFFFF"/>
         </a:solidFill>
         <a:effectLst/>
       </p:bgPr>
@@ -3654,16 +3607,40 @@
         <p:nvPr/>
       </p:nvGrpSpPr>
       <p:grpSpPr/>
-      <p:sp>
-        <p:nvSpPr>
-          <p:cNvPr id="2" name="TextBox 1"/>
+      <p:pic>
+        <p:nvPicPr>
+          <p:cNvPr id="2" name="Picture 1" descr="dotband-grey.png"/>
+          <p:cNvPicPr>
+            <a:picLocks noChangeAspect="1"/>
+          </p:cNvPicPr>
+          <p:nvPr/>
+        </p:nvPicPr>
+        <p:blipFill>
+          <a:blip r:embed="rId2"/>
+          <a:stretch>
+            <a:fillRect/>
+          </a:stretch>
+        </p:blipFill>
+        <p:spPr>
+          <a:xfrm>
+            <a:off x="-45720" y="0"/>
+            <a:ext cx="1444752" cy="6858000"/>
+          </a:xfrm>
+          <a:prstGeom prst="rect">
+            <a:avLst/>
+          </a:prstGeom>
+        </p:spPr>
+      </p:pic>
+      <p:sp>
+        <p:nvSpPr>
+          <p:cNvPr id="3" name="TextBox 2"/>
           <p:cNvSpPr txBox="1"/>
           <p:nvPr/>
         </p:nvSpPr>
         <p:spPr>
           <a:xfrm>
-            <a:off x="731520" y="640080"/>
-            <a:ext cx="10728655" cy="1097280"/>
+            <a:off x="758952" y="612648"/>
+            <a:ext cx="10673791" cy="1188720"/>
           </a:xfrm>
           <a:prstGeom prst="rect">
             <a:avLst/>
@@ -3678,11 +3655,11 @@
           <a:p>
             <a:pPr algn="l">
               <a:lnSpc>
-                <a:spcPct val="105000"/>
+                <a:spcPct val="100000"/>
               </a:lnSpc>
             </a:pPr>
             <a:r>
-              <a:rPr sz="3600" b="1" i="0" spc="-36">
+              <a:rPr sz="2790" b="1" i="0" spc="-98">
                 <a:solidFill>
                   <a:srgbClr val="0D145F"/>
                 </a:solidFill>
@@ -3695,14 +3672,14 @@
       </p:sp>
       <p:sp>
         <p:nvSpPr>
-          <p:cNvPr id="3" name="Rounded Rectangle 2"/>
+          <p:cNvPr id="4" name="Rounded Rectangle 3"/>
           <p:cNvSpPr/>
           <p:nvPr/>
         </p:nvSpPr>
         <p:spPr>
           <a:xfrm>
-            <a:off x="731520" y="1577340"/>
-            <a:ext cx="5090007" cy="4366260"/>
+            <a:off x="731520" y="1364361"/>
+            <a:ext cx="5090007" cy="4579239"/>
           </a:xfrm>
           <a:prstGeom prst="roundRect">
             <a:avLst>
@@ -3741,14 +3718,14 @@
       </p:sp>
       <p:sp>
         <p:nvSpPr>
-          <p:cNvPr id="4" name="Rounded Rectangle 3"/>
+          <p:cNvPr id="5" name="Rounded Rectangle 4"/>
           <p:cNvSpPr/>
           <p:nvPr/>
         </p:nvSpPr>
         <p:spPr>
           <a:xfrm>
-            <a:off x="6370167" y="1577340"/>
-            <a:ext cx="5090007" cy="4366260"/>
+            <a:off x="6370167" y="1364361"/>
+            <a:ext cx="5090007" cy="4579239"/>
           </a:xfrm>
           <a:prstGeom prst="roundRect">
             <a:avLst>
@@ -3787,13 +3764,13 @@
       </p:sp>
       <p:sp>
         <p:nvSpPr>
-          <p:cNvPr id="5" name="TextBox 4"/>
+          <p:cNvPr id="6" name="TextBox 5"/>
           <p:cNvSpPr txBox="1"/>
           <p:nvPr/>
         </p:nvSpPr>
         <p:spPr>
           <a:xfrm>
-            <a:off x="1097280" y="1943100"/>
+            <a:off x="1097280" y="1730121"/>
             <a:ext cx="4358487" cy="457200"/>
           </a:xfrm>
           <a:prstGeom prst="rect">
@@ -3813,7 +3790,7 @@
               </a:lnSpc>
             </a:pPr>
             <a:r>
-              <a:rPr sz="2200" b="1" i="0" spc="-22">
+              <a:rPr sz="1980" b="1" i="0" spc="-20">
                 <a:solidFill>
                   <a:srgbClr val="0D145F"/>
                 </a:solidFill>
@@ -3826,14 +3803,14 @@
       </p:sp>
       <p:sp>
         <p:nvSpPr>
-          <p:cNvPr id="6" name="TextBox 5"/>
+          <p:cNvPr id="7" name="TextBox 6"/>
           <p:cNvSpPr txBox="1"/>
           <p:nvPr/>
         </p:nvSpPr>
         <p:spPr>
           <a:xfrm>
-            <a:off x="1097280" y="2491740"/>
-            <a:ext cx="4358487" cy="3634740"/>
+            <a:off x="1097280" y="2278761"/>
+            <a:ext cx="4358487" cy="3847719"/>
           </a:xfrm>
           <a:prstGeom prst="rect">
             <a:avLst/>
@@ -3860,7 +3837,7 @@
               <a:buChar char="•"/>
             </a:pPr>
             <a:r>
-              <a:rPr sz="1700" b="0" i="0" spc="-17">
+              <a:rPr sz="1530" b="0" i="0" spc="-15">
                 <a:solidFill>
                   <a:srgbClr val="131416"/>
                 </a:solidFill>
@@ -3884,7 +3861,7 @@
               <a:buChar char="•"/>
             </a:pPr>
             <a:r>
-              <a:rPr sz="1700" b="0" i="0" spc="-17">
+              <a:rPr sz="1530" b="0" i="0" spc="-15">
                 <a:solidFill>
                   <a:srgbClr val="131416"/>
                 </a:solidFill>
@@ -3908,7 +3885,7 @@
               <a:buChar char="•"/>
             </a:pPr>
             <a:r>
-              <a:rPr sz="1700" b="0" i="0" spc="-17">
+              <a:rPr sz="1530" b="0" i="0" spc="-15">
                 <a:solidFill>
                   <a:srgbClr val="131416"/>
                 </a:solidFill>
@@ -3921,13 +3898,13 @@
       </p:sp>
       <p:sp>
         <p:nvSpPr>
-          <p:cNvPr id="7" name="TextBox 6"/>
+          <p:cNvPr id="8" name="TextBox 7"/>
           <p:cNvSpPr txBox="1"/>
           <p:nvPr/>
         </p:nvSpPr>
         <p:spPr>
           <a:xfrm>
-            <a:off x="6735927" y="1943100"/>
+            <a:off x="6735927" y="1730121"/>
             <a:ext cx="4358487" cy="457200"/>
           </a:xfrm>
           <a:prstGeom prst="rect">
@@ -3947,7 +3924,7 @@
               </a:lnSpc>
             </a:pPr>
             <a:r>
-              <a:rPr sz="2200" b="1" i="0" spc="-22">
+              <a:rPr sz="1980" b="1" i="0" spc="-20">
                 <a:solidFill>
                   <a:srgbClr val="0D145F"/>
                 </a:solidFill>
@@ -3960,14 +3937,14 @@
       </p:sp>
       <p:sp>
         <p:nvSpPr>
-          <p:cNvPr id="8" name="TextBox 7"/>
+          <p:cNvPr id="9" name="TextBox 8"/>
           <p:cNvSpPr txBox="1"/>
           <p:nvPr/>
         </p:nvSpPr>
         <p:spPr>
           <a:xfrm>
-            <a:off x="6735927" y="2491740"/>
-            <a:ext cx="4358487" cy="3634740"/>
+            <a:off x="6735927" y="2278761"/>
+            <a:ext cx="4358487" cy="3847719"/>
           </a:xfrm>
           <a:prstGeom prst="rect">
             <a:avLst/>
@@ -3994,7 +3971,7 @@
               <a:buChar char="•"/>
             </a:pPr>
             <a:r>
-              <a:rPr sz="1700" b="0" i="0" spc="-17">
+              <a:rPr sz="1530" b="0" i="0" spc="-15">
                 <a:solidFill>
                   <a:srgbClr val="131416"/>
                 </a:solidFill>
@@ -4018,7 +3995,7 @@
               <a:buChar char="•"/>
             </a:pPr>
             <a:r>
-              <a:rPr sz="1700" b="0" i="0" spc="-17">
+              <a:rPr sz="1530" b="0" i="0" spc="-15">
                 <a:solidFill>
                   <a:srgbClr val="131416"/>
                 </a:solidFill>
@@ -4042,76 +4019,13 @@
               <a:buChar char="•"/>
             </a:pPr>
             <a:r>
-              <a:rPr sz="1700" b="0" i="0" spc="-17">
+              <a:rPr sz="1530" b="0" i="0" spc="-15">
                 <a:solidFill>
                   <a:srgbClr val="131416"/>
                 </a:solidFill>
                 <a:latin typeface="DM Sans"/>
               </a:rPr>
               <a:t>Your programs</a:t>
-            </a:r>
-          </a:p>
-        </p:txBody>
-      </p:sp>
-      <p:pic>
-        <p:nvPicPr>
-          <p:cNvPr id="9" name="Picture 8" descr="logo-icon-deep-blue.png"/>
-          <p:cNvPicPr>
-            <a:picLocks noChangeAspect="1"/>
-          </p:cNvPicPr>
-          <p:nvPr/>
-        </p:nvPicPr>
-        <p:blipFill>
-          <a:blip r:embed="rId2"/>
-          <a:stretch>
-            <a:fillRect/>
-          </a:stretch>
-        </p:blipFill>
-        <p:spPr>
-          <a:xfrm>
-            <a:off x="11167567" y="6291072"/>
-            <a:ext cx="292608" cy="292608"/>
-          </a:xfrm>
-          <a:prstGeom prst="rect">
-            <a:avLst/>
-          </a:prstGeom>
-        </p:spPr>
-      </p:pic>
-      <p:sp>
-        <p:nvSpPr>
-          <p:cNvPr id="10" name="TextBox 9"/>
-          <p:cNvSpPr txBox="1"/>
-          <p:nvPr/>
-        </p:nvSpPr>
-        <p:spPr>
-          <a:xfrm>
-            <a:off x="731520" y="6327648"/>
-            <a:ext cx="5486400" cy="274320"/>
-          </a:xfrm>
-          <a:prstGeom prst="rect">
-            <a:avLst/>
-          </a:prstGeom>
-          <a:noFill/>
-        </p:spPr>
-        <p:txBody>
-          <a:bodyPr wrap="square" lIns="0" rIns="0" tIns="0" bIns="0" anchor="t">
-            <a:spAutoFit/>
-          </a:bodyPr>
-          <a:lstStyle/>
-          <a:p>
-            <a:pPr algn="l">
-              <a:lnSpc>
-                <a:spcPct val="115000"/>
-              </a:lnSpc>
-            </a:pPr>
-            <a:r>
-              <a:rPr sz="1000" b="0" i="0">
-                <a:solidFill>
-                  <a:srgbClr val="5F646D"/>
-                </a:solidFill>
-                <a:latin typeface="DM Sans"/>
-              </a:rPr>
-              <a:t>10</a:t>
             </a:r>
           </a:p>
         </p:txBody>
@@ -4125,6 +4039,2009 @@
 </file>
 
 <file path=ppt/slides/slide11.xml><?xml version="1.0" encoding="utf-8"?>
+<p:sld xmlns:a="http://schemas.openxmlformats.org/drawingml/2006/main" xmlns:p="http://schemas.openxmlformats.org/presentationml/2006/main" xmlns:r="http://schemas.openxmlformats.org/officeDocument/2006/relationships">
+  <p:cSld>
+    <p:bg>
+      <p:bgPr>
+        <a:solidFill>
+          <a:srgbClr val="FFFFFF"/>
+        </a:solidFill>
+        <a:effectLst/>
+      </p:bgPr>
+    </p:bg>
+    <p:spTree>
+      <p:nvGrpSpPr>
+        <p:cNvPr id="1" name=""/>
+        <p:cNvGrpSpPr/>
+        <p:nvPr/>
+      </p:nvGrpSpPr>
+      <p:grpSpPr/>
+      <p:pic>
+        <p:nvPicPr>
+          <p:cNvPr id="2" name="Picture 1" descr="dotband-grey.png"/>
+          <p:cNvPicPr>
+            <a:picLocks noChangeAspect="1"/>
+          </p:cNvPicPr>
+          <p:nvPr/>
+        </p:nvPicPr>
+        <p:blipFill>
+          <a:blip r:embed="rId2"/>
+          <a:stretch>
+            <a:fillRect/>
+          </a:stretch>
+        </p:blipFill>
+        <p:spPr>
+          <a:xfrm>
+            <a:off x="-45720" y="0"/>
+            <a:ext cx="1444752" cy="6858000"/>
+          </a:xfrm>
+          <a:prstGeom prst="rect">
+            <a:avLst/>
+          </a:prstGeom>
+        </p:spPr>
+      </p:pic>
+      <p:sp>
+        <p:nvSpPr>
+          <p:cNvPr id="3" name="TextBox 2"/>
+          <p:cNvSpPr txBox="1"/>
+          <p:nvPr/>
+        </p:nvSpPr>
+        <p:spPr>
+          <a:xfrm>
+            <a:off x="758952" y="612648"/>
+            <a:ext cx="10673791" cy="1188720"/>
+          </a:xfrm>
+          <a:prstGeom prst="rect">
+            <a:avLst/>
+          </a:prstGeom>
+          <a:noFill/>
+        </p:spPr>
+        <p:txBody>
+          <a:bodyPr wrap="square" lIns="0" rIns="0" tIns="0" bIns="0" anchor="t">
+            <a:spAutoFit/>
+          </a:bodyPr>
+          <a:lstStyle/>
+          <a:p>
+            <a:pPr algn="l">
+              <a:lnSpc>
+                <a:spcPct val="100000"/>
+              </a:lnSpc>
+            </a:pPr>
+            <a:r>
+              <a:rPr sz="2790" b="1" i="0" spc="-98">
+                <a:solidFill>
+                  <a:srgbClr val="0D145F"/>
+                </a:solidFill>
+                <a:latin typeface="Inter"/>
+              </a:rPr>
+              <a:t>Next twelve months</a:t>
+            </a:r>
+          </a:p>
+        </p:txBody>
+      </p:sp>
+      <p:sp>
+        <p:nvSpPr>
+          <p:cNvPr id="4" name="Rectangle 3"/>
+          <p:cNvSpPr/>
+          <p:nvPr/>
+        </p:nvSpPr>
+        <p:spPr>
+          <a:xfrm>
+            <a:off x="2072601" y="2716911"/>
+            <a:ext cx="8046491" cy="38100"/>
+          </a:xfrm>
+          <a:prstGeom prst="rect">
+            <a:avLst/>
+          </a:prstGeom>
+          <a:solidFill>
+            <a:srgbClr val="0D145F"/>
+          </a:solidFill>
+          <a:ln>
+            <a:noFill/>
+          </a:ln>
+          <a:effectLst/>
+        </p:spPr>
+        <p:style>
+          <a:lnRef idx="1">
+            <a:schemeClr val="accent1"/>
+          </a:lnRef>
+          <a:fillRef idx="3">
+            <a:schemeClr val="accent1"/>
+          </a:fillRef>
+          <a:effectRef idx="2">
+            <a:schemeClr val="accent1"/>
+          </a:effectRef>
+          <a:fontRef idx="minor">
+            <a:schemeClr val="lt1"/>
+          </a:fontRef>
+        </p:style>
+        <p:txBody>
+          <a:bodyPr rtlCol="0" anchor="ctr"/>
+          <a:lstStyle/>
+          <a:p>
+            <a:pPr algn="ctr"/>
+          </a:p>
+        </p:txBody>
+      </p:sp>
+      <p:sp>
+        <p:nvSpPr>
+          <p:cNvPr id="5" name="Oval 4"/>
+          <p:cNvSpPr/>
+          <p:nvPr/>
+        </p:nvSpPr>
+        <p:spPr>
+          <a:xfrm>
+            <a:off x="1661121" y="2324481"/>
+            <a:ext cx="822960" cy="822960"/>
+          </a:xfrm>
+          <a:prstGeom prst="ellipse">
+            <a:avLst/>
+          </a:prstGeom>
+          <a:solidFill>
+            <a:srgbClr val="9C90E6"/>
+          </a:solidFill>
+          <a:ln>
+            <a:noFill/>
+          </a:ln>
+          <a:effectLst/>
+        </p:spPr>
+        <p:style>
+          <a:lnRef idx="1">
+            <a:schemeClr val="accent1"/>
+          </a:lnRef>
+          <a:fillRef idx="3">
+            <a:schemeClr val="accent1"/>
+          </a:fillRef>
+          <a:effectRef idx="2">
+            <a:schemeClr val="accent1"/>
+          </a:effectRef>
+          <a:fontRef idx="minor">
+            <a:schemeClr val="lt1"/>
+          </a:fontRef>
+        </p:style>
+        <p:txBody>
+          <a:bodyPr rtlCol="0" anchor="ctr"/>
+          <a:lstStyle/>
+          <a:p>
+            <a:pPr algn="ctr"/>
+          </a:p>
+        </p:txBody>
+      </p:sp>
+      <p:pic>
+        <p:nvPicPr>
+          <p:cNvPr id="6" name="Picture 5" descr="search.png"/>
+          <p:cNvPicPr>
+            <a:picLocks noChangeAspect="1"/>
+          </p:cNvPicPr>
+          <p:nvPr/>
+        </p:nvPicPr>
+        <p:blipFill>
+          <a:blip r:embed="rId3"/>
+          <a:stretch>
+            <a:fillRect/>
+          </a:stretch>
+        </p:blipFill>
+        <p:spPr>
+          <a:xfrm>
+            <a:off x="1858631" y="2521991"/>
+            <a:ext cx="427940" cy="427940"/>
+          </a:xfrm>
+          <a:prstGeom prst="rect">
+            <a:avLst/>
+          </a:prstGeom>
+        </p:spPr>
+      </p:pic>
+      <p:sp>
+        <p:nvSpPr>
+          <p:cNvPr id="7" name="TextBox 6"/>
+          <p:cNvSpPr txBox="1"/>
+          <p:nvPr/>
+        </p:nvSpPr>
+        <p:spPr>
+          <a:xfrm>
+            <a:off x="845819" y="1867281"/>
+            <a:ext cx="2453563" cy="320040"/>
+          </a:xfrm>
+          <a:prstGeom prst="rect">
+            <a:avLst/>
+          </a:prstGeom>
+          <a:noFill/>
+        </p:spPr>
+        <p:txBody>
+          <a:bodyPr wrap="square" lIns="0" rIns="0" tIns="0" bIns="0" anchor="t">
+            <a:spAutoFit/>
+          </a:bodyPr>
+          <a:lstStyle/>
+          <a:p>
+            <a:pPr algn="ctr">
+              <a:lnSpc>
+                <a:spcPct val="115000"/>
+              </a:lnSpc>
+            </a:pPr>
+            <a:r>
+              <a:rPr sz="1080" b="1" i="0" spc="65">
+                <a:solidFill>
+                  <a:srgbClr val="1F2FE0"/>
+                </a:solidFill>
+                <a:latin typeface="DM Sans"/>
+              </a:rPr>
+              <a:t>NOV 2026</a:t>
+            </a:r>
+          </a:p>
+        </p:txBody>
+      </p:sp>
+      <p:sp>
+        <p:nvSpPr>
+          <p:cNvPr id="8" name="TextBox 7"/>
+          <p:cNvSpPr txBox="1"/>
+          <p:nvPr/>
+        </p:nvSpPr>
+        <p:spPr>
+          <a:xfrm>
+            <a:off x="845819" y="3421761"/>
+            <a:ext cx="2453563" cy="640080"/>
+          </a:xfrm>
+          <a:prstGeom prst="rect">
+            <a:avLst/>
+          </a:prstGeom>
+          <a:noFill/>
+        </p:spPr>
+        <p:txBody>
+          <a:bodyPr wrap="square" lIns="0" rIns="0" tIns="0" bIns="0" anchor="t">
+            <a:spAutoFit/>
+          </a:bodyPr>
+          <a:lstStyle/>
+          <a:p>
+            <a:pPr algn="ctr">
+              <a:lnSpc>
+                <a:spcPct val="115000"/>
+              </a:lnSpc>
+            </a:pPr>
+            <a:r>
+              <a:rPr sz="1530" b="1" i="0">
+                <a:solidFill>
+                  <a:srgbClr val="0D145F"/>
+                </a:solidFill>
+                <a:latin typeface="DM Sans"/>
+              </a:rPr>
+              <a:t>1. Partner survey</a:t>
+            </a:r>
+          </a:p>
+        </p:txBody>
+      </p:sp>
+      <p:sp>
+        <p:nvSpPr>
+          <p:cNvPr id="9" name="TextBox 8"/>
+          <p:cNvSpPr txBox="1"/>
+          <p:nvPr/>
+        </p:nvSpPr>
+        <p:spPr>
+          <a:xfrm>
+            <a:off x="845819" y="4061841"/>
+            <a:ext cx="2453563" cy="1828800"/>
+          </a:xfrm>
+          <a:prstGeom prst="rect">
+            <a:avLst/>
+          </a:prstGeom>
+          <a:noFill/>
+        </p:spPr>
+        <p:txBody>
+          <a:bodyPr wrap="square" lIns="0" rIns="0" tIns="0" bIns="0" anchor="t">
+            <a:spAutoFit/>
+          </a:bodyPr>
+          <a:lstStyle/>
+          <a:p>
+            <a:pPr algn="ctr">
+              <a:lnSpc>
+                <a:spcPct val="140000"/>
+              </a:lnSpc>
+            </a:pPr>
+            <a:r>
+              <a:rPr sz="1260" b="0" i="0">
+                <a:solidFill>
+                  <a:srgbClr val="131416"/>
+                </a:solidFill>
+                <a:latin typeface="DM Sans"/>
+              </a:rPr>
+              <a:t>Listen before we build.</a:t>
+            </a:r>
+          </a:p>
+        </p:txBody>
+      </p:sp>
+      <p:sp>
+        <p:nvSpPr>
+          <p:cNvPr id="10" name="Oval 9"/>
+          <p:cNvSpPr/>
+          <p:nvPr/>
+        </p:nvSpPr>
+        <p:spPr>
+          <a:xfrm>
+            <a:off x="4343285" y="2324481"/>
+            <a:ext cx="822960" cy="822960"/>
+          </a:xfrm>
+          <a:prstGeom prst="ellipse">
+            <a:avLst/>
+          </a:prstGeom>
+          <a:solidFill>
+            <a:srgbClr val="9C90E6"/>
+          </a:solidFill>
+          <a:ln>
+            <a:noFill/>
+          </a:ln>
+          <a:effectLst/>
+        </p:spPr>
+        <p:style>
+          <a:lnRef idx="1">
+            <a:schemeClr val="accent1"/>
+          </a:lnRef>
+          <a:fillRef idx="3">
+            <a:schemeClr val="accent1"/>
+          </a:fillRef>
+          <a:effectRef idx="2">
+            <a:schemeClr val="accent1"/>
+          </a:effectRef>
+          <a:fontRef idx="minor">
+            <a:schemeClr val="lt1"/>
+          </a:fontRef>
+        </p:style>
+        <p:txBody>
+          <a:bodyPr rtlCol="0" anchor="ctr"/>
+          <a:lstStyle/>
+          <a:p>
+            <a:pPr algn="ctr"/>
+          </a:p>
+        </p:txBody>
+      </p:sp>
+      <p:pic>
+        <p:nvPicPr>
+          <p:cNvPr id="11" name="Picture 10" descr="calendar.png"/>
+          <p:cNvPicPr>
+            <a:picLocks noChangeAspect="1"/>
+          </p:cNvPicPr>
+          <p:nvPr/>
+        </p:nvPicPr>
+        <p:blipFill>
+          <a:blip r:embed="rId4"/>
+          <a:stretch>
+            <a:fillRect/>
+          </a:stretch>
+        </p:blipFill>
+        <p:spPr>
+          <a:xfrm>
+            <a:off x="4540795" y="2521991"/>
+            <a:ext cx="427940" cy="427940"/>
+          </a:xfrm>
+          <a:prstGeom prst="rect">
+            <a:avLst/>
+          </a:prstGeom>
+        </p:spPr>
+      </p:pic>
+      <p:sp>
+        <p:nvSpPr>
+          <p:cNvPr id="12" name="TextBox 11"/>
+          <p:cNvSpPr txBox="1"/>
+          <p:nvPr/>
+        </p:nvSpPr>
+        <p:spPr>
+          <a:xfrm>
+            <a:off x="3527983" y="1867281"/>
+            <a:ext cx="2453563" cy="320040"/>
+          </a:xfrm>
+          <a:prstGeom prst="rect">
+            <a:avLst/>
+          </a:prstGeom>
+          <a:noFill/>
+        </p:spPr>
+        <p:txBody>
+          <a:bodyPr wrap="square" lIns="0" rIns="0" tIns="0" bIns="0" anchor="t">
+            <a:spAutoFit/>
+          </a:bodyPr>
+          <a:lstStyle/>
+          <a:p>
+            <a:pPr algn="ctr">
+              <a:lnSpc>
+                <a:spcPct val="115000"/>
+              </a:lnSpc>
+            </a:pPr>
+            <a:r>
+              <a:rPr sz="1080" b="1" i="0" spc="65">
+                <a:solidFill>
+                  <a:srgbClr val="1F2FE0"/>
+                </a:solidFill>
+                <a:latin typeface="DM Sans"/>
+              </a:rPr>
+              <a:t>JAN 2027</a:t>
+            </a:r>
+          </a:p>
+        </p:txBody>
+      </p:sp>
+      <p:sp>
+        <p:nvSpPr>
+          <p:cNvPr id="13" name="TextBox 12"/>
+          <p:cNvSpPr txBox="1"/>
+          <p:nvPr/>
+        </p:nvSpPr>
+        <p:spPr>
+          <a:xfrm>
+            <a:off x="3527983" y="3421761"/>
+            <a:ext cx="2453563" cy="640080"/>
+          </a:xfrm>
+          <a:prstGeom prst="rect">
+            <a:avLst/>
+          </a:prstGeom>
+          <a:noFill/>
+        </p:spPr>
+        <p:txBody>
+          <a:bodyPr wrap="square" lIns="0" rIns="0" tIns="0" bIns="0" anchor="t">
+            <a:spAutoFit/>
+          </a:bodyPr>
+          <a:lstStyle/>
+          <a:p>
+            <a:pPr algn="ctr">
+              <a:lnSpc>
+                <a:spcPct val="115000"/>
+              </a:lnSpc>
+            </a:pPr>
+            <a:r>
+              <a:rPr sz="1530" b="1" i="0">
+                <a:solidFill>
+                  <a:srgbClr val="0D145F"/>
+                </a:solidFill>
+                <a:latin typeface="DM Sans"/>
+              </a:rPr>
+              <a:t>2. Shared calendar</a:t>
+            </a:r>
+          </a:p>
+        </p:txBody>
+      </p:sp>
+      <p:sp>
+        <p:nvSpPr>
+          <p:cNvPr id="14" name="TextBox 13"/>
+          <p:cNvSpPr txBox="1"/>
+          <p:nvPr/>
+        </p:nvSpPr>
+        <p:spPr>
+          <a:xfrm>
+            <a:off x="3527983" y="4061841"/>
+            <a:ext cx="2453563" cy="1828800"/>
+          </a:xfrm>
+          <a:prstGeom prst="rect">
+            <a:avLst/>
+          </a:prstGeom>
+          <a:noFill/>
+        </p:spPr>
+        <p:txBody>
+          <a:bodyPr wrap="square" lIns="0" rIns="0" tIns="0" bIns="0" anchor="t">
+            <a:spAutoFit/>
+          </a:bodyPr>
+          <a:lstStyle/>
+          <a:p>
+            <a:pPr algn="ctr">
+              <a:lnSpc>
+                <a:spcPct val="140000"/>
+              </a:lnSpc>
+            </a:pPr>
+            <a:r>
+              <a:rPr sz="1260" b="0" i="0">
+                <a:solidFill>
+                  <a:srgbClr val="131416"/>
+                </a:solidFill>
+                <a:latin typeface="DM Sans"/>
+              </a:rPr>
+              <a:t>One view of campus events.</a:t>
+            </a:r>
+          </a:p>
+        </p:txBody>
+      </p:sp>
+      <p:sp>
+        <p:nvSpPr>
+          <p:cNvPr id="15" name="Oval 14"/>
+          <p:cNvSpPr/>
+          <p:nvPr/>
+        </p:nvSpPr>
+        <p:spPr>
+          <a:xfrm>
+            <a:off x="7025449" y="2324481"/>
+            <a:ext cx="822960" cy="822960"/>
+          </a:xfrm>
+          <a:prstGeom prst="ellipse">
+            <a:avLst/>
+          </a:prstGeom>
+          <a:solidFill>
+            <a:srgbClr val="9C90E6"/>
+          </a:solidFill>
+          <a:ln>
+            <a:noFill/>
+          </a:ln>
+          <a:effectLst/>
+        </p:spPr>
+        <p:style>
+          <a:lnRef idx="1">
+            <a:schemeClr val="accent1"/>
+          </a:lnRef>
+          <a:fillRef idx="3">
+            <a:schemeClr val="accent1"/>
+          </a:fillRef>
+          <a:effectRef idx="2">
+            <a:schemeClr val="accent1"/>
+          </a:effectRef>
+          <a:fontRef idx="minor">
+            <a:schemeClr val="lt1"/>
+          </a:fontRef>
+        </p:style>
+        <p:txBody>
+          <a:bodyPr rtlCol="0" anchor="ctr"/>
+          <a:lstStyle/>
+          <a:p>
+            <a:pPr algn="ctr"/>
+          </a:p>
+        </p:txBody>
+      </p:sp>
+      <p:pic>
+        <p:nvPicPr>
+          <p:cNvPr id="16" name="Picture 15" descr="users-round.png"/>
+          <p:cNvPicPr>
+            <a:picLocks noChangeAspect="1"/>
+          </p:cNvPicPr>
+          <p:nvPr/>
+        </p:nvPicPr>
+        <p:blipFill>
+          <a:blip r:embed="rId5"/>
+          <a:stretch>
+            <a:fillRect/>
+          </a:stretch>
+        </p:blipFill>
+        <p:spPr>
+          <a:xfrm>
+            <a:off x="7222959" y="2521991"/>
+            <a:ext cx="427940" cy="427940"/>
+          </a:xfrm>
+          <a:prstGeom prst="rect">
+            <a:avLst/>
+          </a:prstGeom>
+        </p:spPr>
+      </p:pic>
+      <p:sp>
+        <p:nvSpPr>
+          <p:cNvPr id="17" name="TextBox 16"/>
+          <p:cNvSpPr txBox="1"/>
+          <p:nvPr/>
+        </p:nvSpPr>
+        <p:spPr>
+          <a:xfrm>
+            <a:off x="6210147" y="1867281"/>
+            <a:ext cx="2453563" cy="320040"/>
+          </a:xfrm>
+          <a:prstGeom prst="rect">
+            <a:avLst/>
+          </a:prstGeom>
+          <a:noFill/>
+        </p:spPr>
+        <p:txBody>
+          <a:bodyPr wrap="square" lIns="0" rIns="0" tIns="0" bIns="0" anchor="t">
+            <a:spAutoFit/>
+          </a:bodyPr>
+          <a:lstStyle/>
+          <a:p>
+            <a:pPr algn="ctr">
+              <a:lnSpc>
+                <a:spcPct val="115000"/>
+              </a:lnSpc>
+            </a:pPr>
+            <a:r>
+              <a:rPr sz="1080" b="1" i="0" spc="65">
+                <a:solidFill>
+                  <a:srgbClr val="1F2FE0"/>
+                </a:solidFill>
+                <a:latin typeface="DM Sans"/>
+              </a:rPr>
+              <a:t>MAR 2027</a:t>
+            </a:r>
+          </a:p>
+        </p:txBody>
+      </p:sp>
+      <p:sp>
+        <p:nvSpPr>
+          <p:cNvPr id="18" name="TextBox 17"/>
+          <p:cNvSpPr txBox="1"/>
+          <p:nvPr/>
+        </p:nvSpPr>
+        <p:spPr>
+          <a:xfrm>
+            <a:off x="6210147" y="3421761"/>
+            <a:ext cx="2453563" cy="640080"/>
+          </a:xfrm>
+          <a:prstGeom prst="rect">
+            <a:avLst/>
+          </a:prstGeom>
+          <a:noFill/>
+        </p:spPr>
+        <p:txBody>
+          <a:bodyPr wrap="square" lIns="0" rIns="0" tIns="0" bIns="0" anchor="t">
+            <a:spAutoFit/>
+          </a:bodyPr>
+          <a:lstStyle/>
+          <a:p>
+            <a:pPr algn="ctr">
+              <a:lnSpc>
+                <a:spcPct val="115000"/>
+              </a:lnSpc>
+            </a:pPr>
+            <a:r>
+              <a:rPr sz="1530" b="1" i="0">
+                <a:solidFill>
+                  <a:srgbClr val="0D145F"/>
+                </a:solidFill>
+                <a:latin typeface="DM Sans"/>
+              </a:rPr>
+              <a:t>3. Summit</a:t>
+            </a:r>
+          </a:p>
+        </p:txBody>
+      </p:sp>
+      <p:sp>
+        <p:nvSpPr>
+          <p:cNvPr id="19" name="TextBox 18"/>
+          <p:cNvSpPr txBox="1"/>
+          <p:nvPr/>
+        </p:nvSpPr>
+        <p:spPr>
+          <a:xfrm>
+            <a:off x="6210147" y="4061841"/>
+            <a:ext cx="2453563" cy="1828800"/>
+          </a:xfrm>
+          <a:prstGeom prst="rect">
+            <a:avLst/>
+          </a:prstGeom>
+          <a:noFill/>
+        </p:spPr>
+        <p:txBody>
+          <a:bodyPr wrap="square" lIns="0" rIns="0" tIns="0" bIns="0" anchor="t">
+            <a:spAutoFit/>
+          </a:bodyPr>
+          <a:lstStyle/>
+          <a:p>
+            <a:pPr algn="ctr">
+              <a:lnSpc>
+                <a:spcPct val="140000"/>
+              </a:lnSpc>
+            </a:pPr>
+            <a:r>
+              <a:rPr sz="1260" b="0" i="0">
+                <a:solidFill>
+                  <a:srgbClr val="131416"/>
+                </a:solidFill>
+                <a:latin typeface="DM Sans"/>
+              </a:rPr>
+              <a:t>Gather in person.</a:t>
+            </a:r>
+          </a:p>
+        </p:txBody>
+      </p:sp>
+      <p:sp>
+        <p:nvSpPr>
+          <p:cNvPr id="20" name="Oval 19"/>
+          <p:cNvSpPr/>
+          <p:nvPr/>
+        </p:nvSpPr>
+        <p:spPr>
+          <a:xfrm>
+            <a:off x="9707613" y="2324481"/>
+            <a:ext cx="822960" cy="822960"/>
+          </a:xfrm>
+          <a:prstGeom prst="ellipse">
+            <a:avLst/>
+          </a:prstGeom>
+          <a:solidFill>
+            <a:srgbClr val="9C90E6"/>
+          </a:solidFill>
+          <a:ln>
+            <a:noFill/>
+          </a:ln>
+          <a:effectLst/>
+        </p:spPr>
+        <p:style>
+          <a:lnRef idx="1">
+            <a:schemeClr val="accent1"/>
+          </a:lnRef>
+          <a:fillRef idx="3">
+            <a:schemeClr val="accent1"/>
+          </a:fillRef>
+          <a:effectRef idx="2">
+            <a:schemeClr val="accent1"/>
+          </a:effectRef>
+          <a:fontRef idx="minor">
+            <a:schemeClr val="lt1"/>
+          </a:fontRef>
+        </p:style>
+        <p:txBody>
+          <a:bodyPr rtlCol="0" anchor="ctr"/>
+          <a:lstStyle/>
+          <a:p>
+            <a:pPr algn="ctr"/>
+          </a:p>
+        </p:txBody>
+      </p:sp>
+      <p:pic>
+        <p:nvPicPr>
+          <p:cNvPr id="21" name="Picture 20" descr="plane-takeoff.png"/>
+          <p:cNvPicPr>
+            <a:picLocks noChangeAspect="1"/>
+          </p:cNvPicPr>
+          <p:nvPr/>
+        </p:nvPicPr>
+        <p:blipFill>
+          <a:blip r:embed="rId6"/>
+          <a:stretch>
+            <a:fillRect/>
+          </a:stretch>
+        </p:blipFill>
+        <p:spPr>
+          <a:xfrm>
+            <a:off x="9905123" y="2521991"/>
+            <a:ext cx="427940" cy="427940"/>
+          </a:xfrm>
+          <a:prstGeom prst="rect">
+            <a:avLst/>
+          </a:prstGeom>
+        </p:spPr>
+      </p:pic>
+      <p:sp>
+        <p:nvSpPr>
+          <p:cNvPr id="22" name="TextBox 21"/>
+          <p:cNvSpPr txBox="1"/>
+          <p:nvPr/>
+        </p:nvSpPr>
+        <p:spPr>
+          <a:xfrm>
+            <a:off x="8892311" y="1867281"/>
+            <a:ext cx="2453563" cy="320040"/>
+          </a:xfrm>
+          <a:prstGeom prst="rect">
+            <a:avLst/>
+          </a:prstGeom>
+          <a:noFill/>
+        </p:spPr>
+        <p:txBody>
+          <a:bodyPr wrap="square" lIns="0" rIns="0" tIns="0" bIns="0" anchor="t">
+            <a:spAutoFit/>
+          </a:bodyPr>
+          <a:lstStyle/>
+          <a:p>
+            <a:pPr algn="ctr">
+              <a:lnSpc>
+                <a:spcPct val="115000"/>
+              </a:lnSpc>
+            </a:pPr>
+            <a:r>
+              <a:rPr sz="1080" b="1" i="0" spc="65">
+                <a:solidFill>
+                  <a:srgbClr val="1F2FE0"/>
+                </a:solidFill>
+                <a:latin typeface="DM Sans"/>
+              </a:rPr>
+              <a:t>JUN 2027</a:t>
+            </a:r>
+          </a:p>
+        </p:txBody>
+      </p:sp>
+      <p:sp>
+        <p:nvSpPr>
+          <p:cNvPr id="23" name="TextBox 22"/>
+          <p:cNvSpPr txBox="1"/>
+          <p:nvPr/>
+        </p:nvSpPr>
+        <p:spPr>
+          <a:xfrm>
+            <a:off x="8892311" y="3421761"/>
+            <a:ext cx="2453563" cy="640080"/>
+          </a:xfrm>
+          <a:prstGeom prst="rect">
+            <a:avLst/>
+          </a:prstGeom>
+          <a:noFill/>
+        </p:spPr>
+        <p:txBody>
+          <a:bodyPr wrap="square" lIns="0" rIns="0" tIns="0" bIns="0" anchor="t">
+            <a:spAutoFit/>
+          </a:bodyPr>
+          <a:lstStyle/>
+          <a:p>
+            <a:pPr algn="ctr">
+              <a:lnSpc>
+                <a:spcPct val="115000"/>
+              </a:lnSpc>
+            </a:pPr>
+            <a:r>
+              <a:rPr sz="1530" b="1" i="0">
+                <a:solidFill>
+                  <a:srgbClr val="0D145F"/>
+                </a:solidFill>
+                <a:latin typeface="DM Sans"/>
+              </a:rPr>
+              <a:t>4. Re-entry toolkit</a:t>
+            </a:r>
+          </a:p>
+        </p:txBody>
+      </p:sp>
+      <p:sp>
+        <p:nvSpPr>
+          <p:cNvPr id="24" name="TextBox 23"/>
+          <p:cNvSpPr txBox="1"/>
+          <p:nvPr/>
+        </p:nvSpPr>
+        <p:spPr>
+          <a:xfrm>
+            <a:off x="8892311" y="4061841"/>
+            <a:ext cx="2453563" cy="1828800"/>
+          </a:xfrm>
+          <a:prstGeom prst="rect">
+            <a:avLst/>
+          </a:prstGeom>
+          <a:noFill/>
+        </p:spPr>
+        <p:txBody>
+          <a:bodyPr wrap="square" lIns="0" rIns="0" tIns="0" bIns="0" anchor="t">
+            <a:spAutoFit/>
+          </a:bodyPr>
+          <a:lstStyle/>
+          <a:p>
+            <a:pPr algn="ctr">
+              <a:lnSpc>
+                <a:spcPct val="140000"/>
+              </a:lnSpc>
+            </a:pPr>
+            <a:r>
+              <a:rPr sz="1260" b="0" i="0">
+                <a:solidFill>
+                  <a:srgbClr val="131416"/>
+                </a:solidFill>
+                <a:latin typeface="DM Sans"/>
+              </a:rPr>
+              <a:t>Support students going home.</a:t>
+            </a:r>
+          </a:p>
+        </p:txBody>
+      </p:sp>
+    </p:spTree>
+  </p:cSld>
+  <p:clrMapOvr>
+    <a:masterClrMapping/>
+  </p:clrMapOvr>
+</p:sld>
+</file>
+
+<file path=ppt/slides/slide12.xml><?xml version="1.0" encoding="utf-8"?>
+<p:sld xmlns:a="http://schemas.openxmlformats.org/drawingml/2006/main" xmlns:p="http://schemas.openxmlformats.org/presentationml/2006/main" xmlns:r="http://schemas.openxmlformats.org/officeDocument/2006/relationships">
+  <p:cSld>
+    <p:bg>
+      <p:bgPr>
+        <a:solidFill>
+          <a:srgbClr val="FFFFFF"/>
+        </a:solidFill>
+        <a:effectLst/>
+      </p:bgPr>
+    </p:bg>
+    <p:spTree>
+      <p:nvGrpSpPr>
+        <p:cNvPr id="1" name=""/>
+        <p:cNvGrpSpPr/>
+        <p:nvPr/>
+      </p:nvGrpSpPr>
+      <p:grpSpPr/>
+      <p:pic>
+        <p:nvPicPr>
+          <p:cNvPr id="2" name="Picture 1" descr="dotband-grey.png"/>
+          <p:cNvPicPr>
+            <a:picLocks noChangeAspect="1"/>
+          </p:cNvPicPr>
+          <p:nvPr/>
+        </p:nvPicPr>
+        <p:blipFill>
+          <a:blip r:embed="rId2"/>
+          <a:stretch>
+            <a:fillRect/>
+          </a:stretch>
+        </p:blipFill>
+        <p:spPr>
+          <a:xfrm>
+            <a:off x="-45720" y="0"/>
+            <a:ext cx="1444752" cy="6858000"/>
+          </a:xfrm>
+          <a:prstGeom prst="rect">
+            <a:avLst/>
+          </a:prstGeom>
+        </p:spPr>
+      </p:pic>
+      <p:pic>
+        <p:nvPicPr>
+          <p:cNvPr id="3" name="Picture 2" descr="img_7018309521763803889.png"/>
+          <p:cNvPicPr>
+            <a:picLocks noChangeAspect="1"/>
+          </p:cNvPicPr>
+          <p:nvPr/>
+        </p:nvPicPr>
+        <p:blipFill>
+          <a:blip r:embed="rId3"/>
+          <a:stretch>
+            <a:fillRect/>
+          </a:stretch>
+        </p:blipFill>
+        <p:spPr>
+          <a:xfrm>
+            <a:off x="731520" y="640080"/>
+            <a:ext cx="5120640" cy="5394960"/>
+          </a:xfrm>
+          <a:prstGeom prst="rect">
+            <a:avLst/>
+          </a:prstGeom>
+        </p:spPr>
+      </p:pic>
+      <p:sp>
+        <p:nvSpPr>
+          <p:cNvPr id="4" name="Rounded Rectangle 3"/>
+          <p:cNvSpPr/>
+          <p:nvPr/>
+        </p:nvSpPr>
+        <p:spPr>
+          <a:xfrm>
+            <a:off x="6492240" y="1188720"/>
+            <a:ext cx="838200" cy="329184"/>
+          </a:xfrm>
+          <a:prstGeom prst="roundRect">
+            <a:avLst>
+              <a:gd name="adj" fmla="val 50000"/>
+            </a:avLst>
+          </a:prstGeom>
+          <a:solidFill>
+            <a:srgbClr val="FABC20"/>
+          </a:solidFill>
+          <a:ln>
+            <a:noFill/>
+          </a:ln>
+          <a:effectLst/>
+        </p:spPr>
+        <p:style>
+          <a:lnRef idx="1">
+            <a:schemeClr val="accent1"/>
+          </a:lnRef>
+          <a:fillRef idx="3">
+            <a:schemeClr val="accent1"/>
+          </a:fillRef>
+          <a:effectRef idx="2">
+            <a:schemeClr val="accent1"/>
+          </a:effectRef>
+          <a:fontRef idx="minor">
+            <a:schemeClr val="lt1"/>
+          </a:fontRef>
+        </p:style>
+        <p:txBody>
+          <a:bodyPr rtlCol="0" anchor="ctr" lIns="109728" rIns="109728" tIns="0" bIns="0"/>
+          <a:lstStyle/>
+          <a:p>
+            <a:pPr algn="ctr"/>
+            <a:r>
+              <a:rPr sz="1080" b="1" i="0">
+                <a:solidFill>
+                  <a:srgbClr val="131416"/>
+                </a:solidFill>
+                <a:latin typeface="DM Sans"/>
+              </a:rPr>
+              <a:t>Story</a:t>
+            </a:r>
+          </a:p>
+        </p:txBody>
+      </p:sp>
+      <p:sp>
+        <p:nvSpPr>
+          <p:cNvPr id="5" name="TextBox 4"/>
+          <p:cNvSpPr txBox="1"/>
+          <p:nvPr/>
+        </p:nvSpPr>
+        <p:spPr>
+          <a:xfrm>
+            <a:off x="6492240" y="1737360"/>
+            <a:ext cx="4967935" cy="1645920"/>
+          </a:xfrm>
+          <a:prstGeom prst="rect">
+            <a:avLst/>
+          </a:prstGeom>
+          <a:noFill/>
+        </p:spPr>
+        <p:txBody>
+          <a:bodyPr wrap="square" lIns="0" rIns="0" tIns="0" bIns="0" anchor="t">
+            <a:spAutoFit/>
+          </a:bodyPr>
+          <a:lstStyle/>
+          <a:p>
+            <a:pPr algn="l">
+              <a:lnSpc>
+                <a:spcPct val="105000"/>
+              </a:lnSpc>
+            </a:pPr>
+            <a:r>
+              <a:rPr sz="3060" b="1" i="0" spc="-31">
+                <a:solidFill>
+                  <a:srgbClr val="0D145F"/>
+                </a:solidFill>
+                <a:latin typeface="Inter"/>
+              </a:rPr>
+              <a:t>Every friendship starts with a welcome</a:t>
+            </a:r>
+          </a:p>
+        </p:txBody>
+      </p:sp>
+      <p:sp>
+        <p:nvSpPr>
+          <p:cNvPr id="6" name="TextBox 5"/>
+          <p:cNvSpPr txBox="1"/>
+          <p:nvPr/>
+        </p:nvSpPr>
+        <p:spPr>
+          <a:xfrm>
+            <a:off x="6492240" y="3007360"/>
+            <a:ext cx="4967935" cy="1828800"/>
+          </a:xfrm>
+          <a:prstGeom prst="rect">
+            <a:avLst/>
+          </a:prstGeom>
+          <a:noFill/>
+        </p:spPr>
+        <p:txBody>
+          <a:bodyPr wrap="square" lIns="0" rIns="0" tIns="0" bIns="0" anchor="t">
+            <a:spAutoFit/>
+          </a:bodyPr>
+          <a:lstStyle/>
+          <a:p>
+            <a:pPr algn="l">
+              <a:lnSpc>
+                <a:spcPct val="140000"/>
+              </a:lnSpc>
+            </a:pPr>
+            <a:r>
+              <a:rPr sz="1530" b="0" i="0" spc="-15">
+                <a:solidFill>
+                  <a:srgbClr val="131416"/>
+                </a:solidFill>
+                <a:latin typeface="DM Sans"/>
+              </a:rPr>
+              <a:t>Use this space for a short story. Replace the placeholder name with a real, consented testimony.</a:t>
+            </a:r>
+          </a:p>
+        </p:txBody>
+      </p:sp>
+    </p:spTree>
+  </p:cSld>
+  <p:clrMapOvr>
+    <a:masterClrMapping/>
+  </p:clrMapOvr>
+</p:sld>
+</file>
+
+<file path=ppt/slides/slide13.xml><?xml version="1.0" encoding="utf-8"?>
+<p:sld xmlns:a="http://schemas.openxmlformats.org/drawingml/2006/main" xmlns:p="http://schemas.openxmlformats.org/presentationml/2006/main" xmlns:r="http://schemas.openxmlformats.org/officeDocument/2006/relationships">
+  <p:cSld>
+    <p:bg>
+      <p:bgPr>
+        <a:solidFill>
+          <a:srgbClr val="FFFFFF"/>
+        </a:solidFill>
+        <a:effectLst/>
+      </p:bgPr>
+    </p:bg>
+    <p:spTree>
+      <p:nvGrpSpPr>
+        <p:cNvPr id="1" name=""/>
+        <p:cNvGrpSpPr/>
+        <p:nvPr/>
+      </p:nvGrpSpPr>
+      <p:grpSpPr/>
+      <p:pic>
+        <p:nvPicPr>
+          <p:cNvPr id="2" name="Picture 1" descr="dotband-grey.png"/>
+          <p:cNvPicPr>
+            <a:picLocks noChangeAspect="1"/>
+          </p:cNvPicPr>
+          <p:nvPr/>
+        </p:nvPicPr>
+        <p:blipFill>
+          <a:blip r:embed="rId2"/>
+          <a:stretch>
+            <a:fillRect/>
+          </a:stretch>
+        </p:blipFill>
+        <p:spPr>
+          <a:xfrm>
+            <a:off x="-45720" y="0"/>
+            <a:ext cx="1444752" cy="6858000"/>
+          </a:xfrm>
+          <a:prstGeom prst="rect">
+            <a:avLst/>
+          </a:prstGeom>
+        </p:spPr>
+      </p:pic>
+      <p:sp>
+        <p:nvSpPr>
+          <p:cNvPr id="3" name="TextBox 2"/>
+          <p:cNvSpPr txBox="1"/>
+          <p:nvPr/>
+        </p:nvSpPr>
+        <p:spPr>
+          <a:xfrm>
+            <a:off x="1371600" y="1097280"/>
+            <a:ext cx="9448495" cy="4663440"/>
+          </a:xfrm>
+          <a:prstGeom prst="rect">
+            <a:avLst/>
+          </a:prstGeom>
+          <a:noFill/>
+        </p:spPr>
+        <p:txBody>
+          <a:bodyPr wrap="square" lIns="0" rIns="0" tIns="0" bIns="0" anchor="ctr">
+            <a:spAutoFit/>
+          </a:bodyPr>
+          <a:lstStyle/>
+          <a:p>
+            <a:pPr algn="ctr">
+              <a:lnSpc>
+                <a:spcPct val="105000"/>
+              </a:lnSpc>
+            </a:pPr>
+            <a:r>
+              <a:rPr sz="3600" b="0" i="0" spc="-126">
+                <a:solidFill>
+                  <a:srgbClr val="0D145F"/>
+                </a:solidFill>
+                <a:latin typeface="Inter"/>
+              </a:rPr>
+              <a:t>Empowering the next generation to share the gospel </a:t>
+            </a:r>
+            <a:r>
+              <a:rPr sz="3600" b="0" i="0" spc="-126">
+                <a:solidFill>
+                  <a:srgbClr val="15219D"/>
+                </a:solidFill>
+                <a:latin typeface="Inter"/>
+              </a:rPr>
+              <a:t>confidently</a:t>
+            </a:r>
+            <a:r>
+              <a:rPr sz="3600" b="0" i="0" spc="-126">
+                <a:solidFill>
+                  <a:srgbClr val="0D145F"/>
+                </a:solidFill>
+                <a:latin typeface="Inter"/>
+              </a:rPr>
+              <a:t>.</a:t>
+            </a:r>
+          </a:p>
+        </p:txBody>
+      </p:sp>
+    </p:spTree>
+  </p:cSld>
+  <p:clrMapOvr>
+    <a:masterClrMapping/>
+  </p:clrMapOvr>
+</p:sld>
+</file>
+
+<file path=ppt/slides/slide14.xml><?xml version="1.0" encoding="utf-8"?>
+<p:sld xmlns:a="http://schemas.openxmlformats.org/drawingml/2006/main" xmlns:p="http://schemas.openxmlformats.org/presentationml/2006/main" xmlns:r="http://schemas.openxmlformats.org/officeDocument/2006/relationships">
+  <p:cSld>
+    <p:bg>
+      <p:bgPr>
+        <a:solidFill>
+          <a:srgbClr val="0D145F"/>
+        </a:solidFill>
+        <a:effectLst/>
+      </p:bgPr>
+    </p:bg>
+    <p:spTree>
+      <p:nvGrpSpPr>
+        <p:cNvPr id="1" name=""/>
+        <p:cNvGrpSpPr/>
+        <p:nvPr/>
+      </p:nvGrpSpPr>
+      <p:grpSpPr/>
+      <p:sp>
+        <p:nvSpPr>
+          <p:cNvPr id="2" name="Parallelogram 1"/>
+          <p:cNvSpPr/>
+          <p:nvPr/>
+        </p:nvSpPr>
+        <p:spPr>
+          <a:xfrm>
+            <a:off x="-1280160" y="-182880"/>
+            <a:ext cx="4023360" cy="7406640"/>
+          </a:xfrm>
+          <a:prstGeom prst="parallelogram">
+            <a:avLst>
+              <a:gd name="adj" fmla="val 28000"/>
+            </a:avLst>
+          </a:prstGeom>
+          <a:solidFill>
+            <a:srgbClr val="15219D">
+              <a:alpha val="55000"/>
+            </a:srgbClr>
+          </a:solidFill>
+          <a:ln>
+            <a:noFill/>
+          </a:ln>
+          <a:effectLst/>
+        </p:spPr>
+        <p:style>
+          <a:lnRef idx="1">
+            <a:schemeClr val="accent1"/>
+          </a:lnRef>
+          <a:fillRef idx="3">
+            <a:schemeClr val="accent1"/>
+          </a:fillRef>
+          <a:effectRef idx="2">
+            <a:schemeClr val="accent1"/>
+          </a:effectRef>
+          <a:fontRef idx="minor">
+            <a:schemeClr val="lt1"/>
+          </a:fontRef>
+        </p:style>
+        <p:txBody>
+          <a:bodyPr rtlCol="0" anchor="ctr"/>
+          <a:lstStyle/>
+          <a:p>
+            <a:pPr algn="ctr"/>
+          </a:p>
+        </p:txBody>
+      </p:sp>
+      <p:pic>
+        <p:nvPicPr>
+          <p:cNvPr id="3" name="Picture 2" descr="dots-periwinkle.png"/>
+          <p:cNvPicPr>
+            <a:picLocks noChangeAspect="1"/>
+          </p:cNvPicPr>
+          <p:nvPr/>
+        </p:nvPicPr>
+        <p:blipFill>
+          <a:blip r:embed="rId2"/>
+          <a:stretch>
+            <a:fillRect/>
+          </a:stretch>
+        </p:blipFill>
+        <p:spPr>
+          <a:xfrm>
+            <a:off x="-256032" y="2029968"/>
+            <a:ext cx="2286000" cy="4828032"/>
+          </a:xfrm>
+          <a:prstGeom prst="rect">
+            <a:avLst/>
+          </a:prstGeom>
+        </p:spPr>
+      </p:pic>
+      <p:sp>
+        <p:nvSpPr>
+          <p:cNvPr id="4" name="TextBox 3"/>
+          <p:cNvSpPr txBox="1"/>
+          <p:nvPr/>
+        </p:nvSpPr>
+        <p:spPr>
+          <a:xfrm>
+            <a:off x="694944" y="1828800"/>
+            <a:ext cx="10515600" cy="1463040"/>
+          </a:xfrm>
+          <a:prstGeom prst="rect">
+            <a:avLst/>
+          </a:prstGeom>
+          <a:noFill/>
+        </p:spPr>
+        <p:txBody>
+          <a:bodyPr wrap="square" lIns="0" rIns="0" tIns="0" bIns="0" anchor="t">
+            <a:spAutoFit/>
+          </a:bodyPr>
+          <a:lstStyle/>
+          <a:p>
+            <a:pPr algn="l">
+              <a:lnSpc>
+                <a:spcPct val="90000"/>
+              </a:lnSpc>
+            </a:pPr>
+            <a:r>
+              <a:rPr sz="7920" b="1" i="0" spc="-356">
+                <a:solidFill>
+                  <a:srgbClr val="FFFFFF"/>
+                </a:solidFill>
+                <a:latin typeface="Inter"/>
+              </a:rPr>
+              <a:t>THANK YOU</a:t>
+            </a:r>
+          </a:p>
+        </p:txBody>
+      </p:sp>
+      <p:sp>
+        <p:nvSpPr>
+          <p:cNvPr id="5" name="TextBox 4"/>
+          <p:cNvSpPr txBox="1"/>
+          <p:nvPr/>
+        </p:nvSpPr>
+        <p:spPr>
+          <a:xfrm>
+            <a:off x="694944" y="3246120"/>
+            <a:ext cx="10058400" cy="914400"/>
+          </a:xfrm>
+          <a:prstGeom prst="rect">
+            <a:avLst/>
+          </a:prstGeom>
+          <a:noFill/>
+        </p:spPr>
+        <p:txBody>
+          <a:bodyPr wrap="square" lIns="0" rIns="0" tIns="0" bIns="0" anchor="t">
+            <a:spAutoFit/>
+          </a:bodyPr>
+          <a:lstStyle/>
+          <a:p>
+            <a:pPr algn="l">
+              <a:lnSpc>
+                <a:spcPct val="115000"/>
+              </a:lnSpc>
+            </a:pPr>
+            <a:r>
+              <a:rPr sz="2700" b="1" i="1" spc="-54">
+                <a:solidFill>
+                  <a:srgbClr val="FABC20"/>
+                </a:solidFill>
+                <a:latin typeface="Inter"/>
+              </a:rPr>
+              <a:t>Let's build this together.</a:t>
+            </a:r>
+          </a:p>
+        </p:txBody>
+      </p:sp>
+      <p:sp>
+        <p:nvSpPr>
+          <p:cNvPr id="6" name="TextBox 5"/>
+          <p:cNvSpPr txBox="1"/>
+          <p:nvPr/>
+        </p:nvSpPr>
+        <p:spPr>
+          <a:xfrm>
+            <a:off x="694944" y="4297680"/>
+            <a:ext cx="8229600" cy="914400"/>
+          </a:xfrm>
+          <a:prstGeom prst="rect">
+            <a:avLst/>
+          </a:prstGeom>
+          <a:noFill/>
+        </p:spPr>
+        <p:txBody>
+          <a:bodyPr wrap="square" lIns="0" rIns="0" tIns="0" bIns="0" anchor="t">
+            <a:spAutoFit/>
+          </a:bodyPr>
+          <a:lstStyle/>
+          <a:p>
+            <a:pPr algn="l">
+              <a:lnSpc>
+                <a:spcPct val="140000"/>
+              </a:lnSpc>
+            </a:pPr>
+            <a:r>
+              <a:rPr sz="1440" b="0" i="0">
+                <a:solidFill>
+                  <a:srgbClr val="FFFFFF"/>
+                </a:solidFill>
+                <a:latin typeface="DM Sans"/>
+              </a:rPr>
+              <a:t>[your.email@example.org]</a:t>
+            </a:r>
+          </a:p>
+        </p:txBody>
+      </p:sp>
+      <p:pic>
+        <p:nvPicPr>
+          <p:cNvPr id="7" name="Picture 6" descr="wordmark-horizontal-mist.png"/>
+          <p:cNvPicPr>
+            <a:picLocks noChangeAspect="1"/>
+          </p:cNvPicPr>
+          <p:nvPr/>
+        </p:nvPicPr>
+        <p:blipFill>
+          <a:blip r:embed="rId3"/>
+          <a:stretch>
+            <a:fillRect/>
+          </a:stretch>
+        </p:blipFill>
+        <p:spPr>
+          <a:xfrm>
+            <a:off x="8808415" y="5961888"/>
+            <a:ext cx="2254412" cy="292608"/>
+          </a:xfrm>
+          <a:prstGeom prst="rect">
+            <a:avLst/>
+          </a:prstGeom>
+        </p:spPr>
+      </p:pic>
+    </p:spTree>
+  </p:cSld>
+  <p:clrMapOvr>
+    <a:masterClrMapping/>
+  </p:clrMapOvr>
+</p:sld>
+</file>
+
+<file path=ppt/slides/slide2.xml><?xml version="1.0" encoding="utf-8"?>
+<p:sld xmlns:a="http://schemas.openxmlformats.org/drawingml/2006/main" xmlns:p="http://schemas.openxmlformats.org/presentationml/2006/main" xmlns:r="http://schemas.openxmlformats.org/officeDocument/2006/relationships">
+  <p:cSld>
+    <p:bg>
+      <p:bgPr>
+        <a:solidFill>
+          <a:srgbClr val="FFFFFF"/>
+        </a:solidFill>
+        <a:effectLst/>
+      </p:bgPr>
+    </p:bg>
+    <p:spTree>
+      <p:nvGrpSpPr>
+        <p:cNvPr id="1" name=""/>
+        <p:cNvGrpSpPr/>
+        <p:nvPr/>
+      </p:nvGrpSpPr>
+      <p:grpSpPr/>
+      <p:pic>
+        <p:nvPicPr>
+          <p:cNvPr id="2" name="Picture 1" descr="dotband-grey.png"/>
+          <p:cNvPicPr>
+            <a:picLocks noChangeAspect="1"/>
+          </p:cNvPicPr>
+          <p:nvPr/>
+        </p:nvPicPr>
+        <p:blipFill>
+          <a:blip r:embed="rId2"/>
+          <a:stretch>
+            <a:fillRect/>
+          </a:stretch>
+        </p:blipFill>
+        <p:spPr>
+          <a:xfrm>
+            <a:off x="-45720" y="0"/>
+            <a:ext cx="1444752" cy="6858000"/>
+          </a:xfrm>
+          <a:prstGeom prst="rect">
+            <a:avLst/>
+          </a:prstGeom>
+        </p:spPr>
+      </p:pic>
+      <p:sp>
+        <p:nvSpPr>
+          <p:cNvPr id="3" name="TextBox 2"/>
+          <p:cNvSpPr txBox="1"/>
+          <p:nvPr/>
+        </p:nvSpPr>
+        <p:spPr>
+          <a:xfrm>
+            <a:off x="758952" y="612648"/>
+            <a:ext cx="10673791" cy="1188720"/>
+          </a:xfrm>
+          <a:prstGeom prst="rect">
+            <a:avLst/>
+          </a:prstGeom>
+          <a:noFill/>
+        </p:spPr>
+        <p:txBody>
+          <a:bodyPr wrap="square" lIns="0" rIns="0" tIns="0" bIns="0" anchor="t">
+            <a:spAutoFit/>
+          </a:bodyPr>
+          <a:lstStyle/>
+          <a:p>
+            <a:pPr algn="l">
+              <a:lnSpc>
+                <a:spcPct val="100000"/>
+              </a:lnSpc>
+            </a:pPr>
+            <a:r>
+              <a:rPr sz="2790" b="1" i="0" spc="-98">
+                <a:solidFill>
+                  <a:srgbClr val="0D145F"/>
+                </a:solidFill>
+                <a:latin typeface="Inter"/>
+              </a:rPr>
+              <a:t>Today</a:t>
+            </a:r>
+          </a:p>
+        </p:txBody>
+      </p:sp>
+      <p:sp>
+        <p:nvSpPr>
+          <p:cNvPr id="4" name="Rectangle 3"/>
+          <p:cNvSpPr/>
+          <p:nvPr/>
+        </p:nvSpPr>
+        <p:spPr>
+          <a:xfrm>
+            <a:off x="758952" y="1501521"/>
+            <a:ext cx="9875520" cy="12700"/>
+          </a:xfrm>
+          <a:prstGeom prst="rect">
+            <a:avLst/>
+          </a:prstGeom>
+          <a:solidFill>
+            <a:srgbClr val="D6D8DB"/>
+          </a:solidFill>
+          <a:ln>
+            <a:noFill/>
+          </a:ln>
+          <a:effectLst/>
+        </p:spPr>
+        <p:style>
+          <a:lnRef idx="1">
+            <a:schemeClr val="accent1"/>
+          </a:lnRef>
+          <a:fillRef idx="3">
+            <a:schemeClr val="accent1"/>
+          </a:fillRef>
+          <a:effectRef idx="2">
+            <a:schemeClr val="accent1"/>
+          </a:effectRef>
+          <a:fontRef idx="minor">
+            <a:schemeClr val="lt1"/>
+          </a:fontRef>
+        </p:style>
+        <p:txBody>
+          <a:bodyPr rtlCol="0" anchor="ctr"/>
+          <a:lstStyle/>
+          <a:p>
+            <a:pPr algn="ctr"/>
+          </a:p>
+        </p:txBody>
+      </p:sp>
+      <p:sp>
+        <p:nvSpPr>
+          <p:cNvPr id="5" name="TextBox 4"/>
+          <p:cNvSpPr txBox="1"/>
+          <p:nvPr/>
+        </p:nvSpPr>
+        <p:spPr>
+          <a:xfrm>
+            <a:off x="758952" y="1750187"/>
+            <a:ext cx="457200" cy="457200"/>
+          </a:xfrm>
+          <a:prstGeom prst="rect">
+            <a:avLst/>
+          </a:prstGeom>
+          <a:noFill/>
+        </p:spPr>
+        <p:txBody>
+          <a:bodyPr wrap="square" lIns="0" rIns="0" tIns="0" bIns="0" anchor="t">
+            <a:spAutoFit/>
+          </a:bodyPr>
+          <a:lstStyle/>
+          <a:p>
+            <a:pPr algn="l">
+              <a:lnSpc>
+                <a:spcPct val="115000"/>
+              </a:lnSpc>
+            </a:pPr>
+            <a:r>
+              <a:rPr sz="1530" b="1" i="0" spc="-46">
+                <a:solidFill>
+                  <a:srgbClr val="15219D"/>
+                </a:solidFill>
+                <a:latin typeface="Inter"/>
+              </a:rPr>
+              <a:t>1</a:t>
+            </a:r>
+          </a:p>
+        </p:txBody>
+      </p:sp>
+      <p:sp>
+        <p:nvSpPr>
+          <p:cNvPr id="6" name="TextBox 5"/>
+          <p:cNvSpPr txBox="1"/>
+          <p:nvPr/>
+        </p:nvSpPr>
+        <p:spPr>
+          <a:xfrm>
+            <a:off x="1307592" y="1720977"/>
+            <a:ext cx="7863840" cy="1097280"/>
+          </a:xfrm>
+          <a:prstGeom prst="rect">
+            <a:avLst/>
+          </a:prstGeom>
+          <a:noFill/>
+        </p:spPr>
+        <p:txBody>
+          <a:bodyPr wrap="square" lIns="0" rIns="0" tIns="0" bIns="0" anchor="t">
+            <a:spAutoFit/>
+          </a:bodyPr>
+          <a:lstStyle/>
+          <a:p>
+            <a:pPr algn="l">
+              <a:lnSpc>
+                <a:spcPct val="120000"/>
+              </a:lnSpc>
+            </a:pPr>
+            <a:r>
+              <a:rPr sz="2070" b="0" i="0" spc="-52">
+                <a:solidFill>
+                  <a:srgbClr val="0D145F"/>
+                </a:solidFill>
+                <a:latin typeface="Inter"/>
+              </a:rPr>
+              <a:t>Why international students</a:t>
+            </a:r>
+          </a:p>
+        </p:txBody>
+      </p:sp>
+      <p:sp>
+        <p:nvSpPr>
+          <p:cNvPr id="7" name="Rectangle 6"/>
+          <p:cNvSpPr/>
+          <p:nvPr/>
+        </p:nvSpPr>
+        <p:spPr>
+          <a:xfrm>
+            <a:off x="758952" y="2382393"/>
+            <a:ext cx="9875520" cy="12700"/>
+          </a:xfrm>
+          <a:prstGeom prst="rect">
+            <a:avLst/>
+          </a:prstGeom>
+          <a:solidFill>
+            <a:srgbClr val="D6D8DB"/>
+          </a:solidFill>
+          <a:ln>
+            <a:noFill/>
+          </a:ln>
+          <a:effectLst/>
+        </p:spPr>
+        <p:style>
+          <a:lnRef idx="1">
+            <a:schemeClr val="accent1"/>
+          </a:lnRef>
+          <a:fillRef idx="3">
+            <a:schemeClr val="accent1"/>
+          </a:fillRef>
+          <a:effectRef idx="2">
+            <a:schemeClr val="accent1"/>
+          </a:effectRef>
+          <a:fontRef idx="minor">
+            <a:schemeClr val="lt1"/>
+          </a:fontRef>
+        </p:style>
+        <p:txBody>
+          <a:bodyPr rtlCol="0" anchor="ctr"/>
+          <a:lstStyle/>
+          <a:p>
+            <a:pPr algn="ctr"/>
+          </a:p>
+        </p:txBody>
+      </p:sp>
+      <p:sp>
+        <p:nvSpPr>
+          <p:cNvPr id="8" name="TextBox 7"/>
+          <p:cNvSpPr txBox="1"/>
+          <p:nvPr/>
+        </p:nvSpPr>
+        <p:spPr>
+          <a:xfrm>
+            <a:off x="758952" y="2631059"/>
+            <a:ext cx="457200" cy="457200"/>
+          </a:xfrm>
+          <a:prstGeom prst="rect">
+            <a:avLst/>
+          </a:prstGeom>
+          <a:noFill/>
+        </p:spPr>
+        <p:txBody>
+          <a:bodyPr wrap="square" lIns="0" rIns="0" tIns="0" bIns="0" anchor="t">
+            <a:spAutoFit/>
+          </a:bodyPr>
+          <a:lstStyle/>
+          <a:p>
+            <a:pPr algn="l">
+              <a:lnSpc>
+                <a:spcPct val="115000"/>
+              </a:lnSpc>
+            </a:pPr>
+            <a:r>
+              <a:rPr sz="1530" b="1" i="0" spc="-46">
+                <a:solidFill>
+                  <a:srgbClr val="15219D"/>
+                </a:solidFill>
+                <a:latin typeface="Inter"/>
+              </a:rPr>
+              <a:t>2</a:t>
+            </a:r>
+          </a:p>
+        </p:txBody>
+      </p:sp>
+      <p:sp>
+        <p:nvSpPr>
+          <p:cNvPr id="9" name="TextBox 8"/>
+          <p:cNvSpPr txBox="1"/>
+          <p:nvPr/>
+        </p:nvSpPr>
+        <p:spPr>
+          <a:xfrm>
+            <a:off x="1307592" y="2601849"/>
+            <a:ext cx="7863840" cy="1097280"/>
+          </a:xfrm>
+          <a:prstGeom prst="rect">
+            <a:avLst/>
+          </a:prstGeom>
+          <a:noFill/>
+        </p:spPr>
+        <p:txBody>
+          <a:bodyPr wrap="square" lIns="0" rIns="0" tIns="0" bIns="0" anchor="t">
+            <a:spAutoFit/>
+          </a:bodyPr>
+          <a:lstStyle/>
+          <a:p>
+            <a:pPr algn="l">
+              <a:lnSpc>
+                <a:spcPct val="120000"/>
+              </a:lnSpc>
+            </a:pPr>
+            <a:r>
+              <a:rPr sz="2070" b="0" i="0" spc="-52">
+                <a:solidFill>
+                  <a:srgbClr val="0D145F"/>
+                </a:solidFill>
+                <a:latin typeface="Inter"/>
+              </a:rPr>
+              <a:t>What we've learned</a:t>
+            </a:r>
+          </a:p>
+        </p:txBody>
+      </p:sp>
+      <p:sp>
+        <p:nvSpPr>
+          <p:cNvPr id="10" name="Rectangle 9"/>
+          <p:cNvSpPr/>
+          <p:nvPr/>
+        </p:nvSpPr>
+        <p:spPr>
+          <a:xfrm>
+            <a:off x="758952" y="3263265"/>
+            <a:ext cx="9875520" cy="12700"/>
+          </a:xfrm>
+          <a:prstGeom prst="rect">
+            <a:avLst/>
+          </a:prstGeom>
+          <a:solidFill>
+            <a:srgbClr val="D6D8DB"/>
+          </a:solidFill>
+          <a:ln>
+            <a:noFill/>
+          </a:ln>
+          <a:effectLst/>
+        </p:spPr>
+        <p:style>
+          <a:lnRef idx="1">
+            <a:schemeClr val="accent1"/>
+          </a:lnRef>
+          <a:fillRef idx="3">
+            <a:schemeClr val="accent1"/>
+          </a:fillRef>
+          <a:effectRef idx="2">
+            <a:schemeClr val="accent1"/>
+          </a:effectRef>
+          <a:fontRef idx="minor">
+            <a:schemeClr val="lt1"/>
+          </a:fontRef>
+        </p:style>
+        <p:txBody>
+          <a:bodyPr rtlCol="0" anchor="ctr"/>
+          <a:lstStyle/>
+          <a:p>
+            <a:pPr algn="ctr"/>
+          </a:p>
+        </p:txBody>
+      </p:sp>
+      <p:sp>
+        <p:nvSpPr>
+          <p:cNvPr id="11" name="TextBox 10"/>
+          <p:cNvSpPr txBox="1"/>
+          <p:nvPr/>
+        </p:nvSpPr>
+        <p:spPr>
+          <a:xfrm>
+            <a:off x="758952" y="3511931"/>
+            <a:ext cx="457200" cy="457200"/>
+          </a:xfrm>
+          <a:prstGeom prst="rect">
+            <a:avLst/>
+          </a:prstGeom>
+          <a:noFill/>
+        </p:spPr>
+        <p:txBody>
+          <a:bodyPr wrap="square" lIns="0" rIns="0" tIns="0" bIns="0" anchor="t">
+            <a:spAutoFit/>
+          </a:bodyPr>
+          <a:lstStyle/>
+          <a:p>
+            <a:pPr algn="l">
+              <a:lnSpc>
+                <a:spcPct val="115000"/>
+              </a:lnSpc>
+            </a:pPr>
+            <a:r>
+              <a:rPr sz="1530" b="1" i="0" spc="-46">
+                <a:solidFill>
+                  <a:srgbClr val="15219D"/>
+                </a:solidFill>
+                <a:latin typeface="Inter"/>
+              </a:rPr>
+              <a:t>3</a:t>
+            </a:r>
+          </a:p>
+        </p:txBody>
+      </p:sp>
+      <p:sp>
+        <p:nvSpPr>
+          <p:cNvPr id="12" name="TextBox 11"/>
+          <p:cNvSpPr txBox="1"/>
+          <p:nvPr/>
+        </p:nvSpPr>
+        <p:spPr>
+          <a:xfrm>
+            <a:off x="1307592" y="3482721"/>
+            <a:ext cx="7863840" cy="1097280"/>
+          </a:xfrm>
+          <a:prstGeom prst="rect">
+            <a:avLst/>
+          </a:prstGeom>
+          <a:noFill/>
+        </p:spPr>
+        <p:txBody>
+          <a:bodyPr wrap="square" lIns="0" rIns="0" tIns="0" bIns="0" anchor="t">
+            <a:spAutoFit/>
+          </a:bodyPr>
+          <a:lstStyle/>
+          <a:p>
+            <a:pPr algn="l">
+              <a:lnSpc>
+                <a:spcPct val="120000"/>
+              </a:lnSpc>
+            </a:pPr>
+            <a:r>
+              <a:rPr sz="2070" b="0" i="0" spc="-52">
+                <a:solidFill>
+                  <a:srgbClr val="0D145F"/>
+                </a:solidFill>
+                <a:latin typeface="Inter"/>
+              </a:rPr>
+              <a:t>How we can work together</a:t>
+            </a:r>
+          </a:p>
+        </p:txBody>
+      </p:sp>
+      <p:sp>
+        <p:nvSpPr>
+          <p:cNvPr id="13" name="Rectangle 12"/>
+          <p:cNvSpPr/>
+          <p:nvPr/>
+        </p:nvSpPr>
+        <p:spPr>
+          <a:xfrm>
+            <a:off x="758952" y="4144137"/>
+            <a:ext cx="9875520" cy="12700"/>
+          </a:xfrm>
+          <a:prstGeom prst="rect">
+            <a:avLst/>
+          </a:prstGeom>
+          <a:solidFill>
+            <a:srgbClr val="D6D8DB"/>
+          </a:solidFill>
+          <a:ln>
+            <a:noFill/>
+          </a:ln>
+          <a:effectLst/>
+        </p:spPr>
+        <p:style>
+          <a:lnRef idx="1">
+            <a:schemeClr val="accent1"/>
+          </a:lnRef>
+          <a:fillRef idx="3">
+            <a:schemeClr val="accent1"/>
+          </a:fillRef>
+          <a:effectRef idx="2">
+            <a:schemeClr val="accent1"/>
+          </a:effectRef>
+          <a:fontRef idx="minor">
+            <a:schemeClr val="lt1"/>
+          </a:fontRef>
+        </p:style>
+        <p:txBody>
+          <a:bodyPr rtlCol="0" anchor="ctr"/>
+          <a:lstStyle/>
+          <a:p>
+            <a:pPr algn="ctr"/>
+          </a:p>
+        </p:txBody>
+      </p:sp>
+      <p:sp>
+        <p:nvSpPr>
+          <p:cNvPr id="14" name="TextBox 13"/>
+          <p:cNvSpPr txBox="1"/>
+          <p:nvPr/>
+        </p:nvSpPr>
+        <p:spPr>
+          <a:xfrm>
+            <a:off x="758952" y="4392803"/>
+            <a:ext cx="457200" cy="457200"/>
+          </a:xfrm>
+          <a:prstGeom prst="rect">
+            <a:avLst/>
+          </a:prstGeom>
+          <a:noFill/>
+        </p:spPr>
+        <p:txBody>
+          <a:bodyPr wrap="square" lIns="0" rIns="0" tIns="0" bIns="0" anchor="t">
+            <a:spAutoFit/>
+          </a:bodyPr>
+          <a:lstStyle/>
+          <a:p>
+            <a:pPr algn="l">
+              <a:lnSpc>
+                <a:spcPct val="115000"/>
+              </a:lnSpc>
+            </a:pPr>
+            <a:r>
+              <a:rPr sz="1530" b="1" i="0" spc="-46">
+                <a:solidFill>
+                  <a:srgbClr val="15219D"/>
+                </a:solidFill>
+                <a:latin typeface="Inter"/>
+              </a:rPr>
+              <a:t>4</a:t>
+            </a:r>
+          </a:p>
+        </p:txBody>
+      </p:sp>
+      <p:sp>
+        <p:nvSpPr>
+          <p:cNvPr id="15" name="TextBox 14"/>
+          <p:cNvSpPr txBox="1"/>
+          <p:nvPr/>
+        </p:nvSpPr>
+        <p:spPr>
+          <a:xfrm>
+            <a:off x="1307592" y="4363593"/>
+            <a:ext cx="7863840" cy="1097280"/>
+          </a:xfrm>
+          <a:prstGeom prst="rect">
+            <a:avLst/>
+          </a:prstGeom>
+          <a:noFill/>
+        </p:spPr>
+        <p:txBody>
+          <a:bodyPr wrap="square" lIns="0" rIns="0" tIns="0" bIns="0" anchor="t">
+            <a:spAutoFit/>
+          </a:bodyPr>
+          <a:lstStyle/>
+          <a:p>
+            <a:pPr algn="l">
+              <a:lnSpc>
+                <a:spcPct val="120000"/>
+              </a:lnSpc>
+            </a:pPr>
+            <a:r>
+              <a:rPr sz="2070" b="0" i="0" spc="-52">
+                <a:solidFill>
+                  <a:srgbClr val="0D145F"/>
+                </a:solidFill>
+                <a:latin typeface="Inter"/>
+              </a:rPr>
+              <a:t>Next steps</a:t>
+            </a:r>
+          </a:p>
+        </p:txBody>
+      </p:sp>
+    </p:spTree>
+  </p:cSld>
+  <p:clrMapOvr>
+    <a:masterClrMapping/>
+  </p:clrMapOvr>
+</p:sld>
+</file>
+
+<file path=ppt/slides/slide3.xml><?xml version="1.0" encoding="utf-8"?>
 <p:sld xmlns:a="http://schemas.openxmlformats.org/drawingml/2006/main" xmlns:p="http://schemas.openxmlformats.org/presentationml/2006/main" xmlns:r="http://schemas.openxmlformats.org/officeDocument/2006/relationships">
   <p:cSld>
     <p:bg>
@@ -4150,8 +6067,8 @@
         </p:nvSpPr>
         <p:spPr>
           <a:xfrm>
-            <a:off x="731520" y="640080"/>
-            <a:ext cx="10728655" cy="1097280"/>
+            <a:off x="822960" y="2413635"/>
+            <a:ext cx="5486400" cy="365760"/>
           </a:xfrm>
           <a:prstGeom prst="rect">
             <a:avLst/>
@@ -4166,34 +6083,152 @@
           <a:p>
             <a:pPr algn="l">
               <a:lnSpc>
-                <a:spcPct val="105000"/>
+                <a:spcPct val="120000"/>
               </a:lnSpc>
             </a:pPr>
             <a:r>
-              <a:rPr sz="3600" b="1" i="0" spc="-36">
+              <a:rPr sz="1260" b="1" i="0" spc="202">
+                <a:solidFill>
+                  <a:srgbClr val="15219D"/>
+                </a:solidFill>
+                <a:latin typeface="DM Sans"/>
+              </a:rPr>
+              <a:t>01</a:t>
+            </a:r>
+          </a:p>
+        </p:txBody>
+      </p:sp>
+      <p:sp>
+        <p:nvSpPr>
+          <p:cNvPr id="3" name="TextBox 2"/>
+          <p:cNvSpPr txBox="1"/>
+          <p:nvPr/>
+        </p:nvSpPr>
+        <p:spPr>
+          <a:xfrm>
+            <a:off x="822960" y="2962275"/>
+            <a:ext cx="6309360" cy="1299210"/>
+          </a:xfrm>
+          <a:prstGeom prst="rect">
+            <a:avLst/>
+          </a:prstGeom>
+          <a:noFill/>
+        </p:spPr>
+        <p:txBody>
+          <a:bodyPr wrap="square" lIns="0" rIns="0" tIns="0" bIns="0" anchor="t">
+            <a:spAutoFit/>
+          </a:bodyPr>
+          <a:lstStyle/>
+          <a:p>
+            <a:pPr algn="l">
+              <a:lnSpc>
+                <a:spcPct val="95000"/>
+              </a:lnSpc>
+            </a:pPr>
+            <a:r>
+              <a:rPr sz="6750" b="1" i="0" spc="-304">
                 <a:solidFill>
                   <a:srgbClr val="0D145F"/>
                 </a:solidFill>
                 <a:latin typeface="Inter"/>
               </a:rPr>
-              <a:t>Next twelve months</a:t>
-            </a:r>
-          </a:p>
-        </p:txBody>
-      </p:sp>
-      <p:sp>
-        <p:nvSpPr>
-          <p:cNvPr id="3" name="Rectangle 2"/>
+              <a:t>Why </a:t>
+            </a:r>
+            <a:r>
+              <a:rPr sz="6750" b="1" i="0" spc="-304">
+                <a:solidFill>
+                  <a:srgbClr val="15219D"/>
+                </a:solidFill>
+                <a:latin typeface="Inter"/>
+              </a:rPr>
+              <a:t>Now</a:t>
+            </a:r>
+          </a:p>
+        </p:txBody>
+      </p:sp>
+      <p:sp>
+        <p:nvSpPr>
+          <p:cNvPr id="4" name="Oval 3"/>
           <p:cNvSpPr/>
           <p:nvPr/>
         </p:nvSpPr>
         <p:spPr>
           <a:xfrm>
-            <a:off x="2072601" y="2929890"/>
-            <a:ext cx="8046491" cy="38100"/>
-          </a:xfrm>
-          <a:prstGeom prst="rect">
-            <a:avLst/>
+            <a:off x="7132320" y="1188720"/>
+            <a:ext cx="3374136" cy="3374136"/>
+          </a:xfrm>
+          <a:prstGeom prst="ellipse">
+            <a:avLst/>
+          </a:prstGeom>
+          <a:solidFill>
+            <a:srgbClr val="9C90E6"/>
+          </a:solidFill>
+          <a:ln>
+            <a:noFill/>
+          </a:ln>
+          <a:effectLst/>
+        </p:spPr>
+        <p:style>
+          <a:lnRef idx="1">
+            <a:schemeClr val="accent1"/>
+          </a:lnRef>
+          <a:fillRef idx="3">
+            <a:schemeClr val="accent1"/>
+          </a:fillRef>
+          <a:effectRef idx="2">
+            <a:schemeClr val="accent1"/>
+          </a:effectRef>
+          <a:fontRef idx="minor">
+            <a:schemeClr val="lt1"/>
+          </a:fontRef>
+        </p:style>
+        <p:txBody>
+          <a:bodyPr rtlCol="0" anchor="ctr"/>
+          <a:lstStyle/>
+          <a:p>
+            <a:pPr algn="ctr"/>
+          </a:p>
+        </p:txBody>
+      </p:sp>
+      <p:pic>
+        <p:nvPicPr>
+          <p:cNvPr id="5" name="Picture 4" descr="dots-navy.png"/>
+          <p:cNvPicPr>
+            <a:picLocks noChangeAspect="1"/>
+          </p:cNvPicPr>
+          <p:nvPr/>
+        </p:nvPicPr>
+        <p:blipFill>
+          <a:blip r:embed="rId2"/>
+          <a:stretch>
+            <a:fillRect/>
+          </a:stretch>
+        </p:blipFill>
+        <p:spPr>
+          <a:xfrm>
+            <a:off x="9848088" y="1271016"/>
+            <a:ext cx="1234440" cy="1234440"/>
+          </a:xfrm>
+          <a:prstGeom prst="rect">
+            <a:avLst/>
+          </a:prstGeom>
+        </p:spPr>
+      </p:pic>
+      <p:sp>
+        <p:nvSpPr>
+          <p:cNvPr id="6" name="Rounded Rectangle 5"/>
+          <p:cNvSpPr/>
+          <p:nvPr/>
+        </p:nvSpPr>
+        <p:spPr>
+          <a:xfrm>
+            <a:off x="8366760" y="2587752"/>
+            <a:ext cx="2386584" cy="2386584"/>
+          </a:xfrm>
+          <a:prstGeom prst="roundRect">
+            <a:avLst>
+              <a:gd name="adj" fmla="val 20000"/>
+            </a:avLst>
           </a:prstGeom>
           <a:solidFill>
             <a:srgbClr val="0D145F"/>
@@ -4225,238 +6260,9 @@
           </a:p>
         </p:txBody>
       </p:sp>
-      <p:sp>
-        <p:nvSpPr>
-          <p:cNvPr id="4" name="Oval 3"/>
-          <p:cNvSpPr/>
-          <p:nvPr/>
-        </p:nvSpPr>
-        <p:spPr>
-          <a:xfrm>
-            <a:off x="1661121" y="2537460"/>
-            <a:ext cx="822960" cy="822960"/>
-          </a:xfrm>
-          <a:prstGeom prst="ellipse">
-            <a:avLst/>
-          </a:prstGeom>
-          <a:solidFill>
-            <a:srgbClr val="9C90E6"/>
-          </a:solidFill>
-          <a:ln>
-            <a:noFill/>
-          </a:ln>
-          <a:effectLst/>
-        </p:spPr>
-        <p:style>
-          <a:lnRef idx="1">
-            <a:schemeClr val="accent1"/>
-          </a:lnRef>
-          <a:fillRef idx="3">
-            <a:schemeClr val="accent1"/>
-          </a:fillRef>
-          <a:effectRef idx="2">
-            <a:schemeClr val="accent1"/>
-          </a:effectRef>
-          <a:fontRef idx="minor">
-            <a:schemeClr val="lt1"/>
-          </a:fontRef>
-        </p:style>
-        <p:txBody>
-          <a:bodyPr rtlCol="0" anchor="ctr"/>
-          <a:lstStyle/>
-          <a:p>
-            <a:pPr algn="ctr"/>
-          </a:p>
-        </p:txBody>
-      </p:sp>
       <p:pic>
         <p:nvPicPr>
-          <p:cNvPr id="5" name="Picture 4" descr="search.png"/>
-          <p:cNvPicPr>
-            <a:picLocks noChangeAspect="1"/>
-          </p:cNvPicPr>
-          <p:nvPr/>
-        </p:nvPicPr>
-        <p:blipFill>
-          <a:blip r:embed="rId2"/>
-          <a:stretch>
-            <a:fillRect/>
-          </a:stretch>
-        </p:blipFill>
-        <p:spPr>
-          <a:xfrm>
-            <a:off x="1858631" y="2734970"/>
-            <a:ext cx="427940" cy="427940"/>
-          </a:xfrm>
-          <a:prstGeom prst="rect">
-            <a:avLst/>
-          </a:prstGeom>
-        </p:spPr>
-      </p:pic>
-      <p:sp>
-        <p:nvSpPr>
-          <p:cNvPr id="6" name="TextBox 5"/>
-          <p:cNvSpPr txBox="1"/>
-          <p:nvPr/>
-        </p:nvSpPr>
-        <p:spPr>
-          <a:xfrm>
-            <a:off x="845819" y="2080260"/>
-            <a:ext cx="2453563" cy="320040"/>
-          </a:xfrm>
-          <a:prstGeom prst="rect">
-            <a:avLst/>
-          </a:prstGeom>
-          <a:noFill/>
-        </p:spPr>
-        <p:txBody>
-          <a:bodyPr wrap="square" lIns="0" rIns="0" tIns="0" bIns="0" anchor="t">
-            <a:spAutoFit/>
-          </a:bodyPr>
-          <a:lstStyle/>
-          <a:p>
-            <a:pPr algn="ctr">
-              <a:lnSpc>
-                <a:spcPct val="115000"/>
-              </a:lnSpc>
-            </a:pPr>
-            <a:r>
-              <a:rPr sz="1200" b="1" i="0" spc="72">
-                <a:solidFill>
-                  <a:srgbClr val="1F2FE0"/>
-                </a:solidFill>
-                <a:latin typeface="DM Sans"/>
-              </a:rPr>
-              <a:t>NOV 2026</a:t>
-            </a:r>
-          </a:p>
-        </p:txBody>
-      </p:sp>
-      <p:sp>
-        <p:nvSpPr>
-          <p:cNvPr id="7" name="TextBox 6"/>
-          <p:cNvSpPr txBox="1"/>
-          <p:nvPr/>
-        </p:nvSpPr>
-        <p:spPr>
-          <a:xfrm>
-            <a:off x="845819" y="3634740"/>
-            <a:ext cx="2453563" cy="640080"/>
-          </a:xfrm>
-          <a:prstGeom prst="rect">
-            <a:avLst/>
-          </a:prstGeom>
-          <a:noFill/>
-        </p:spPr>
-        <p:txBody>
-          <a:bodyPr wrap="square" lIns="0" rIns="0" tIns="0" bIns="0" anchor="t">
-            <a:spAutoFit/>
-          </a:bodyPr>
-          <a:lstStyle/>
-          <a:p>
-            <a:pPr algn="ctr">
-              <a:lnSpc>
-                <a:spcPct val="115000"/>
-              </a:lnSpc>
-            </a:pPr>
-            <a:r>
-              <a:rPr sz="1700" b="1" i="0">
-                <a:solidFill>
-                  <a:srgbClr val="0D145F"/>
-                </a:solidFill>
-                <a:latin typeface="DM Sans"/>
-              </a:rPr>
-              <a:t>1. Partner survey</a:t>
-            </a:r>
-          </a:p>
-        </p:txBody>
-      </p:sp>
-      <p:sp>
-        <p:nvSpPr>
-          <p:cNvPr id="8" name="TextBox 7"/>
-          <p:cNvSpPr txBox="1"/>
-          <p:nvPr/>
-        </p:nvSpPr>
-        <p:spPr>
-          <a:xfrm>
-            <a:off x="845819" y="4274820"/>
-            <a:ext cx="2453563" cy="1828800"/>
-          </a:xfrm>
-          <a:prstGeom prst="rect">
-            <a:avLst/>
-          </a:prstGeom>
-          <a:noFill/>
-        </p:spPr>
-        <p:txBody>
-          <a:bodyPr wrap="square" lIns="0" rIns="0" tIns="0" bIns="0" anchor="t">
-            <a:spAutoFit/>
-          </a:bodyPr>
-          <a:lstStyle/>
-          <a:p>
-            <a:pPr algn="ctr">
-              <a:lnSpc>
-                <a:spcPct val="140000"/>
-              </a:lnSpc>
-            </a:pPr>
-            <a:r>
-              <a:rPr sz="1400" b="0" i="0">
-                <a:solidFill>
-                  <a:srgbClr val="131416"/>
-                </a:solidFill>
-                <a:latin typeface="DM Sans"/>
-              </a:rPr>
-              <a:t>Listen before we build.</a:t>
-            </a:r>
-          </a:p>
-        </p:txBody>
-      </p:sp>
-      <p:sp>
-        <p:nvSpPr>
-          <p:cNvPr id="9" name="Oval 8"/>
-          <p:cNvSpPr/>
-          <p:nvPr/>
-        </p:nvSpPr>
-        <p:spPr>
-          <a:xfrm>
-            <a:off x="4343285" y="2537460"/>
-            <a:ext cx="822960" cy="822960"/>
-          </a:xfrm>
-          <a:prstGeom prst="ellipse">
-            <a:avLst/>
-          </a:prstGeom>
-          <a:solidFill>
-            <a:srgbClr val="9C90E6"/>
-          </a:solidFill>
-          <a:ln>
-            <a:noFill/>
-          </a:ln>
-          <a:effectLst/>
-        </p:spPr>
-        <p:style>
-          <a:lnRef idx="1">
-            <a:schemeClr val="accent1"/>
-          </a:lnRef>
-          <a:fillRef idx="3">
-            <a:schemeClr val="accent1"/>
-          </a:fillRef>
-          <a:effectRef idx="2">
-            <a:schemeClr val="accent1"/>
-          </a:effectRef>
-          <a:fontRef idx="minor">
-            <a:schemeClr val="lt1"/>
-          </a:fontRef>
-        </p:style>
-        <p:txBody>
-          <a:bodyPr rtlCol="0" anchor="ctr"/>
-          <a:lstStyle/>
-          <a:p>
-            <a:pPr algn="ctr"/>
-          </a:p>
-        </p:txBody>
-      </p:sp>
-      <p:pic>
-        <p:nvPicPr>
-          <p:cNvPr id="10" name="Picture 9" descr="calendar.png"/>
+          <p:cNvPr id="7" name="Picture 6" descr="circle-help.png"/>
           <p:cNvPicPr>
             <a:picLocks noChangeAspect="1"/>
           </p:cNvPicPr>
@@ -4470,8 +6276,8 @@
         </p:blipFill>
         <p:spPr>
           <a:xfrm>
-            <a:off x="4540795" y="2734970"/>
-            <a:ext cx="427940" cy="427940"/>
+            <a:off x="8695944" y="2916936"/>
+            <a:ext cx="1728216" cy="1728216"/>
           </a:xfrm>
           <a:prstGeom prst="rect">
             <a:avLst/>
@@ -4480,619 +6286,17 @@
       </p:pic>
       <p:sp>
         <p:nvSpPr>
-          <p:cNvPr id="11" name="TextBox 10"/>
-          <p:cNvSpPr txBox="1"/>
-          <p:nvPr/>
-        </p:nvSpPr>
-        <p:spPr>
-          <a:xfrm>
-            <a:off x="3527983" y="2080260"/>
-            <a:ext cx="2453563" cy="320040"/>
-          </a:xfrm>
-          <a:prstGeom prst="rect">
-            <a:avLst/>
-          </a:prstGeom>
-          <a:noFill/>
-        </p:spPr>
-        <p:txBody>
-          <a:bodyPr wrap="square" lIns="0" rIns="0" tIns="0" bIns="0" anchor="t">
-            <a:spAutoFit/>
-          </a:bodyPr>
-          <a:lstStyle/>
-          <a:p>
-            <a:pPr algn="ctr">
-              <a:lnSpc>
-                <a:spcPct val="115000"/>
-              </a:lnSpc>
-            </a:pPr>
-            <a:r>
-              <a:rPr sz="1200" b="1" i="0" spc="72">
-                <a:solidFill>
-                  <a:srgbClr val="1F2FE0"/>
-                </a:solidFill>
-                <a:latin typeface="DM Sans"/>
-              </a:rPr>
-              <a:t>JAN 2027</a:t>
-            </a:r>
-          </a:p>
-        </p:txBody>
-      </p:sp>
-      <p:sp>
-        <p:nvSpPr>
-          <p:cNvPr id="12" name="TextBox 11"/>
-          <p:cNvSpPr txBox="1"/>
-          <p:nvPr/>
-        </p:nvSpPr>
-        <p:spPr>
-          <a:xfrm>
-            <a:off x="3527983" y="3634740"/>
-            <a:ext cx="2453563" cy="640080"/>
-          </a:xfrm>
-          <a:prstGeom prst="rect">
-            <a:avLst/>
-          </a:prstGeom>
-          <a:noFill/>
-        </p:spPr>
-        <p:txBody>
-          <a:bodyPr wrap="square" lIns="0" rIns="0" tIns="0" bIns="0" anchor="t">
-            <a:spAutoFit/>
-          </a:bodyPr>
-          <a:lstStyle/>
-          <a:p>
-            <a:pPr algn="ctr">
-              <a:lnSpc>
-                <a:spcPct val="115000"/>
-              </a:lnSpc>
-            </a:pPr>
-            <a:r>
-              <a:rPr sz="1700" b="1" i="0">
-                <a:solidFill>
-                  <a:srgbClr val="0D145F"/>
-                </a:solidFill>
-                <a:latin typeface="DM Sans"/>
-              </a:rPr>
-              <a:t>2. Shared calendar</a:t>
-            </a:r>
-          </a:p>
-        </p:txBody>
-      </p:sp>
-      <p:sp>
-        <p:nvSpPr>
-          <p:cNvPr id="13" name="TextBox 12"/>
-          <p:cNvSpPr txBox="1"/>
-          <p:nvPr/>
-        </p:nvSpPr>
-        <p:spPr>
-          <a:xfrm>
-            <a:off x="3527983" y="4274820"/>
-            <a:ext cx="2453563" cy="1828800"/>
-          </a:xfrm>
-          <a:prstGeom prst="rect">
-            <a:avLst/>
-          </a:prstGeom>
-          <a:noFill/>
-        </p:spPr>
-        <p:txBody>
-          <a:bodyPr wrap="square" lIns="0" rIns="0" tIns="0" bIns="0" anchor="t">
-            <a:spAutoFit/>
-          </a:bodyPr>
-          <a:lstStyle/>
-          <a:p>
-            <a:pPr algn="ctr">
-              <a:lnSpc>
-                <a:spcPct val="140000"/>
-              </a:lnSpc>
-            </a:pPr>
-            <a:r>
-              <a:rPr sz="1400" b="0" i="0">
-                <a:solidFill>
-                  <a:srgbClr val="131416"/>
-                </a:solidFill>
-                <a:latin typeface="DM Sans"/>
-              </a:rPr>
-              <a:t>One view of campus events.</a:t>
-            </a:r>
-          </a:p>
-        </p:txBody>
-      </p:sp>
-      <p:sp>
-        <p:nvSpPr>
-          <p:cNvPr id="14" name="Oval 13"/>
+          <p:cNvPr id="8" name="Oval 7"/>
           <p:cNvSpPr/>
           <p:nvPr/>
         </p:nvSpPr>
         <p:spPr>
           <a:xfrm>
-            <a:off x="7025449" y="2537460"/>
-            <a:ext cx="822960" cy="822960"/>
+            <a:off x="7626096" y="4069080"/>
+            <a:ext cx="658368" cy="658368"/>
           </a:xfrm>
           <a:prstGeom prst="ellipse">
             <a:avLst/>
-          </a:prstGeom>
-          <a:solidFill>
-            <a:srgbClr val="9C90E6"/>
-          </a:solidFill>
-          <a:ln>
-            <a:noFill/>
-          </a:ln>
-          <a:effectLst/>
-        </p:spPr>
-        <p:style>
-          <a:lnRef idx="1">
-            <a:schemeClr val="accent1"/>
-          </a:lnRef>
-          <a:fillRef idx="3">
-            <a:schemeClr val="accent1"/>
-          </a:fillRef>
-          <a:effectRef idx="2">
-            <a:schemeClr val="accent1"/>
-          </a:effectRef>
-          <a:fontRef idx="minor">
-            <a:schemeClr val="lt1"/>
-          </a:fontRef>
-        </p:style>
-        <p:txBody>
-          <a:bodyPr rtlCol="0" anchor="ctr"/>
-          <a:lstStyle/>
-          <a:p>
-            <a:pPr algn="ctr"/>
-          </a:p>
-        </p:txBody>
-      </p:sp>
-      <p:pic>
-        <p:nvPicPr>
-          <p:cNvPr id="15" name="Picture 14" descr="users-round.png"/>
-          <p:cNvPicPr>
-            <a:picLocks noChangeAspect="1"/>
-          </p:cNvPicPr>
-          <p:nvPr/>
-        </p:nvPicPr>
-        <p:blipFill>
-          <a:blip r:embed="rId4"/>
-          <a:stretch>
-            <a:fillRect/>
-          </a:stretch>
-        </p:blipFill>
-        <p:spPr>
-          <a:xfrm>
-            <a:off x="7222959" y="2734970"/>
-            <a:ext cx="427940" cy="427940"/>
-          </a:xfrm>
-          <a:prstGeom prst="rect">
-            <a:avLst/>
-          </a:prstGeom>
-        </p:spPr>
-      </p:pic>
-      <p:sp>
-        <p:nvSpPr>
-          <p:cNvPr id="16" name="TextBox 15"/>
-          <p:cNvSpPr txBox="1"/>
-          <p:nvPr/>
-        </p:nvSpPr>
-        <p:spPr>
-          <a:xfrm>
-            <a:off x="6210147" y="2080260"/>
-            <a:ext cx="2453563" cy="320040"/>
-          </a:xfrm>
-          <a:prstGeom prst="rect">
-            <a:avLst/>
-          </a:prstGeom>
-          <a:noFill/>
-        </p:spPr>
-        <p:txBody>
-          <a:bodyPr wrap="square" lIns="0" rIns="0" tIns="0" bIns="0" anchor="t">
-            <a:spAutoFit/>
-          </a:bodyPr>
-          <a:lstStyle/>
-          <a:p>
-            <a:pPr algn="ctr">
-              <a:lnSpc>
-                <a:spcPct val="115000"/>
-              </a:lnSpc>
-            </a:pPr>
-            <a:r>
-              <a:rPr sz="1200" b="1" i="0" spc="72">
-                <a:solidFill>
-                  <a:srgbClr val="1F2FE0"/>
-                </a:solidFill>
-                <a:latin typeface="DM Sans"/>
-              </a:rPr>
-              <a:t>MAR 2027</a:t>
-            </a:r>
-          </a:p>
-        </p:txBody>
-      </p:sp>
-      <p:sp>
-        <p:nvSpPr>
-          <p:cNvPr id="17" name="TextBox 16"/>
-          <p:cNvSpPr txBox="1"/>
-          <p:nvPr/>
-        </p:nvSpPr>
-        <p:spPr>
-          <a:xfrm>
-            <a:off x="6210147" y="3634740"/>
-            <a:ext cx="2453563" cy="640080"/>
-          </a:xfrm>
-          <a:prstGeom prst="rect">
-            <a:avLst/>
-          </a:prstGeom>
-          <a:noFill/>
-        </p:spPr>
-        <p:txBody>
-          <a:bodyPr wrap="square" lIns="0" rIns="0" tIns="0" bIns="0" anchor="t">
-            <a:spAutoFit/>
-          </a:bodyPr>
-          <a:lstStyle/>
-          <a:p>
-            <a:pPr algn="ctr">
-              <a:lnSpc>
-                <a:spcPct val="115000"/>
-              </a:lnSpc>
-            </a:pPr>
-            <a:r>
-              <a:rPr sz="1700" b="1" i="0">
-                <a:solidFill>
-                  <a:srgbClr val="0D145F"/>
-                </a:solidFill>
-                <a:latin typeface="DM Sans"/>
-              </a:rPr>
-              <a:t>3. Summit</a:t>
-            </a:r>
-          </a:p>
-        </p:txBody>
-      </p:sp>
-      <p:sp>
-        <p:nvSpPr>
-          <p:cNvPr id="18" name="TextBox 17"/>
-          <p:cNvSpPr txBox="1"/>
-          <p:nvPr/>
-        </p:nvSpPr>
-        <p:spPr>
-          <a:xfrm>
-            <a:off x="6210147" y="4274820"/>
-            <a:ext cx="2453563" cy="1828800"/>
-          </a:xfrm>
-          <a:prstGeom prst="rect">
-            <a:avLst/>
-          </a:prstGeom>
-          <a:noFill/>
-        </p:spPr>
-        <p:txBody>
-          <a:bodyPr wrap="square" lIns="0" rIns="0" tIns="0" bIns="0" anchor="t">
-            <a:spAutoFit/>
-          </a:bodyPr>
-          <a:lstStyle/>
-          <a:p>
-            <a:pPr algn="ctr">
-              <a:lnSpc>
-                <a:spcPct val="140000"/>
-              </a:lnSpc>
-            </a:pPr>
-            <a:r>
-              <a:rPr sz="1400" b="0" i="0">
-                <a:solidFill>
-                  <a:srgbClr val="131416"/>
-                </a:solidFill>
-                <a:latin typeface="DM Sans"/>
-              </a:rPr>
-              <a:t>Gather in person.</a:t>
-            </a:r>
-          </a:p>
-        </p:txBody>
-      </p:sp>
-      <p:sp>
-        <p:nvSpPr>
-          <p:cNvPr id="19" name="Oval 18"/>
-          <p:cNvSpPr/>
-          <p:nvPr/>
-        </p:nvSpPr>
-        <p:spPr>
-          <a:xfrm>
-            <a:off x="9707613" y="2537460"/>
-            <a:ext cx="822960" cy="822960"/>
-          </a:xfrm>
-          <a:prstGeom prst="ellipse">
-            <a:avLst/>
-          </a:prstGeom>
-          <a:solidFill>
-            <a:srgbClr val="9C90E6"/>
-          </a:solidFill>
-          <a:ln>
-            <a:noFill/>
-          </a:ln>
-          <a:effectLst/>
-        </p:spPr>
-        <p:style>
-          <a:lnRef idx="1">
-            <a:schemeClr val="accent1"/>
-          </a:lnRef>
-          <a:fillRef idx="3">
-            <a:schemeClr val="accent1"/>
-          </a:fillRef>
-          <a:effectRef idx="2">
-            <a:schemeClr val="accent1"/>
-          </a:effectRef>
-          <a:fontRef idx="minor">
-            <a:schemeClr val="lt1"/>
-          </a:fontRef>
-        </p:style>
-        <p:txBody>
-          <a:bodyPr rtlCol="0" anchor="ctr"/>
-          <a:lstStyle/>
-          <a:p>
-            <a:pPr algn="ctr"/>
-          </a:p>
-        </p:txBody>
-      </p:sp>
-      <p:pic>
-        <p:nvPicPr>
-          <p:cNvPr id="20" name="Picture 19" descr="plane-takeoff.png"/>
-          <p:cNvPicPr>
-            <a:picLocks noChangeAspect="1"/>
-          </p:cNvPicPr>
-          <p:nvPr/>
-        </p:nvPicPr>
-        <p:blipFill>
-          <a:blip r:embed="rId5"/>
-          <a:stretch>
-            <a:fillRect/>
-          </a:stretch>
-        </p:blipFill>
-        <p:spPr>
-          <a:xfrm>
-            <a:off x="9905123" y="2734970"/>
-            <a:ext cx="427940" cy="427940"/>
-          </a:xfrm>
-          <a:prstGeom prst="rect">
-            <a:avLst/>
-          </a:prstGeom>
-        </p:spPr>
-      </p:pic>
-      <p:sp>
-        <p:nvSpPr>
-          <p:cNvPr id="21" name="TextBox 20"/>
-          <p:cNvSpPr txBox="1"/>
-          <p:nvPr/>
-        </p:nvSpPr>
-        <p:spPr>
-          <a:xfrm>
-            <a:off x="8892311" y="2080260"/>
-            <a:ext cx="2453563" cy="320040"/>
-          </a:xfrm>
-          <a:prstGeom prst="rect">
-            <a:avLst/>
-          </a:prstGeom>
-          <a:noFill/>
-        </p:spPr>
-        <p:txBody>
-          <a:bodyPr wrap="square" lIns="0" rIns="0" tIns="0" bIns="0" anchor="t">
-            <a:spAutoFit/>
-          </a:bodyPr>
-          <a:lstStyle/>
-          <a:p>
-            <a:pPr algn="ctr">
-              <a:lnSpc>
-                <a:spcPct val="115000"/>
-              </a:lnSpc>
-            </a:pPr>
-            <a:r>
-              <a:rPr sz="1200" b="1" i="0" spc="72">
-                <a:solidFill>
-                  <a:srgbClr val="1F2FE0"/>
-                </a:solidFill>
-                <a:latin typeface="DM Sans"/>
-              </a:rPr>
-              <a:t>JUN 2027</a:t>
-            </a:r>
-          </a:p>
-        </p:txBody>
-      </p:sp>
-      <p:sp>
-        <p:nvSpPr>
-          <p:cNvPr id="22" name="TextBox 21"/>
-          <p:cNvSpPr txBox="1"/>
-          <p:nvPr/>
-        </p:nvSpPr>
-        <p:spPr>
-          <a:xfrm>
-            <a:off x="8892311" y="3634740"/>
-            <a:ext cx="2453563" cy="640080"/>
-          </a:xfrm>
-          <a:prstGeom prst="rect">
-            <a:avLst/>
-          </a:prstGeom>
-          <a:noFill/>
-        </p:spPr>
-        <p:txBody>
-          <a:bodyPr wrap="square" lIns="0" rIns="0" tIns="0" bIns="0" anchor="t">
-            <a:spAutoFit/>
-          </a:bodyPr>
-          <a:lstStyle/>
-          <a:p>
-            <a:pPr algn="ctr">
-              <a:lnSpc>
-                <a:spcPct val="115000"/>
-              </a:lnSpc>
-            </a:pPr>
-            <a:r>
-              <a:rPr sz="1700" b="1" i="0">
-                <a:solidFill>
-                  <a:srgbClr val="0D145F"/>
-                </a:solidFill>
-                <a:latin typeface="DM Sans"/>
-              </a:rPr>
-              <a:t>4. Re-entry toolkit</a:t>
-            </a:r>
-          </a:p>
-        </p:txBody>
-      </p:sp>
-      <p:sp>
-        <p:nvSpPr>
-          <p:cNvPr id="23" name="TextBox 22"/>
-          <p:cNvSpPr txBox="1"/>
-          <p:nvPr/>
-        </p:nvSpPr>
-        <p:spPr>
-          <a:xfrm>
-            <a:off x="8892311" y="4274820"/>
-            <a:ext cx="2453563" cy="1828800"/>
-          </a:xfrm>
-          <a:prstGeom prst="rect">
-            <a:avLst/>
-          </a:prstGeom>
-          <a:noFill/>
-        </p:spPr>
-        <p:txBody>
-          <a:bodyPr wrap="square" lIns="0" rIns="0" tIns="0" bIns="0" anchor="t">
-            <a:spAutoFit/>
-          </a:bodyPr>
-          <a:lstStyle/>
-          <a:p>
-            <a:pPr algn="ctr">
-              <a:lnSpc>
-                <a:spcPct val="140000"/>
-              </a:lnSpc>
-            </a:pPr>
-            <a:r>
-              <a:rPr sz="1400" b="0" i="0">
-                <a:solidFill>
-                  <a:srgbClr val="131416"/>
-                </a:solidFill>
-                <a:latin typeface="DM Sans"/>
-              </a:rPr>
-              <a:t>Support students going home.</a:t>
-            </a:r>
-          </a:p>
-        </p:txBody>
-      </p:sp>
-      <p:pic>
-        <p:nvPicPr>
-          <p:cNvPr id="24" name="Picture 23" descr="logo-icon-deep-blue.png"/>
-          <p:cNvPicPr>
-            <a:picLocks noChangeAspect="1"/>
-          </p:cNvPicPr>
-          <p:nvPr/>
-        </p:nvPicPr>
-        <p:blipFill>
-          <a:blip r:embed="rId6"/>
-          <a:stretch>
-            <a:fillRect/>
-          </a:stretch>
-        </p:blipFill>
-        <p:spPr>
-          <a:xfrm>
-            <a:off x="11167567" y="6291072"/>
-            <a:ext cx="292608" cy="292608"/>
-          </a:xfrm>
-          <a:prstGeom prst="rect">
-            <a:avLst/>
-          </a:prstGeom>
-        </p:spPr>
-      </p:pic>
-      <p:sp>
-        <p:nvSpPr>
-          <p:cNvPr id="25" name="TextBox 24"/>
-          <p:cNvSpPr txBox="1"/>
-          <p:nvPr/>
-        </p:nvSpPr>
-        <p:spPr>
-          <a:xfrm>
-            <a:off x="731520" y="6327648"/>
-            <a:ext cx="5486400" cy="274320"/>
-          </a:xfrm>
-          <a:prstGeom prst="rect">
-            <a:avLst/>
-          </a:prstGeom>
-          <a:noFill/>
-        </p:spPr>
-        <p:txBody>
-          <a:bodyPr wrap="square" lIns="0" rIns="0" tIns="0" bIns="0" anchor="t">
-            <a:spAutoFit/>
-          </a:bodyPr>
-          <a:lstStyle/>
-          <a:p>
-            <a:pPr algn="l">
-              <a:lnSpc>
-                <a:spcPct val="115000"/>
-              </a:lnSpc>
-            </a:pPr>
-            <a:r>
-              <a:rPr sz="1000" b="0" i="0">
-                <a:solidFill>
-                  <a:srgbClr val="5F646D"/>
-                </a:solidFill>
-                <a:latin typeface="DM Sans"/>
-              </a:rPr>
-              <a:t>11</a:t>
-            </a:r>
-          </a:p>
-        </p:txBody>
-      </p:sp>
-    </p:spTree>
-  </p:cSld>
-  <p:clrMapOvr>
-    <a:masterClrMapping/>
-  </p:clrMapOvr>
-</p:sld>
-</file>
-
-<file path=ppt/slides/slide12.xml><?xml version="1.0" encoding="utf-8"?>
-<p:sld xmlns:a="http://schemas.openxmlformats.org/drawingml/2006/main" xmlns:p="http://schemas.openxmlformats.org/presentationml/2006/main" xmlns:r="http://schemas.openxmlformats.org/officeDocument/2006/relationships">
-  <p:cSld>
-    <p:bg>
-      <p:bgPr>
-        <a:solidFill>
-          <a:srgbClr val="F3F4FA"/>
-        </a:solidFill>
-        <a:effectLst/>
-      </p:bgPr>
-    </p:bg>
-    <p:spTree>
-      <p:nvGrpSpPr>
-        <p:cNvPr id="1" name=""/>
-        <p:cNvGrpSpPr/>
-        <p:nvPr/>
-      </p:nvGrpSpPr>
-      <p:grpSpPr/>
-      <p:pic>
-        <p:nvPicPr>
-          <p:cNvPr id="2" name="Picture 1" descr="img_6894193300059637968.png"/>
-          <p:cNvPicPr>
-            <a:picLocks noChangeAspect="1"/>
-          </p:cNvPicPr>
-          <p:nvPr/>
-        </p:nvPicPr>
-        <p:blipFill>
-          <a:blip r:embed="rId2"/>
-          <a:stretch>
-            <a:fillRect/>
-          </a:stretch>
-        </p:blipFill>
-        <p:spPr>
-          <a:xfrm>
-            <a:off x="731520" y="640080"/>
-            <a:ext cx="5120640" cy="5394960"/>
-          </a:xfrm>
-          <a:prstGeom prst="rect">
-            <a:avLst/>
-          </a:prstGeom>
-        </p:spPr>
-      </p:pic>
-      <p:sp>
-        <p:nvSpPr>
-          <p:cNvPr id="3" name="Rounded Rectangle 2"/>
-          <p:cNvSpPr/>
-          <p:nvPr/>
-        </p:nvSpPr>
-        <p:spPr>
-          <a:xfrm>
-            <a:off x="6492240" y="1188720"/>
-            <a:ext cx="838200" cy="329184"/>
-          </a:xfrm>
-          <a:prstGeom prst="roundRect">
-            <a:avLst>
-              <a:gd name="adj" fmla="val 50000"/>
-            </a:avLst>
           </a:prstGeom>
           <a:solidFill>
             <a:srgbClr val="FABC20"/>
@@ -5117,1460 +6321,13 @@
           </a:fontRef>
         </p:style>
         <p:txBody>
-          <a:bodyPr rtlCol="0" anchor="ctr" lIns="109728" rIns="109728" tIns="0" bIns="0"/>
+          <a:bodyPr rtlCol="0" anchor="ctr"/>
           <a:lstStyle/>
           <a:p>
             <a:pPr algn="ctr"/>
-            <a:r>
-              <a:rPr sz="1200" b="1" i="0">
-                <a:solidFill>
-                  <a:srgbClr val="131416"/>
-                </a:solidFill>
-                <a:latin typeface="DM Sans"/>
-              </a:rPr>
-              <a:t>Story</a:t>
-            </a:r>
-          </a:p>
-        </p:txBody>
-      </p:sp>
-      <p:sp>
-        <p:nvSpPr>
-          <p:cNvPr id="4" name="TextBox 3"/>
-          <p:cNvSpPr txBox="1"/>
-          <p:nvPr/>
-        </p:nvSpPr>
-        <p:spPr>
-          <a:xfrm>
-            <a:off x="6492240" y="1737360"/>
-            <a:ext cx="4967935" cy="1645920"/>
-          </a:xfrm>
-          <a:prstGeom prst="rect">
-            <a:avLst/>
-          </a:prstGeom>
-          <a:noFill/>
-        </p:spPr>
-        <p:txBody>
-          <a:bodyPr wrap="square" lIns="0" rIns="0" tIns="0" bIns="0" anchor="t">
-            <a:spAutoFit/>
-          </a:bodyPr>
-          <a:lstStyle/>
-          <a:p>
-            <a:pPr algn="l">
-              <a:lnSpc>
-                <a:spcPct val="105000"/>
-              </a:lnSpc>
-            </a:pPr>
-            <a:r>
-              <a:rPr sz="3400" b="1" i="0" spc="-34">
-                <a:solidFill>
-                  <a:srgbClr val="0D145F"/>
-                </a:solidFill>
-                <a:latin typeface="Inter"/>
-              </a:rPr>
-              <a:t>Every friendship starts with a welcome</a:t>
-            </a:r>
-          </a:p>
-        </p:txBody>
-      </p:sp>
-      <p:sp>
-        <p:nvSpPr>
-          <p:cNvPr id="5" name="TextBox 4"/>
-          <p:cNvSpPr txBox="1"/>
-          <p:nvPr/>
-        </p:nvSpPr>
-        <p:spPr>
-          <a:xfrm>
-            <a:off x="6492240" y="3007360"/>
-            <a:ext cx="4967935" cy="1828800"/>
-          </a:xfrm>
-          <a:prstGeom prst="rect">
-            <a:avLst/>
-          </a:prstGeom>
-          <a:noFill/>
-        </p:spPr>
-        <p:txBody>
-          <a:bodyPr wrap="square" lIns="0" rIns="0" tIns="0" bIns="0" anchor="t">
-            <a:spAutoFit/>
-          </a:bodyPr>
-          <a:lstStyle/>
-          <a:p>
-            <a:pPr algn="l">
-              <a:lnSpc>
-                <a:spcPct val="140000"/>
-              </a:lnSpc>
-            </a:pPr>
-            <a:r>
-              <a:rPr sz="1700" b="0" i="0" spc="-17">
-                <a:solidFill>
-                  <a:srgbClr val="131416"/>
-                </a:solidFill>
-                <a:latin typeface="DM Sans"/>
-              </a:rPr>
-              <a:t>Use this space for a short story. Replace the placeholder name with a real, consented testimony.</a:t>
-            </a:r>
-          </a:p>
-        </p:txBody>
-      </p:sp>
-      <p:pic>
-        <p:nvPicPr>
-          <p:cNvPr id="6" name="Picture 5" descr="logo-icon-deep-blue.png"/>
-          <p:cNvPicPr>
-            <a:picLocks noChangeAspect="1"/>
-          </p:cNvPicPr>
-          <p:nvPr/>
-        </p:nvPicPr>
-        <p:blipFill>
-          <a:blip r:embed="rId3"/>
-          <a:stretch>
-            <a:fillRect/>
-          </a:stretch>
-        </p:blipFill>
-        <p:spPr>
-          <a:xfrm>
-            <a:off x="11167567" y="6291072"/>
-            <a:ext cx="292608" cy="292608"/>
-          </a:xfrm>
-          <a:prstGeom prst="rect">
-            <a:avLst/>
-          </a:prstGeom>
-        </p:spPr>
-      </p:pic>
-      <p:sp>
-        <p:nvSpPr>
-          <p:cNvPr id="7" name="TextBox 6"/>
-          <p:cNvSpPr txBox="1"/>
-          <p:nvPr/>
-        </p:nvSpPr>
-        <p:spPr>
-          <a:xfrm>
-            <a:off x="731520" y="6327648"/>
-            <a:ext cx="5486400" cy="274320"/>
-          </a:xfrm>
-          <a:prstGeom prst="rect">
-            <a:avLst/>
-          </a:prstGeom>
-          <a:noFill/>
-        </p:spPr>
-        <p:txBody>
-          <a:bodyPr wrap="square" lIns="0" rIns="0" tIns="0" bIns="0" anchor="t">
-            <a:spAutoFit/>
-          </a:bodyPr>
-          <a:lstStyle/>
-          <a:p>
-            <a:pPr algn="l">
-              <a:lnSpc>
-                <a:spcPct val="115000"/>
-              </a:lnSpc>
-            </a:pPr>
-            <a:r>
-              <a:rPr sz="1000" b="0" i="0">
-                <a:solidFill>
-                  <a:srgbClr val="5F646D"/>
-                </a:solidFill>
-                <a:latin typeface="DM Sans"/>
-              </a:rPr>
-              <a:t>12</a:t>
-            </a:r>
-          </a:p>
-        </p:txBody>
-      </p:sp>
-    </p:spTree>
-  </p:cSld>
-  <p:clrMapOvr>
-    <a:masterClrMapping/>
-  </p:clrMapOvr>
-</p:sld>
-</file>
-
-<file path=ppt/slides/slide13.xml><?xml version="1.0" encoding="utf-8"?>
-<p:sld xmlns:a="http://schemas.openxmlformats.org/drawingml/2006/main" xmlns:p="http://schemas.openxmlformats.org/presentationml/2006/main" xmlns:r="http://schemas.openxmlformats.org/officeDocument/2006/relationships">
-  <p:cSld>
-    <p:bg>
-      <p:bgPr>
-        <a:solidFill>
-          <a:srgbClr val="0D145F"/>
-        </a:solidFill>
-        <a:effectLst/>
-      </p:bgPr>
-    </p:bg>
-    <p:spTree>
-      <p:nvGrpSpPr>
-        <p:cNvPr id="1" name=""/>
-        <p:cNvGrpSpPr/>
-        <p:nvPr/>
-      </p:nvGrpSpPr>
-      <p:grpSpPr/>
-      <p:sp>
-        <p:nvSpPr>
-          <p:cNvPr id="2" name="TextBox 1"/>
-          <p:cNvSpPr txBox="1"/>
-          <p:nvPr/>
-        </p:nvSpPr>
-        <p:spPr>
-          <a:xfrm>
-            <a:off x="731520" y="1828800"/>
-            <a:ext cx="10058400" cy="3474720"/>
-          </a:xfrm>
-          <a:prstGeom prst="rect">
-            <a:avLst/>
-          </a:prstGeom>
-          <a:noFill/>
-        </p:spPr>
-        <p:txBody>
-          <a:bodyPr wrap="square" lIns="0" rIns="0" tIns="0" bIns="0" anchor="t">
-            <a:spAutoFit/>
-          </a:bodyPr>
-          <a:lstStyle/>
-          <a:p>
-            <a:pPr algn="l">
-              <a:lnSpc>
-                <a:spcPct val="110000"/>
-              </a:lnSpc>
-            </a:pPr>
-            <a:r>
-              <a:rPr sz="4800" b="1" i="0" spc="-96">
-                <a:solidFill>
-                  <a:srgbClr val="F3F4FA"/>
-                </a:solidFill>
-                <a:latin typeface="Inter"/>
-              </a:rPr>
-              <a:t>Empowering the next generation to share the gospel </a:t>
-            </a:r>
-            <a:r>
-              <a:rPr sz="4800" b="1" i="0" spc="-96">
-                <a:solidFill>
-                  <a:srgbClr val="BCB4EE"/>
-                </a:solidFill>
-                <a:latin typeface="Inter"/>
-              </a:rPr>
-              <a:t>confidently</a:t>
-            </a:r>
-            <a:r>
-              <a:rPr sz="4800" b="1" i="0" spc="-96">
-                <a:solidFill>
-                  <a:srgbClr val="F3F4FA"/>
-                </a:solidFill>
-                <a:latin typeface="Inter"/>
-              </a:rPr>
-              <a:t>.</a:t>
-            </a:r>
-          </a:p>
-        </p:txBody>
-      </p:sp>
-      <p:pic>
-        <p:nvPicPr>
-          <p:cNvPr id="3" name="Picture 2" descr="logo-icon-mist.png"/>
-          <p:cNvPicPr>
-            <a:picLocks noChangeAspect="1"/>
-          </p:cNvPicPr>
-          <p:nvPr/>
-        </p:nvPicPr>
-        <p:blipFill>
-          <a:blip r:embed="rId2"/>
-          <a:stretch>
-            <a:fillRect/>
-          </a:stretch>
-        </p:blipFill>
-        <p:spPr>
-          <a:xfrm>
-            <a:off x="11167567" y="6291072"/>
-            <a:ext cx="292608" cy="292608"/>
-          </a:xfrm>
-          <a:prstGeom prst="rect">
-            <a:avLst/>
-          </a:prstGeom>
-        </p:spPr>
-      </p:pic>
-      <p:sp>
-        <p:nvSpPr>
-          <p:cNvPr id="4" name="TextBox 3"/>
-          <p:cNvSpPr txBox="1"/>
-          <p:nvPr/>
-        </p:nvSpPr>
-        <p:spPr>
-          <a:xfrm>
-            <a:off x="731520" y="6327648"/>
-            <a:ext cx="5486400" cy="274320"/>
-          </a:xfrm>
-          <a:prstGeom prst="rect">
-            <a:avLst/>
-          </a:prstGeom>
-          <a:noFill/>
-        </p:spPr>
-        <p:txBody>
-          <a:bodyPr wrap="square" lIns="0" rIns="0" tIns="0" bIns="0" anchor="t">
-            <a:spAutoFit/>
-          </a:bodyPr>
-          <a:lstStyle/>
-          <a:p>
-            <a:pPr algn="l">
-              <a:lnSpc>
-                <a:spcPct val="115000"/>
-              </a:lnSpc>
-            </a:pPr>
-            <a:r>
-              <a:rPr sz="1000" b="0" i="0">
-                <a:solidFill>
-                  <a:srgbClr val="F3F4FA"/>
-                </a:solidFill>
-                <a:latin typeface="DM Sans"/>
-              </a:rPr>
-              <a:t>13</a:t>
-            </a:r>
-          </a:p>
-        </p:txBody>
-      </p:sp>
-    </p:spTree>
-  </p:cSld>
-  <p:clrMapOvr>
-    <a:masterClrMapping/>
-  </p:clrMapOvr>
-</p:sld>
-</file>
-
-<file path=ppt/slides/slide14.xml><?xml version="1.0" encoding="utf-8"?>
-<p:sld xmlns:a="http://schemas.openxmlformats.org/drawingml/2006/main" xmlns:p="http://schemas.openxmlformats.org/presentationml/2006/main" xmlns:r="http://schemas.openxmlformats.org/officeDocument/2006/relationships">
-  <p:cSld>
-    <p:bg>
-      <p:bgPr>
-        <a:solidFill>
-          <a:srgbClr val="9C90E6"/>
-        </a:solidFill>
-        <a:effectLst/>
-      </p:bgPr>
-    </p:bg>
-    <p:spTree>
-      <p:nvGrpSpPr>
-        <p:cNvPr id="1" name=""/>
-        <p:cNvGrpSpPr/>
-        <p:nvPr/>
-      </p:nvGrpSpPr>
-      <p:grpSpPr/>
-      <p:sp>
-        <p:nvSpPr>
-          <p:cNvPr id="2" name="Oval 1"/>
-          <p:cNvSpPr/>
-          <p:nvPr/>
-        </p:nvSpPr>
-        <p:spPr>
-          <a:xfrm>
-            <a:off x="-1097280" y="4206240"/>
-            <a:ext cx="3840480" cy="3840480"/>
-          </a:xfrm>
-          <a:prstGeom prst="ellipse">
-            <a:avLst/>
-          </a:prstGeom>
-          <a:solidFill>
-            <a:srgbClr val="FFEFD5"/>
-          </a:solidFill>
-          <a:ln>
-            <a:noFill/>
-          </a:ln>
-          <a:effectLst/>
-        </p:spPr>
-        <p:style>
-          <a:lnRef idx="1">
-            <a:schemeClr val="accent1"/>
-          </a:lnRef>
-          <a:fillRef idx="3">
-            <a:schemeClr val="accent1"/>
-          </a:fillRef>
-          <a:effectRef idx="2">
-            <a:schemeClr val="accent1"/>
-          </a:effectRef>
-          <a:fontRef idx="minor">
-            <a:schemeClr val="lt1"/>
-          </a:fontRef>
-        </p:style>
-        <p:txBody>
-          <a:bodyPr rtlCol="0" anchor="ctr"/>
-          <a:lstStyle/>
-          <a:p>
-            <a:pPr algn="ctr"/>
-          </a:p>
-        </p:txBody>
-      </p:sp>
-      <p:sp>
-        <p:nvSpPr>
-          <p:cNvPr id="3" name="Oval 2"/>
-          <p:cNvSpPr/>
-          <p:nvPr/>
-        </p:nvSpPr>
-        <p:spPr>
-          <a:xfrm>
-            <a:off x="10241280" y="-822960"/>
-            <a:ext cx="2560320" cy="2560320"/>
-          </a:xfrm>
-          <a:prstGeom prst="ellipse">
-            <a:avLst/>
-          </a:prstGeom>
-          <a:solidFill>
-            <a:srgbClr val="0D145F"/>
-          </a:solidFill>
-          <a:ln>
-            <a:noFill/>
-          </a:ln>
-          <a:effectLst/>
-        </p:spPr>
-        <p:style>
-          <a:lnRef idx="1">
-            <a:schemeClr val="accent1"/>
-          </a:lnRef>
-          <a:fillRef idx="3">
-            <a:schemeClr val="accent1"/>
-          </a:fillRef>
-          <a:effectRef idx="2">
-            <a:schemeClr val="accent1"/>
-          </a:effectRef>
-          <a:fontRef idx="minor">
-            <a:schemeClr val="lt1"/>
-          </a:fontRef>
-        </p:style>
-        <p:txBody>
-          <a:bodyPr rtlCol="0" anchor="ctr"/>
-          <a:lstStyle/>
-          <a:p>
-            <a:pPr algn="ctr"/>
-          </a:p>
-        </p:txBody>
-      </p:sp>
-      <p:sp>
-        <p:nvSpPr>
-          <p:cNvPr id="4" name="Oval 3"/>
-          <p:cNvSpPr/>
-          <p:nvPr/>
-        </p:nvSpPr>
-        <p:spPr>
-          <a:xfrm>
-            <a:off x="9692640" y="1371600"/>
-            <a:ext cx="640080" cy="640080"/>
-          </a:xfrm>
-          <a:prstGeom prst="ellipse">
-            <a:avLst/>
-          </a:prstGeom>
-          <a:solidFill>
-            <a:srgbClr val="FABC20"/>
-          </a:solidFill>
-          <a:ln>
-            <a:noFill/>
-          </a:ln>
-          <a:effectLst/>
-        </p:spPr>
-        <p:style>
-          <a:lnRef idx="1">
-            <a:schemeClr val="accent1"/>
-          </a:lnRef>
-          <a:fillRef idx="3">
-            <a:schemeClr val="accent1"/>
-          </a:fillRef>
-          <a:effectRef idx="2">
-            <a:schemeClr val="accent1"/>
-          </a:effectRef>
-          <a:fontRef idx="minor">
-            <a:schemeClr val="lt1"/>
-          </a:fontRef>
-        </p:style>
-        <p:txBody>
-          <a:bodyPr rtlCol="0" anchor="ctr"/>
-          <a:lstStyle/>
-          <a:p>
-            <a:pPr algn="ctr"/>
-          </a:p>
-        </p:txBody>
-      </p:sp>
-      <p:sp>
-        <p:nvSpPr>
-          <p:cNvPr id="5" name="TextBox 4"/>
-          <p:cNvSpPr txBox="1"/>
-          <p:nvPr/>
-        </p:nvSpPr>
-        <p:spPr>
-          <a:xfrm>
-            <a:off x="731520" y="1463040"/>
-            <a:ext cx="10728655" cy="1097280"/>
-          </a:xfrm>
-          <a:prstGeom prst="rect">
-            <a:avLst/>
-          </a:prstGeom>
-          <a:noFill/>
-        </p:spPr>
-        <p:txBody>
-          <a:bodyPr wrap="square" lIns="0" rIns="0" tIns="0" bIns="0" anchor="t">
-            <a:spAutoFit/>
-          </a:bodyPr>
-          <a:lstStyle/>
-          <a:p>
-            <a:pPr algn="ctr">
-              <a:lnSpc>
-                <a:spcPct val="115000"/>
-              </a:lnSpc>
-            </a:pPr>
-            <a:r>
-              <a:rPr sz="6000" b="1" i="0" spc="-120">
-                <a:solidFill>
-                  <a:srgbClr val="0D145F"/>
-                </a:solidFill>
-                <a:latin typeface="Inter"/>
-              </a:rPr>
-              <a:t>Thank you</a:t>
-            </a:r>
-          </a:p>
-        </p:txBody>
-      </p:sp>
-      <p:sp>
-        <p:nvSpPr>
-          <p:cNvPr id="6" name="TextBox 5"/>
-          <p:cNvSpPr txBox="1"/>
-          <p:nvPr/>
-        </p:nvSpPr>
-        <p:spPr>
-          <a:xfrm>
-            <a:off x="731520" y="2651760"/>
-            <a:ext cx="10728655" cy="731520"/>
-          </a:xfrm>
-          <a:prstGeom prst="rect">
-            <a:avLst/>
-          </a:prstGeom>
-          <a:noFill/>
-        </p:spPr>
-        <p:txBody>
-          <a:bodyPr wrap="square" lIns="0" rIns="0" tIns="0" bIns="0" anchor="t">
-            <a:spAutoFit/>
-          </a:bodyPr>
-          <a:lstStyle/>
-          <a:p>
-            <a:pPr algn="ctr">
-              <a:lnSpc>
-                <a:spcPct val="115000"/>
-              </a:lnSpc>
-            </a:pPr>
-            <a:r>
-              <a:rPr sz="2600" b="0" i="0" spc="-52">
-                <a:solidFill>
-                  <a:srgbClr val="131416"/>
-                </a:solidFill>
-                <a:latin typeface="Inter"/>
-              </a:rPr>
-              <a:t>Let's build this together.</a:t>
-            </a:r>
-          </a:p>
-        </p:txBody>
-      </p:sp>
-      <p:sp>
-        <p:nvSpPr>
-          <p:cNvPr id="7" name="TextBox 6"/>
-          <p:cNvSpPr txBox="1"/>
-          <p:nvPr/>
-        </p:nvSpPr>
-        <p:spPr>
-          <a:xfrm>
-            <a:off x="731520" y="3840480"/>
-            <a:ext cx="10728655" cy="822960"/>
-          </a:xfrm>
-          <a:prstGeom prst="rect">
-            <a:avLst/>
-          </a:prstGeom>
-          <a:noFill/>
-        </p:spPr>
-        <p:txBody>
-          <a:bodyPr wrap="square" lIns="0" rIns="0" tIns="0" bIns="0" anchor="t">
-            <a:spAutoFit/>
-          </a:bodyPr>
-          <a:lstStyle/>
-          <a:p>
-            <a:pPr algn="ctr">
-              <a:lnSpc>
-                <a:spcPct val="140000"/>
-              </a:lnSpc>
-            </a:pPr>
-            <a:r>
-              <a:rPr sz="1600" b="0" i="0">
-                <a:solidFill>
-                  <a:srgbClr val="131416"/>
-                </a:solidFill>
-                <a:latin typeface="DM Sans"/>
-              </a:rPr>
-              <a:t>[your.email@example.org]</a:t>
-            </a:r>
-          </a:p>
-        </p:txBody>
-      </p:sp>
-      <p:pic>
-        <p:nvPicPr>
-          <p:cNvPr id="8" name="Picture 7" descr="wordmark-horizontal-deep-blue.png"/>
-          <p:cNvPicPr>
-            <a:picLocks noChangeAspect="1"/>
-          </p:cNvPicPr>
-          <p:nvPr/>
-        </p:nvPicPr>
-        <p:blipFill>
-          <a:blip r:embed="rId2"/>
-          <a:stretch>
-            <a:fillRect/>
-          </a:stretch>
-        </p:blipFill>
-        <p:spPr>
-          <a:xfrm>
-            <a:off x="4827741" y="5897880"/>
-            <a:ext cx="2536213" cy="329184"/>
-          </a:xfrm>
-          <a:prstGeom prst="rect">
-            <a:avLst/>
-          </a:prstGeom>
-        </p:spPr>
-      </p:pic>
-    </p:spTree>
-  </p:cSld>
-  <p:clrMapOvr>
-    <a:masterClrMapping/>
-  </p:clrMapOvr>
-</p:sld>
-</file>
-
-<file path=ppt/slides/slide2.xml><?xml version="1.0" encoding="utf-8"?>
-<p:sld xmlns:a="http://schemas.openxmlformats.org/drawingml/2006/main" xmlns:p="http://schemas.openxmlformats.org/presentationml/2006/main" xmlns:r="http://schemas.openxmlformats.org/officeDocument/2006/relationships">
-  <p:cSld>
-    <p:bg>
-      <p:bgPr>
-        <a:solidFill>
-          <a:srgbClr val="F3F4FA"/>
-        </a:solidFill>
-        <a:effectLst/>
-      </p:bgPr>
-    </p:bg>
-    <p:spTree>
-      <p:nvGrpSpPr>
-        <p:cNvPr id="1" name=""/>
-        <p:cNvGrpSpPr/>
-        <p:nvPr/>
-      </p:nvGrpSpPr>
-      <p:grpSpPr/>
-      <p:sp>
-        <p:nvSpPr>
-          <p:cNvPr id="2" name="TextBox 1"/>
-          <p:cNvSpPr txBox="1"/>
-          <p:nvPr/>
-        </p:nvSpPr>
-        <p:spPr>
-          <a:xfrm>
-            <a:off x="731520" y="640080"/>
-            <a:ext cx="10728655" cy="1097280"/>
-          </a:xfrm>
-          <a:prstGeom prst="rect">
-            <a:avLst/>
-          </a:prstGeom>
-          <a:noFill/>
-        </p:spPr>
-        <p:txBody>
-          <a:bodyPr wrap="square" lIns="0" rIns="0" tIns="0" bIns="0" anchor="t">
-            <a:spAutoFit/>
-          </a:bodyPr>
-          <a:lstStyle/>
-          <a:p>
-            <a:pPr algn="l">
-              <a:lnSpc>
-                <a:spcPct val="105000"/>
-              </a:lnSpc>
-            </a:pPr>
-            <a:r>
-              <a:rPr sz="3800" b="1" i="0" spc="-38">
-                <a:solidFill>
-                  <a:srgbClr val="0D145F"/>
-                </a:solidFill>
-                <a:latin typeface="Inter"/>
-              </a:rPr>
-              <a:t>Today</a:t>
-            </a:r>
-          </a:p>
-        </p:txBody>
-      </p:sp>
-      <p:sp>
-        <p:nvSpPr>
-          <p:cNvPr id="3" name="Rounded Rectangle 2"/>
-          <p:cNvSpPr/>
-          <p:nvPr/>
-        </p:nvSpPr>
-        <p:spPr>
-          <a:xfrm>
-            <a:off x="731520" y="1606550"/>
-            <a:ext cx="10728655" cy="777240"/>
-          </a:xfrm>
-          <a:prstGeom prst="roundRect">
-            <a:avLst>
-              <a:gd name="adj" fmla="val 30000"/>
-            </a:avLst>
-          </a:prstGeom>
-          <a:solidFill>
-            <a:srgbClr val="FFFFFF"/>
-          </a:solidFill>
-          <a:ln>
-            <a:noFill/>
-          </a:ln>
-          <a:effectLst/>
-        </p:spPr>
-        <p:style>
-          <a:lnRef idx="1">
-            <a:schemeClr val="accent1"/>
-          </a:lnRef>
-          <a:fillRef idx="3">
-            <a:schemeClr val="accent1"/>
-          </a:fillRef>
-          <a:effectRef idx="2">
-            <a:schemeClr val="accent1"/>
-          </a:effectRef>
-          <a:fontRef idx="minor">
-            <a:schemeClr val="lt1"/>
-          </a:fontRef>
-        </p:style>
-        <p:txBody>
-          <a:bodyPr rtlCol="0" anchor="ctr"/>
-          <a:lstStyle/>
-          <a:p>
-            <a:pPr algn="ctr"/>
-          </a:p>
-        </p:txBody>
-      </p:sp>
-      <p:sp>
-        <p:nvSpPr>
-          <p:cNvPr id="4" name="Oval 3"/>
-          <p:cNvSpPr/>
-          <p:nvPr/>
-        </p:nvSpPr>
-        <p:spPr>
-          <a:xfrm>
-            <a:off x="859536" y="1707134"/>
-            <a:ext cx="576072" cy="576072"/>
-          </a:xfrm>
-          <a:prstGeom prst="ellipse">
-            <a:avLst/>
-          </a:prstGeom>
-          <a:solidFill>
-            <a:srgbClr val="9C90E6"/>
-          </a:solidFill>
-          <a:ln>
-            <a:noFill/>
-          </a:ln>
-          <a:effectLst/>
-        </p:spPr>
-        <p:style>
-          <a:lnRef idx="1">
-            <a:schemeClr val="accent1"/>
-          </a:lnRef>
-          <a:fillRef idx="3">
-            <a:schemeClr val="accent1"/>
-          </a:fillRef>
-          <a:effectRef idx="2">
-            <a:schemeClr val="accent1"/>
-          </a:effectRef>
-          <a:fontRef idx="minor">
-            <a:schemeClr val="lt1"/>
-          </a:fontRef>
-        </p:style>
-        <p:txBody>
-          <a:bodyPr rtlCol="0" anchor="ctr" lIns="0" rIns="0" tIns="0" bIns="0"/>
-          <a:lstStyle/>
-          <a:p>
-            <a:pPr algn="ctr"/>
-            <a:r>
-              <a:rPr sz="1800" b="1" i="0">
-                <a:solidFill>
-                  <a:srgbClr val="131416"/>
-                </a:solidFill>
-                <a:latin typeface="Inter"/>
-              </a:rPr>
-              <a:t>1</a:t>
-            </a:r>
-          </a:p>
-        </p:txBody>
-      </p:sp>
-      <p:sp>
-        <p:nvSpPr>
-          <p:cNvPr id="5" name="TextBox 4"/>
-          <p:cNvSpPr txBox="1"/>
-          <p:nvPr/>
-        </p:nvSpPr>
-        <p:spPr>
-          <a:xfrm>
-            <a:off x="1719072" y="1606550"/>
-            <a:ext cx="7680960" cy="777240"/>
-          </a:xfrm>
-          <a:prstGeom prst="rect">
-            <a:avLst/>
-          </a:prstGeom>
-          <a:noFill/>
-        </p:spPr>
-        <p:txBody>
-          <a:bodyPr wrap="square" lIns="0" rIns="0" tIns="0" bIns="0" anchor="ctr">
-            <a:spAutoFit/>
-          </a:bodyPr>
-          <a:lstStyle/>
-          <a:p>
-            <a:pPr algn="l">
-              <a:lnSpc>
-                <a:spcPct val="115000"/>
-              </a:lnSpc>
-            </a:pPr>
-            <a:r>
-              <a:rPr sz="2200" b="0" i="0" spc="-44">
-                <a:solidFill>
-                  <a:srgbClr val="131416"/>
-                </a:solidFill>
-                <a:latin typeface="Inter"/>
-              </a:rPr>
-              <a:t>Why international students</a:t>
-            </a:r>
-          </a:p>
-        </p:txBody>
-      </p:sp>
-      <p:sp>
-        <p:nvSpPr>
-          <p:cNvPr id="6" name="Rounded Rectangle 5"/>
-          <p:cNvSpPr/>
-          <p:nvPr/>
-        </p:nvSpPr>
-        <p:spPr>
-          <a:xfrm>
-            <a:off x="731520" y="2530094"/>
-            <a:ext cx="10728655" cy="777240"/>
-          </a:xfrm>
-          <a:prstGeom prst="roundRect">
-            <a:avLst>
-              <a:gd name="adj" fmla="val 30000"/>
-            </a:avLst>
-          </a:prstGeom>
-          <a:solidFill>
-            <a:srgbClr val="FFFFFF"/>
-          </a:solidFill>
-          <a:ln>
-            <a:noFill/>
-          </a:ln>
-          <a:effectLst/>
-        </p:spPr>
-        <p:style>
-          <a:lnRef idx="1">
-            <a:schemeClr val="accent1"/>
-          </a:lnRef>
-          <a:fillRef idx="3">
-            <a:schemeClr val="accent1"/>
-          </a:fillRef>
-          <a:effectRef idx="2">
-            <a:schemeClr val="accent1"/>
-          </a:effectRef>
-          <a:fontRef idx="minor">
-            <a:schemeClr val="lt1"/>
-          </a:fontRef>
-        </p:style>
-        <p:txBody>
-          <a:bodyPr rtlCol="0" anchor="ctr"/>
-          <a:lstStyle/>
-          <a:p>
-            <a:pPr algn="ctr"/>
-          </a:p>
-        </p:txBody>
-      </p:sp>
-      <p:sp>
-        <p:nvSpPr>
-          <p:cNvPr id="7" name="Oval 6"/>
-          <p:cNvSpPr/>
-          <p:nvPr/>
-        </p:nvSpPr>
-        <p:spPr>
-          <a:xfrm>
-            <a:off x="859536" y="2630678"/>
-            <a:ext cx="576072" cy="576072"/>
-          </a:xfrm>
-          <a:prstGeom prst="ellipse">
-            <a:avLst/>
-          </a:prstGeom>
-          <a:solidFill>
-            <a:srgbClr val="9C90E6"/>
-          </a:solidFill>
-          <a:ln>
-            <a:noFill/>
-          </a:ln>
-          <a:effectLst/>
-        </p:spPr>
-        <p:style>
-          <a:lnRef idx="1">
-            <a:schemeClr val="accent1"/>
-          </a:lnRef>
-          <a:fillRef idx="3">
-            <a:schemeClr val="accent1"/>
-          </a:fillRef>
-          <a:effectRef idx="2">
-            <a:schemeClr val="accent1"/>
-          </a:effectRef>
-          <a:fontRef idx="minor">
-            <a:schemeClr val="lt1"/>
-          </a:fontRef>
-        </p:style>
-        <p:txBody>
-          <a:bodyPr rtlCol="0" anchor="ctr" lIns="0" rIns="0" tIns="0" bIns="0"/>
-          <a:lstStyle/>
-          <a:p>
-            <a:pPr algn="ctr"/>
-            <a:r>
-              <a:rPr sz="1800" b="1" i="0">
-                <a:solidFill>
-                  <a:srgbClr val="131416"/>
-                </a:solidFill>
-                <a:latin typeface="Inter"/>
-              </a:rPr>
-              <a:t>2</a:t>
-            </a:r>
-          </a:p>
-        </p:txBody>
-      </p:sp>
-      <p:sp>
-        <p:nvSpPr>
-          <p:cNvPr id="8" name="TextBox 7"/>
-          <p:cNvSpPr txBox="1"/>
-          <p:nvPr/>
-        </p:nvSpPr>
-        <p:spPr>
-          <a:xfrm>
-            <a:off x="1719072" y="2530094"/>
-            <a:ext cx="7680960" cy="777240"/>
-          </a:xfrm>
-          <a:prstGeom prst="rect">
-            <a:avLst/>
-          </a:prstGeom>
-          <a:noFill/>
-        </p:spPr>
-        <p:txBody>
-          <a:bodyPr wrap="square" lIns="0" rIns="0" tIns="0" bIns="0" anchor="ctr">
-            <a:spAutoFit/>
-          </a:bodyPr>
-          <a:lstStyle/>
-          <a:p>
-            <a:pPr algn="l">
-              <a:lnSpc>
-                <a:spcPct val="115000"/>
-              </a:lnSpc>
-            </a:pPr>
-            <a:r>
-              <a:rPr sz="2200" b="0" i="0" spc="-44">
-                <a:solidFill>
-                  <a:srgbClr val="131416"/>
-                </a:solidFill>
-                <a:latin typeface="Inter"/>
-              </a:rPr>
-              <a:t>What we've learned</a:t>
-            </a:r>
-          </a:p>
-        </p:txBody>
-      </p:sp>
-      <p:sp>
-        <p:nvSpPr>
-          <p:cNvPr id="9" name="Rounded Rectangle 8"/>
-          <p:cNvSpPr/>
-          <p:nvPr/>
-        </p:nvSpPr>
-        <p:spPr>
-          <a:xfrm>
-            <a:off x="731520" y="3453638"/>
-            <a:ext cx="10728655" cy="777240"/>
-          </a:xfrm>
-          <a:prstGeom prst="roundRect">
-            <a:avLst>
-              <a:gd name="adj" fmla="val 30000"/>
-            </a:avLst>
-          </a:prstGeom>
-          <a:solidFill>
-            <a:srgbClr val="FFFFFF"/>
-          </a:solidFill>
-          <a:ln>
-            <a:noFill/>
-          </a:ln>
-          <a:effectLst/>
-        </p:spPr>
-        <p:style>
-          <a:lnRef idx="1">
-            <a:schemeClr val="accent1"/>
-          </a:lnRef>
-          <a:fillRef idx="3">
-            <a:schemeClr val="accent1"/>
-          </a:fillRef>
-          <a:effectRef idx="2">
-            <a:schemeClr val="accent1"/>
-          </a:effectRef>
-          <a:fontRef idx="minor">
-            <a:schemeClr val="lt1"/>
-          </a:fontRef>
-        </p:style>
-        <p:txBody>
-          <a:bodyPr rtlCol="0" anchor="ctr"/>
-          <a:lstStyle/>
-          <a:p>
-            <a:pPr algn="ctr"/>
-          </a:p>
-        </p:txBody>
-      </p:sp>
-      <p:sp>
-        <p:nvSpPr>
-          <p:cNvPr id="10" name="Oval 9"/>
-          <p:cNvSpPr/>
-          <p:nvPr/>
-        </p:nvSpPr>
-        <p:spPr>
-          <a:xfrm>
-            <a:off x="859536" y="3554222"/>
-            <a:ext cx="576072" cy="576072"/>
-          </a:xfrm>
-          <a:prstGeom prst="ellipse">
-            <a:avLst/>
-          </a:prstGeom>
-          <a:solidFill>
-            <a:srgbClr val="9C90E6"/>
-          </a:solidFill>
-          <a:ln>
-            <a:noFill/>
-          </a:ln>
-          <a:effectLst/>
-        </p:spPr>
-        <p:style>
-          <a:lnRef idx="1">
-            <a:schemeClr val="accent1"/>
-          </a:lnRef>
-          <a:fillRef idx="3">
-            <a:schemeClr val="accent1"/>
-          </a:fillRef>
-          <a:effectRef idx="2">
-            <a:schemeClr val="accent1"/>
-          </a:effectRef>
-          <a:fontRef idx="minor">
-            <a:schemeClr val="lt1"/>
-          </a:fontRef>
-        </p:style>
-        <p:txBody>
-          <a:bodyPr rtlCol="0" anchor="ctr" lIns="0" rIns="0" tIns="0" bIns="0"/>
-          <a:lstStyle/>
-          <a:p>
-            <a:pPr algn="ctr"/>
-            <a:r>
-              <a:rPr sz="1800" b="1" i="0">
-                <a:solidFill>
-                  <a:srgbClr val="131416"/>
-                </a:solidFill>
-                <a:latin typeface="Inter"/>
-              </a:rPr>
-              <a:t>3</a:t>
-            </a:r>
-          </a:p>
-        </p:txBody>
-      </p:sp>
-      <p:sp>
-        <p:nvSpPr>
-          <p:cNvPr id="11" name="TextBox 10"/>
-          <p:cNvSpPr txBox="1"/>
-          <p:nvPr/>
-        </p:nvSpPr>
-        <p:spPr>
-          <a:xfrm>
-            <a:off x="1719072" y="3453638"/>
-            <a:ext cx="7680960" cy="777240"/>
-          </a:xfrm>
-          <a:prstGeom prst="rect">
-            <a:avLst/>
-          </a:prstGeom>
-          <a:noFill/>
-        </p:spPr>
-        <p:txBody>
-          <a:bodyPr wrap="square" lIns="0" rIns="0" tIns="0" bIns="0" anchor="ctr">
-            <a:spAutoFit/>
-          </a:bodyPr>
-          <a:lstStyle/>
-          <a:p>
-            <a:pPr algn="l">
-              <a:lnSpc>
-                <a:spcPct val="115000"/>
-              </a:lnSpc>
-            </a:pPr>
-            <a:r>
-              <a:rPr sz="2200" b="0" i="0" spc="-44">
-                <a:solidFill>
-                  <a:srgbClr val="131416"/>
-                </a:solidFill>
-                <a:latin typeface="Inter"/>
-              </a:rPr>
-              <a:t>How we can work together</a:t>
-            </a:r>
-          </a:p>
-        </p:txBody>
-      </p:sp>
-      <p:sp>
-        <p:nvSpPr>
-          <p:cNvPr id="12" name="Rounded Rectangle 11"/>
-          <p:cNvSpPr/>
-          <p:nvPr/>
-        </p:nvSpPr>
-        <p:spPr>
-          <a:xfrm>
-            <a:off x="731520" y="4377182"/>
-            <a:ext cx="10728655" cy="777240"/>
-          </a:xfrm>
-          <a:prstGeom prst="roundRect">
-            <a:avLst>
-              <a:gd name="adj" fmla="val 30000"/>
-            </a:avLst>
-          </a:prstGeom>
-          <a:solidFill>
-            <a:srgbClr val="FFFFFF"/>
-          </a:solidFill>
-          <a:ln>
-            <a:noFill/>
-          </a:ln>
-          <a:effectLst/>
-        </p:spPr>
-        <p:style>
-          <a:lnRef idx="1">
-            <a:schemeClr val="accent1"/>
-          </a:lnRef>
-          <a:fillRef idx="3">
-            <a:schemeClr val="accent1"/>
-          </a:fillRef>
-          <a:effectRef idx="2">
-            <a:schemeClr val="accent1"/>
-          </a:effectRef>
-          <a:fontRef idx="minor">
-            <a:schemeClr val="lt1"/>
-          </a:fontRef>
-        </p:style>
-        <p:txBody>
-          <a:bodyPr rtlCol="0" anchor="ctr"/>
-          <a:lstStyle/>
-          <a:p>
-            <a:pPr algn="ctr"/>
-          </a:p>
-        </p:txBody>
-      </p:sp>
-      <p:sp>
-        <p:nvSpPr>
-          <p:cNvPr id="13" name="Oval 12"/>
-          <p:cNvSpPr/>
-          <p:nvPr/>
-        </p:nvSpPr>
-        <p:spPr>
-          <a:xfrm>
-            <a:off x="859536" y="4477766"/>
-            <a:ext cx="576072" cy="576072"/>
-          </a:xfrm>
-          <a:prstGeom prst="ellipse">
-            <a:avLst/>
-          </a:prstGeom>
-          <a:solidFill>
-            <a:srgbClr val="9C90E6"/>
-          </a:solidFill>
-          <a:ln>
-            <a:noFill/>
-          </a:ln>
-          <a:effectLst/>
-        </p:spPr>
-        <p:style>
-          <a:lnRef idx="1">
-            <a:schemeClr val="accent1"/>
-          </a:lnRef>
-          <a:fillRef idx="3">
-            <a:schemeClr val="accent1"/>
-          </a:fillRef>
-          <a:effectRef idx="2">
-            <a:schemeClr val="accent1"/>
-          </a:effectRef>
-          <a:fontRef idx="minor">
-            <a:schemeClr val="lt1"/>
-          </a:fontRef>
-        </p:style>
-        <p:txBody>
-          <a:bodyPr rtlCol="0" anchor="ctr" lIns="0" rIns="0" tIns="0" bIns="0"/>
-          <a:lstStyle/>
-          <a:p>
-            <a:pPr algn="ctr"/>
-            <a:r>
-              <a:rPr sz="1800" b="1" i="0">
-                <a:solidFill>
-                  <a:srgbClr val="131416"/>
-                </a:solidFill>
-                <a:latin typeface="Inter"/>
-              </a:rPr>
-              <a:t>4</a:t>
-            </a:r>
-          </a:p>
-        </p:txBody>
-      </p:sp>
-      <p:sp>
-        <p:nvSpPr>
-          <p:cNvPr id="14" name="TextBox 13"/>
-          <p:cNvSpPr txBox="1"/>
-          <p:nvPr/>
-        </p:nvSpPr>
-        <p:spPr>
-          <a:xfrm>
-            <a:off x="1719072" y="4377182"/>
-            <a:ext cx="7680960" cy="777240"/>
-          </a:xfrm>
-          <a:prstGeom prst="rect">
-            <a:avLst/>
-          </a:prstGeom>
-          <a:noFill/>
-        </p:spPr>
-        <p:txBody>
-          <a:bodyPr wrap="square" lIns="0" rIns="0" tIns="0" bIns="0" anchor="ctr">
-            <a:spAutoFit/>
-          </a:bodyPr>
-          <a:lstStyle/>
-          <a:p>
-            <a:pPr algn="l">
-              <a:lnSpc>
-                <a:spcPct val="115000"/>
-              </a:lnSpc>
-            </a:pPr>
-            <a:r>
-              <a:rPr sz="2200" b="0" i="0" spc="-44">
-                <a:solidFill>
-                  <a:srgbClr val="131416"/>
-                </a:solidFill>
-                <a:latin typeface="Inter"/>
-              </a:rPr>
-              <a:t>Next steps</a:t>
-            </a:r>
-          </a:p>
-        </p:txBody>
-      </p:sp>
-      <p:pic>
-        <p:nvPicPr>
-          <p:cNvPr id="15" name="Picture 14" descr="logo-icon-deep-blue.png"/>
-          <p:cNvPicPr>
-            <a:picLocks noChangeAspect="1"/>
-          </p:cNvPicPr>
-          <p:nvPr/>
-        </p:nvPicPr>
-        <p:blipFill>
-          <a:blip r:embed="rId2"/>
-          <a:stretch>
-            <a:fillRect/>
-          </a:stretch>
-        </p:blipFill>
-        <p:spPr>
-          <a:xfrm>
-            <a:off x="11167567" y="6291072"/>
-            <a:ext cx="292608" cy="292608"/>
-          </a:xfrm>
-          <a:prstGeom prst="rect">
-            <a:avLst/>
-          </a:prstGeom>
-        </p:spPr>
-      </p:pic>
-      <p:sp>
-        <p:nvSpPr>
-          <p:cNvPr id="16" name="TextBox 15"/>
-          <p:cNvSpPr txBox="1"/>
-          <p:nvPr/>
-        </p:nvSpPr>
-        <p:spPr>
-          <a:xfrm>
-            <a:off x="731520" y="6327648"/>
-            <a:ext cx="5486400" cy="274320"/>
-          </a:xfrm>
-          <a:prstGeom prst="rect">
-            <a:avLst/>
-          </a:prstGeom>
-          <a:noFill/>
-        </p:spPr>
-        <p:txBody>
-          <a:bodyPr wrap="square" lIns="0" rIns="0" tIns="0" bIns="0" anchor="t">
-            <a:spAutoFit/>
-          </a:bodyPr>
-          <a:lstStyle/>
-          <a:p>
-            <a:pPr algn="l">
-              <a:lnSpc>
-                <a:spcPct val="115000"/>
-              </a:lnSpc>
-            </a:pPr>
-            <a:r>
-              <a:rPr sz="1000" b="0" i="0">
-                <a:solidFill>
-                  <a:srgbClr val="5F646D"/>
-                </a:solidFill>
-                <a:latin typeface="DM Sans"/>
-              </a:rPr>
-              <a:t>2</a:t>
-            </a:r>
-          </a:p>
-        </p:txBody>
-      </p:sp>
-    </p:spTree>
-  </p:cSld>
-  <p:clrMapOvr>
-    <a:masterClrMapping/>
-  </p:clrMapOvr>
-</p:sld>
-</file>
-
-<file path=ppt/slides/slide3.xml><?xml version="1.0" encoding="utf-8"?>
-<p:sld xmlns:a="http://schemas.openxmlformats.org/drawingml/2006/main" xmlns:p="http://schemas.openxmlformats.org/presentationml/2006/main" xmlns:r="http://schemas.openxmlformats.org/officeDocument/2006/relationships">
-  <p:cSld>
-    <p:bg>
-      <p:bgPr>
-        <a:solidFill>
-          <a:srgbClr val="9C90E6"/>
-        </a:solidFill>
-        <a:effectLst/>
-      </p:bgPr>
-    </p:bg>
-    <p:spTree>
-      <p:nvGrpSpPr>
-        <p:cNvPr id="1" name=""/>
-        <p:cNvGrpSpPr/>
-        <p:nvPr/>
-      </p:nvGrpSpPr>
-      <p:grpSpPr/>
-      <p:sp>
-        <p:nvSpPr>
-          <p:cNvPr id="2" name="Rectangle 1"/>
-          <p:cNvSpPr/>
-          <p:nvPr/>
-        </p:nvSpPr>
-        <p:spPr>
-          <a:xfrm>
-            <a:off x="0" y="5390388"/>
-            <a:ext cx="12191695" cy="15875"/>
-          </a:xfrm>
-          <a:prstGeom prst="rect">
-            <a:avLst/>
-          </a:prstGeom>
-          <a:solidFill>
-            <a:srgbClr val="F3F4FA"/>
-          </a:solidFill>
-          <a:ln>
-            <a:noFill/>
-          </a:ln>
-          <a:effectLst/>
-        </p:spPr>
-        <p:style>
-          <a:lnRef idx="1">
-            <a:schemeClr val="accent1"/>
-          </a:lnRef>
-          <a:fillRef idx="3">
-            <a:schemeClr val="accent1"/>
-          </a:fillRef>
-          <a:effectRef idx="2">
-            <a:schemeClr val="accent1"/>
-          </a:effectRef>
-          <a:fontRef idx="minor">
-            <a:schemeClr val="lt1"/>
-          </a:fontRef>
-        </p:style>
-        <p:txBody>
-          <a:bodyPr rtlCol="0" anchor="ctr"/>
-          <a:lstStyle/>
-          <a:p>
-            <a:pPr algn="ctr"/>
-          </a:p>
-        </p:txBody>
-      </p:sp>
-      <p:sp>
-        <p:nvSpPr>
-          <p:cNvPr id="3" name="TextBox 2"/>
-          <p:cNvSpPr txBox="1"/>
-          <p:nvPr/>
-        </p:nvSpPr>
-        <p:spPr>
-          <a:xfrm>
-            <a:off x="731520" y="2996438"/>
-            <a:ext cx="10728655" cy="2743200"/>
-          </a:xfrm>
-          <a:prstGeom prst="rect">
-            <a:avLst/>
-          </a:prstGeom>
-          <a:noFill/>
-        </p:spPr>
-        <p:txBody>
-          <a:bodyPr wrap="square" lIns="0" rIns="0" tIns="0" bIns="0" anchor="b">
-            <a:spAutoFit/>
-          </a:bodyPr>
-          <a:lstStyle/>
-          <a:p>
-            <a:pPr algn="r">
-              <a:lnSpc>
-                <a:spcPct val="95000"/>
-              </a:lnSpc>
-            </a:pPr>
-            <a:r>
-              <a:rPr sz="11000" b="1" i="0" spc="-220">
-                <a:solidFill>
-                  <a:srgbClr val="F3F4FA"/>
-                </a:solidFill>
-                <a:latin typeface="Inter"/>
-              </a:rPr>
-              <a:t>Why Now</a:t>
-            </a:r>
-          </a:p>
-        </p:txBody>
-      </p:sp>
-      <p:sp>
-        <p:nvSpPr>
-          <p:cNvPr id="4" name="TextBox 3"/>
-          <p:cNvSpPr txBox="1"/>
-          <p:nvPr/>
-        </p:nvSpPr>
-        <p:spPr>
-          <a:xfrm>
-            <a:off x="731520" y="640080"/>
-            <a:ext cx="7315200" cy="457200"/>
-          </a:xfrm>
-          <a:prstGeom prst="rect">
-            <a:avLst/>
-          </a:prstGeom>
-          <a:noFill/>
-        </p:spPr>
-        <p:txBody>
-          <a:bodyPr wrap="square" lIns="0" rIns="0" tIns="0" bIns="0" anchor="t">
-            <a:spAutoFit/>
-          </a:bodyPr>
-          <a:lstStyle/>
-          <a:p>
-            <a:pPr algn="l">
-              <a:lnSpc>
-                <a:spcPct val="115000"/>
-              </a:lnSpc>
-            </a:pPr>
-            <a:r>
-              <a:rPr sz="1600" b="0" i="0">
-                <a:solidFill>
-                  <a:srgbClr val="F3F4FA"/>
-                </a:solidFill>
-                <a:latin typeface="DM Sans"/>
-              </a:rPr>
-              <a:t>01</a:t>
-            </a:r>
-          </a:p>
-        </p:txBody>
-      </p:sp>
-      <p:pic>
-        <p:nvPicPr>
-          <p:cNvPr id="5" name="Picture 4" descr="logo-icon-deep-blue.png"/>
-          <p:cNvPicPr>
-            <a:picLocks noChangeAspect="1"/>
-          </p:cNvPicPr>
-          <p:nvPr/>
-        </p:nvPicPr>
-        <p:blipFill>
-          <a:blip r:embed="rId2"/>
-          <a:stretch>
-            <a:fillRect/>
-          </a:stretch>
-        </p:blipFill>
-        <p:spPr>
-          <a:xfrm>
-            <a:off x="731520" y="6080760"/>
-            <a:ext cx="365760" cy="365760"/>
-          </a:xfrm>
-          <a:prstGeom prst="rect">
-            <a:avLst/>
-          </a:prstGeom>
-        </p:spPr>
-      </p:pic>
+          </a:p>
+        </p:txBody>
+      </p:sp>
     </p:spTree>
   </p:cSld>
   <p:clrMapOvr>
@@ -6585,7 +6342,7 @@
     <p:bg>
       <p:bgPr>
         <a:solidFill>
-          <a:srgbClr val="F3F4FA"/>
+          <a:srgbClr val="FFFFFF"/>
         </a:solidFill>
         <a:effectLst/>
       </p:bgPr>
@@ -6597,16 +6354,40 @@
         <p:nvPr/>
       </p:nvGrpSpPr>
       <p:grpSpPr/>
-      <p:sp>
-        <p:nvSpPr>
-          <p:cNvPr id="2" name="TextBox 1"/>
+      <p:pic>
+        <p:nvPicPr>
+          <p:cNvPr id="2" name="Picture 1" descr="dotband-grey.png"/>
+          <p:cNvPicPr>
+            <a:picLocks noChangeAspect="1"/>
+          </p:cNvPicPr>
+          <p:nvPr/>
+        </p:nvPicPr>
+        <p:blipFill>
+          <a:blip r:embed="rId2"/>
+          <a:stretch>
+            <a:fillRect/>
+          </a:stretch>
+        </p:blipFill>
+        <p:spPr>
+          <a:xfrm>
+            <a:off x="-45720" y="0"/>
+            <a:ext cx="1444752" cy="6858000"/>
+          </a:xfrm>
+          <a:prstGeom prst="rect">
+            <a:avLst/>
+          </a:prstGeom>
+        </p:spPr>
+      </p:pic>
+      <p:sp>
+        <p:nvSpPr>
+          <p:cNvPr id="3" name="TextBox 2"/>
           <p:cNvSpPr txBox="1"/>
           <p:nvPr/>
         </p:nvSpPr>
         <p:spPr>
           <a:xfrm>
-            <a:off x="731520" y="640080"/>
-            <a:ext cx="10728655" cy="1097280"/>
+            <a:off x="758952" y="612648"/>
+            <a:ext cx="10673791" cy="1188720"/>
           </a:xfrm>
           <a:prstGeom prst="rect">
             <a:avLst/>
@@ -6621,11 +6402,11 @@
           <a:p>
             <a:pPr algn="l">
               <a:lnSpc>
-                <a:spcPct val="105000"/>
+                <a:spcPct val="100000"/>
               </a:lnSpc>
             </a:pPr>
             <a:r>
-              <a:rPr sz="3600" b="1" i="0" spc="-36">
+              <a:rPr sz="2790" b="1" i="0" spc="-98">
                 <a:solidFill>
                   <a:srgbClr val="0D145F"/>
                 </a:solidFill>
@@ -6638,13 +6419,13 @@
       </p:sp>
       <p:sp>
         <p:nvSpPr>
-          <p:cNvPr id="3" name="TextBox 2"/>
+          <p:cNvPr id="4" name="TextBox 3"/>
           <p:cNvSpPr txBox="1"/>
           <p:nvPr/>
         </p:nvSpPr>
         <p:spPr>
           <a:xfrm>
-            <a:off x="731520" y="1943100"/>
+            <a:off x="731520" y="1730121"/>
             <a:ext cx="3271418" cy="1280160"/>
           </a:xfrm>
           <a:prstGeom prst="rect">
@@ -6664,7 +6445,7 @@
               </a:lnSpc>
             </a:pPr>
             <a:r>
-              <a:rPr sz="7200" b="1" i="0" spc="-216">
+              <a:rPr sz="6480" b="1" i="0" spc="-194">
                 <a:solidFill>
                   <a:srgbClr val="0D145F"/>
                 </a:solidFill>
@@ -6677,13 +6458,13 @@
       </p:sp>
       <p:sp>
         <p:nvSpPr>
-          <p:cNvPr id="4" name="Rectangle 3"/>
+          <p:cNvPr id="5" name="Rectangle 4"/>
           <p:cNvSpPr/>
           <p:nvPr/>
         </p:nvSpPr>
         <p:spPr>
           <a:xfrm>
-            <a:off x="731520" y="3406140"/>
+            <a:off x="731520" y="3193161"/>
             <a:ext cx="822960" cy="50800"/>
           </a:xfrm>
           <a:prstGeom prst="rect">
@@ -6721,13 +6502,13 @@
       </p:sp>
       <p:sp>
         <p:nvSpPr>
-          <p:cNvPr id="5" name="TextBox 4"/>
+          <p:cNvPr id="6" name="TextBox 5"/>
           <p:cNvSpPr txBox="1"/>
           <p:nvPr/>
         </p:nvSpPr>
         <p:spPr>
           <a:xfrm>
-            <a:off x="731520" y="3634740"/>
+            <a:off x="731520" y="3421761"/>
             <a:ext cx="3271418" cy="822960"/>
           </a:xfrm>
           <a:prstGeom prst="rect">
@@ -6747,7 +6528,7 @@
               </a:lnSpc>
             </a:pPr>
             <a:r>
-              <a:rPr sz="2000" b="0" i="0" spc="-20">
+              <a:rPr sz="1800" b="0" i="0" spc="-18">
                 <a:solidFill>
                   <a:srgbClr val="131416"/>
                 </a:solidFill>
@@ -6760,13 +6541,13 @@
       </p:sp>
       <p:sp>
         <p:nvSpPr>
-          <p:cNvPr id="6" name="TextBox 5"/>
+          <p:cNvPr id="7" name="TextBox 6"/>
           <p:cNvSpPr txBox="1"/>
           <p:nvPr/>
         </p:nvSpPr>
         <p:spPr>
           <a:xfrm>
-            <a:off x="4460138" y="1943100"/>
+            <a:off x="4460138" y="1730121"/>
             <a:ext cx="3271418" cy="1280160"/>
           </a:xfrm>
           <a:prstGeom prst="rect">
@@ -6786,7 +6567,7 @@
               </a:lnSpc>
             </a:pPr>
             <a:r>
-              <a:rPr sz="7200" b="1" i="0" spc="-216">
+              <a:rPr sz="6480" b="1" i="0" spc="-194">
                 <a:solidFill>
                   <a:srgbClr val="0D145F"/>
                 </a:solidFill>
@@ -6799,13 +6580,13 @@
       </p:sp>
       <p:sp>
         <p:nvSpPr>
-          <p:cNvPr id="7" name="Rectangle 6"/>
+          <p:cNvPr id="8" name="Rectangle 7"/>
           <p:cNvSpPr/>
           <p:nvPr/>
         </p:nvSpPr>
         <p:spPr>
           <a:xfrm>
-            <a:off x="4460138" y="3406140"/>
+            <a:off x="4460138" y="3193161"/>
             <a:ext cx="822960" cy="50800"/>
           </a:xfrm>
           <a:prstGeom prst="rect">
@@ -6843,13 +6624,13 @@
       </p:sp>
       <p:sp>
         <p:nvSpPr>
-          <p:cNvPr id="8" name="TextBox 7"/>
+          <p:cNvPr id="9" name="TextBox 8"/>
           <p:cNvSpPr txBox="1"/>
           <p:nvPr/>
         </p:nvSpPr>
         <p:spPr>
           <a:xfrm>
-            <a:off x="4460138" y="3634740"/>
+            <a:off x="4460138" y="3421761"/>
             <a:ext cx="3271418" cy="822960"/>
           </a:xfrm>
           <a:prstGeom prst="rect">
@@ -6869,7 +6650,7 @@
               </a:lnSpc>
             </a:pPr>
             <a:r>
-              <a:rPr sz="2000" b="0" i="0" spc="-20">
+              <a:rPr sz="1800" b="0" i="0" spc="-18">
                 <a:solidFill>
                   <a:srgbClr val="131416"/>
                 </a:solidFill>
@@ -6882,13 +6663,13 @@
       </p:sp>
       <p:sp>
         <p:nvSpPr>
-          <p:cNvPr id="9" name="TextBox 8"/>
+          <p:cNvPr id="10" name="TextBox 9"/>
           <p:cNvSpPr txBox="1"/>
           <p:nvPr/>
         </p:nvSpPr>
         <p:spPr>
           <a:xfrm>
-            <a:off x="8188756" y="1943100"/>
+            <a:off x="8188756" y="1730121"/>
             <a:ext cx="3271418" cy="1280160"/>
           </a:xfrm>
           <a:prstGeom prst="rect">
@@ -6908,7 +6689,7 @@
               </a:lnSpc>
             </a:pPr>
             <a:r>
-              <a:rPr sz="7200" b="1" i="0" spc="-216">
+              <a:rPr sz="6480" b="1" i="0" spc="-194">
                 <a:solidFill>
                   <a:srgbClr val="0D145F"/>
                 </a:solidFill>
@@ -6921,13 +6702,13 @@
       </p:sp>
       <p:sp>
         <p:nvSpPr>
-          <p:cNvPr id="10" name="Rectangle 9"/>
+          <p:cNvPr id="11" name="Rectangle 10"/>
           <p:cNvSpPr/>
           <p:nvPr/>
         </p:nvSpPr>
         <p:spPr>
           <a:xfrm>
-            <a:off x="8188756" y="3406140"/>
+            <a:off x="8188756" y="3193161"/>
             <a:ext cx="822960" cy="50800"/>
           </a:xfrm>
           <a:prstGeom prst="rect">
@@ -6965,13 +6746,13 @@
       </p:sp>
       <p:sp>
         <p:nvSpPr>
-          <p:cNvPr id="11" name="TextBox 10"/>
+          <p:cNvPr id="12" name="TextBox 11"/>
           <p:cNvSpPr txBox="1"/>
           <p:nvPr/>
         </p:nvSpPr>
         <p:spPr>
           <a:xfrm>
-            <a:off x="8188756" y="3634740"/>
+            <a:off x="8188756" y="3421761"/>
             <a:ext cx="3271418" cy="822960"/>
           </a:xfrm>
           <a:prstGeom prst="rect">
@@ -6991,76 +6772,13 @@
               </a:lnSpc>
             </a:pPr>
             <a:r>
-              <a:rPr sz="2000" b="0" i="0" spc="-20">
+              <a:rPr sz="1800" b="0" i="0" spc="-18">
                 <a:solidFill>
                   <a:srgbClr val="131416"/>
                 </a:solidFill>
                 <a:latin typeface="Inter"/>
               </a:rPr>
               <a:t>core principles guide our work</a:t>
-            </a:r>
-          </a:p>
-        </p:txBody>
-      </p:sp>
-      <p:pic>
-        <p:nvPicPr>
-          <p:cNvPr id="12" name="Picture 11" descr="logo-icon-deep-blue.png"/>
-          <p:cNvPicPr>
-            <a:picLocks noChangeAspect="1"/>
-          </p:cNvPicPr>
-          <p:nvPr/>
-        </p:nvPicPr>
-        <p:blipFill>
-          <a:blip r:embed="rId2"/>
-          <a:stretch>
-            <a:fillRect/>
-          </a:stretch>
-        </p:blipFill>
-        <p:spPr>
-          <a:xfrm>
-            <a:off x="11167567" y="6291072"/>
-            <a:ext cx="292608" cy="292608"/>
-          </a:xfrm>
-          <a:prstGeom prst="rect">
-            <a:avLst/>
-          </a:prstGeom>
-        </p:spPr>
-      </p:pic>
-      <p:sp>
-        <p:nvSpPr>
-          <p:cNvPr id="13" name="TextBox 12"/>
-          <p:cNvSpPr txBox="1"/>
-          <p:nvPr/>
-        </p:nvSpPr>
-        <p:spPr>
-          <a:xfrm>
-            <a:off x="731520" y="6327648"/>
-            <a:ext cx="5486400" cy="274320"/>
-          </a:xfrm>
-          <a:prstGeom prst="rect">
-            <a:avLst/>
-          </a:prstGeom>
-          <a:noFill/>
-        </p:spPr>
-        <p:txBody>
-          <a:bodyPr wrap="square" lIns="0" rIns="0" tIns="0" bIns="0" anchor="t">
-            <a:spAutoFit/>
-          </a:bodyPr>
-          <a:lstStyle/>
-          <a:p>
-            <a:pPr algn="l">
-              <a:lnSpc>
-                <a:spcPct val="115000"/>
-              </a:lnSpc>
-            </a:pPr>
-            <a:r>
-              <a:rPr sz="1000" b="0" i="0">
-                <a:solidFill>
-                  <a:srgbClr val="5F646D"/>
-                </a:solidFill>
-                <a:latin typeface="DM Sans"/>
-              </a:rPr>
-              <a:t>4</a:t>
             </a:r>
           </a:p>
         </p:txBody>
@@ -7079,7 +6797,7 @@
     <p:bg>
       <p:bgPr>
         <a:solidFill>
-          <a:srgbClr val="F3F4FA"/>
+          <a:srgbClr val="FFFFFF"/>
         </a:solidFill>
         <a:effectLst/>
       </p:bgPr>
@@ -7091,16 +6809,40 @@
         <p:nvPr/>
       </p:nvGrpSpPr>
       <p:grpSpPr/>
-      <p:sp>
-        <p:nvSpPr>
-          <p:cNvPr id="2" name="TextBox 1"/>
+      <p:pic>
+        <p:nvPicPr>
+          <p:cNvPr id="2" name="Picture 1" descr="dotband-grey.png"/>
+          <p:cNvPicPr>
+            <a:picLocks noChangeAspect="1"/>
+          </p:cNvPicPr>
+          <p:nvPr/>
+        </p:nvPicPr>
+        <p:blipFill>
+          <a:blip r:embed="rId2"/>
+          <a:stretch>
+            <a:fillRect/>
+          </a:stretch>
+        </p:blipFill>
+        <p:spPr>
+          <a:xfrm>
+            <a:off x="-45720" y="0"/>
+            <a:ext cx="1444752" cy="6858000"/>
+          </a:xfrm>
+          <a:prstGeom prst="rect">
+            <a:avLst/>
+          </a:prstGeom>
+        </p:spPr>
+      </p:pic>
+      <p:sp>
+        <p:nvSpPr>
+          <p:cNvPr id="3" name="TextBox 2"/>
           <p:cNvSpPr txBox="1"/>
           <p:nvPr/>
         </p:nvSpPr>
         <p:spPr>
           <a:xfrm>
-            <a:off x="731520" y="640080"/>
-            <a:ext cx="10728655" cy="1097280"/>
+            <a:off x="758952" y="612648"/>
+            <a:ext cx="10673791" cy="1188720"/>
           </a:xfrm>
           <a:prstGeom prst="rect">
             <a:avLst/>
@@ -7115,11 +6857,11 @@
           <a:p>
             <a:pPr algn="l">
               <a:lnSpc>
-                <a:spcPct val="105000"/>
+                <a:spcPct val="100000"/>
               </a:lnSpc>
             </a:pPr>
             <a:r>
-              <a:rPr sz="3600" b="1" i="0" spc="-36">
+              <a:rPr sz="2790" b="1" i="0" spc="-98">
                 <a:solidFill>
                   <a:srgbClr val="0D145F"/>
                 </a:solidFill>
@@ -7132,25 +6874,25 @@
       </p:sp>
       <p:graphicFrame>
         <p:nvGraphicFramePr>
-          <p:cNvPr id="3" name="Chart 2"/>
+          <p:cNvPr id="4" name="Chart 3"/>
           <p:cNvGraphicFramePr>
             <a:graphicFrameLocks noGrp="1"/>
           </p:cNvGraphicFramePr>
           <p:nvPr/>
         </p:nvGraphicFramePr>
         <p:xfrm>
-          <a:off x="731520" y="1577340.0"/>
-          <a:ext cx="10728655" cy="4183380.0"/>
+          <a:off x="731520" y="1364361.0"/>
+          <a:ext cx="10728655" cy="4396359.0"/>
         </p:xfrm>
         <a:graphic>
           <a:graphicData uri="http://schemas.openxmlformats.org/drawingml/2006/chart">
-            <c:chart xmlns:c="http://schemas.openxmlformats.org/drawingml/2006/chart" r:id="rId2"/>
+            <c:chart xmlns:c="http://schemas.openxmlformats.org/drawingml/2006/chart" r:id="rId3"/>
           </a:graphicData>
         </a:graphic>
       </p:graphicFrame>
       <p:sp>
         <p:nvSpPr>
-          <p:cNvPr id="4" name="TextBox 3"/>
+          <p:cNvPr id="5" name="TextBox 4"/>
           <p:cNvSpPr txBox="1"/>
           <p:nvPr/>
         </p:nvSpPr>
@@ -7176,76 +6918,13 @@
               </a:lnSpc>
             </a:pPr>
             <a:r>
-              <a:rPr sz="1100" b="0" i="0">
+              <a:rPr sz="990" b="0" i="0">
                 <a:solidFill>
                   <a:srgbClr val="5F646D"/>
                 </a:solidFill>
                 <a:latin typeface="DM Sans"/>
               </a:rPr>
               <a:t>Source: Illustrative numbers — replace with real data</a:t>
-            </a:r>
-          </a:p>
-        </p:txBody>
-      </p:sp>
-      <p:pic>
-        <p:nvPicPr>
-          <p:cNvPr id="5" name="Picture 4" descr="logo-icon-deep-blue.png"/>
-          <p:cNvPicPr>
-            <a:picLocks noChangeAspect="1"/>
-          </p:cNvPicPr>
-          <p:nvPr/>
-        </p:nvPicPr>
-        <p:blipFill>
-          <a:blip r:embed="rId3"/>
-          <a:stretch>
-            <a:fillRect/>
-          </a:stretch>
-        </p:blipFill>
-        <p:spPr>
-          <a:xfrm>
-            <a:off x="11167567" y="6291072"/>
-            <a:ext cx="292608" cy="292608"/>
-          </a:xfrm>
-          <a:prstGeom prst="rect">
-            <a:avLst/>
-          </a:prstGeom>
-        </p:spPr>
-      </p:pic>
-      <p:sp>
-        <p:nvSpPr>
-          <p:cNvPr id="6" name="TextBox 5"/>
-          <p:cNvSpPr txBox="1"/>
-          <p:nvPr/>
-        </p:nvSpPr>
-        <p:spPr>
-          <a:xfrm>
-            <a:off x="731520" y="6327648"/>
-            <a:ext cx="5486400" cy="274320"/>
-          </a:xfrm>
-          <a:prstGeom prst="rect">
-            <a:avLst/>
-          </a:prstGeom>
-          <a:noFill/>
-        </p:spPr>
-        <p:txBody>
-          <a:bodyPr wrap="square" lIns="0" rIns="0" tIns="0" bIns="0" anchor="t">
-            <a:spAutoFit/>
-          </a:bodyPr>
-          <a:lstStyle/>
-          <a:p>
-            <a:pPr algn="l">
-              <a:lnSpc>
-                <a:spcPct val="115000"/>
-              </a:lnSpc>
-            </a:pPr>
-            <a:r>
-              <a:rPr sz="1000" b="0" i="0">
-                <a:solidFill>
-                  <a:srgbClr val="5F646D"/>
-                </a:solidFill>
-                <a:latin typeface="DM Sans"/>
-              </a:rPr>
-              <a:t>5</a:t>
             </a:r>
           </a:p>
         </p:txBody>
@@ -7264,7 +6943,7 @@
     <p:bg>
       <p:bgPr>
         <a:solidFill>
-          <a:srgbClr val="F3F4FA"/>
+          <a:srgbClr val="FFFFFF"/>
         </a:solidFill>
         <a:effectLst/>
       </p:bgPr>
@@ -7276,16 +6955,40 @@
         <p:nvPr/>
       </p:nvGrpSpPr>
       <p:grpSpPr/>
-      <p:sp>
-        <p:nvSpPr>
-          <p:cNvPr id="2" name="TextBox 1"/>
+      <p:pic>
+        <p:nvPicPr>
+          <p:cNvPr id="2" name="Picture 1" descr="dotband-grey.png"/>
+          <p:cNvPicPr>
+            <a:picLocks noChangeAspect="1"/>
+          </p:cNvPicPr>
+          <p:nvPr/>
+        </p:nvPicPr>
+        <p:blipFill>
+          <a:blip r:embed="rId2"/>
+          <a:stretch>
+            <a:fillRect/>
+          </a:stretch>
+        </p:blipFill>
+        <p:spPr>
+          <a:xfrm>
+            <a:off x="-45720" y="0"/>
+            <a:ext cx="1444752" cy="6858000"/>
+          </a:xfrm>
+          <a:prstGeom prst="rect">
+            <a:avLst/>
+          </a:prstGeom>
+        </p:spPr>
+      </p:pic>
+      <p:sp>
+        <p:nvSpPr>
+          <p:cNvPr id="3" name="TextBox 2"/>
           <p:cNvSpPr txBox="1"/>
           <p:nvPr/>
         </p:nvSpPr>
         <p:spPr>
           <a:xfrm>
-            <a:off x="731520" y="640080"/>
-            <a:ext cx="10728655" cy="1097280"/>
+            <a:off x="758952" y="612648"/>
+            <a:ext cx="10673791" cy="1188720"/>
           </a:xfrm>
           <a:prstGeom prst="rect">
             <a:avLst/>
@@ -7300,11 +7003,11 @@
           <a:p>
             <a:pPr algn="l">
               <a:lnSpc>
-                <a:spcPct val="105000"/>
+                <a:spcPct val="100000"/>
               </a:lnSpc>
             </a:pPr>
             <a:r>
-              <a:rPr sz="3600" b="1" i="0" spc="-36">
+              <a:rPr sz="2790" b="1" i="0" spc="-98">
                 <a:solidFill>
                   <a:srgbClr val="0D145F"/>
                 </a:solidFill>
@@ -7317,13 +7020,13 @@
       </p:sp>
       <p:sp>
         <p:nvSpPr>
-          <p:cNvPr id="3" name="Oval 2"/>
+          <p:cNvPr id="4" name="Oval 3"/>
           <p:cNvSpPr/>
           <p:nvPr/>
         </p:nvSpPr>
         <p:spPr>
           <a:xfrm>
-            <a:off x="731520" y="2068830"/>
+            <a:off x="731520" y="1962340"/>
             <a:ext cx="640080" cy="640080"/>
           </a:xfrm>
           <a:prstGeom prst="ellipse">
@@ -7361,21 +7064,21 @@
       </p:sp>
       <p:pic>
         <p:nvPicPr>
-          <p:cNvPr id="4" name="Picture 3" descr="coffee.png"/>
+          <p:cNvPr id="5" name="Picture 4" descr="coffee.png"/>
           <p:cNvPicPr>
             <a:picLocks noChangeAspect="1"/>
           </p:cNvPicPr>
           <p:nvPr/>
         </p:nvPicPr>
         <p:blipFill>
-          <a:blip r:embed="rId2"/>
+          <a:blip r:embed="rId3"/>
           <a:stretch>
             <a:fillRect/>
           </a:stretch>
         </p:blipFill>
         <p:spPr>
           <a:xfrm>
-            <a:off x="885139" y="2222449"/>
+            <a:off x="885139" y="2115959"/>
             <a:ext cx="332842" cy="332842"/>
           </a:xfrm>
           <a:prstGeom prst="rect">
@@ -7385,13 +7088,13 @@
       </p:pic>
       <p:sp>
         <p:nvSpPr>
-          <p:cNvPr id="5" name="TextBox 4"/>
+          <p:cNvPr id="6" name="TextBox 5"/>
           <p:cNvSpPr txBox="1"/>
           <p:nvPr/>
         </p:nvSpPr>
         <p:spPr>
           <a:xfrm>
-            <a:off x="1600200" y="2087118"/>
+            <a:off x="1600200" y="1980628"/>
             <a:ext cx="2402738" cy="457200"/>
           </a:xfrm>
           <a:prstGeom prst="rect">
@@ -7411,7 +7114,7 @@
               </a:lnSpc>
             </a:pPr>
             <a:r>
-              <a:rPr sz="1800" b="1" i="0" spc="-18">
+              <a:rPr sz="1620" b="1" i="0" spc="-16">
                 <a:solidFill>
                   <a:srgbClr val="0D145F"/>
                 </a:solidFill>
@@ -7424,13 +7127,13 @@
       </p:sp>
       <p:sp>
         <p:nvSpPr>
-          <p:cNvPr id="6" name="TextBox 5"/>
+          <p:cNvPr id="7" name="TextBox 6"/>
           <p:cNvSpPr txBox="1"/>
           <p:nvPr/>
         </p:nvSpPr>
         <p:spPr>
           <a:xfrm>
-            <a:off x="1600200" y="2459736"/>
+            <a:off x="1600200" y="2353246"/>
             <a:ext cx="2402738" cy="1163574"/>
           </a:xfrm>
           <a:prstGeom prst="rect">
@@ -7450,7 +7153,7 @@
               </a:lnSpc>
             </a:pPr>
             <a:r>
-              <a:rPr sz="1400" b="0" i="0">
+              <a:rPr sz="1260" b="0" i="0">
                 <a:solidFill>
                   <a:srgbClr val="131416"/>
                 </a:solidFill>
@@ -7463,13 +7166,13 @@
       </p:sp>
       <p:sp>
         <p:nvSpPr>
-          <p:cNvPr id="7" name="Oval 6"/>
+          <p:cNvPr id="8" name="Oval 7"/>
           <p:cNvSpPr/>
           <p:nvPr/>
         </p:nvSpPr>
         <p:spPr>
           <a:xfrm>
-            <a:off x="4460138" y="2068830"/>
+            <a:off x="4460138" y="1962340"/>
             <a:ext cx="640080" cy="640080"/>
           </a:xfrm>
           <a:prstGeom prst="ellipse">
@@ -7507,21 +7210,21 @@
       </p:sp>
       <p:pic>
         <p:nvPicPr>
-          <p:cNvPr id="8" name="Picture 7" descr="smile.png"/>
+          <p:cNvPr id="9" name="Picture 8" descr="smile.png"/>
           <p:cNvPicPr>
             <a:picLocks noChangeAspect="1"/>
           </p:cNvPicPr>
           <p:nvPr/>
         </p:nvPicPr>
         <p:blipFill>
-          <a:blip r:embed="rId3"/>
+          <a:blip r:embed="rId4"/>
           <a:stretch>
             <a:fillRect/>
           </a:stretch>
         </p:blipFill>
         <p:spPr>
           <a:xfrm>
-            <a:off x="4613757" y="2222449"/>
+            <a:off x="4613757" y="2115959"/>
             <a:ext cx="332842" cy="332842"/>
           </a:xfrm>
           <a:prstGeom prst="rect">
@@ -7531,13 +7234,13 @@
       </p:pic>
       <p:sp>
         <p:nvSpPr>
-          <p:cNvPr id="9" name="TextBox 8"/>
+          <p:cNvPr id="10" name="TextBox 9"/>
           <p:cNvSpPr txBox="1"/>
           <p:nvPr/>
         </p:nvSpPr>
         <p:spPr>
           <a:xfrm>
-            <a:off x="5328818" y="2087118"/>
+            <a:off x="5328818" y="1980628"/>
             <a:ext cx="2402738" cy="457200"/>
           </a:xfrm>
           <a:prstGeom prst="rect">
@@ -7557,7 +7260,7 @@
               </a:lnSpc>
             </a:pPr>
             <a:r>
-              <a:rPr sz="1800" b="1" i="0" spc="-18">
+              <a:rPr sz="1620" b="1" i="0" spc="-16">
                 <a:solidFill>
                   <a:srgbClr val="0D145F"/>
                 </a:solidFill>
@@ -7570,13 +7273,13 @@
       </p:sp>
       <p:sp>
         <p:nvSpPr>
-          <p:cNvPr id="10" name="TextBox 9"/>
+          <p:cNvPr id="11" name="TextBox 10"/>
           <p:cNvSpPr txBox="1"/>
           <p:nvPr/>
         </p:nvSpPr>
         <p:spPr>
           <a:xfrm>
-            <a:off x="5328818" y="2459736"/>
+            <a:off x="5328818" y="2353246"/>
             <a:ext cx="2402738" cy="1163574"/>
           </a:xfrm>
           <a:prstGeom prst="rect">
@@ -7596,7 +7299,7 @@
               </a:lnSpc>
             </a:pPr>
             <a:r>
-              <a:rPr sz="1400" b="0" i="0">
+              <a:rPr sz="1260" b="0" i="0">
                 <a:solidFill>
                   <a:srgbClr val="131416"/>
                 </a:solidFill>
@@ -7609,13 +7312,13 @@
       </p:sp>
       <p:sp>
         <p:nvSpPr>
-          <p:cNvPr id="11" name="Oval 10"/>
+          <p:cNvPr id="12" name="Oval 11"/>
           <p:cNvSpPr/>
           <p:nvPr/>
         </p:nvSpPr>
         <p:spPr>
           <a:xfrm>
-            <a:off x="8188756" y="2068830"/>
+            <a:off x="8188756" y="1962340"/>
             <a:ext cx="640080" cy="640080"/>
           </a:xfrm>
           <a:prstGeom prst="ellipse">
@@ -7653,21 +7356,21 @@
       </p:sp>
       <p:pic>
         <p:nvPicPr>
-          <p:cNvPr id="12" name="Picture 11" descr="compass.png"/>
+          <p:cNvPr id="13" name="Picture 12" descr="compass.png"/>
           <p:cNvPicPr>
             <a:picLocks noChangeAspect="1"/>
           </p:cNvPicPr>
           <p:nvPr/>
         </p:nvPicPr>
         <p:blipFill>
-          <a:blip r:embed="rId4"/>
+          <a:blip r:embed="rId5"/>
           <a:stretch>
             <a:fillRect/>
           </a:stretch>
         </p:blipFill>
         <p:spPr>
           <a:xfrm>
-            <a:off x="8342375" y="2222449"/>
+            <a:off x="8342375" y="2115959"/>
             <a:ext cx="332842" cy="332842"/>
           </a:xfrm>
           <a:prstGeom prst="rect">
@@ -7677,13 +7380,13 @@
       </p:pic>
       <p:sp>
         <p:nvSpPr>
-          <p:cNvPr id="13" name="TextBox 12"/>
+          <p:cNvPr id="14" name="TextBox 13"/>
           <p:cNvSpPr txBox="1"/>
           <p:nvPr/>
         </p:nvSpPr>
         <p:spPr>
           <a:xfrm>
-            <a:off x="9057436" y="2087118"/>
+            <a:off x="9057436" y="1980628"/>
             <a:ext cx="2402738" cy="457200"/>
           </a:xfrm>
           <a:prstGeom prst="rect">
@@ -7703,7 +7406,7 @@
               </a:lnSpc>
             </a:pPr>
             <a:r>
-              <a:rPr sz="1800" b="1" i="0" spc="-18">
+              <a:rPr sz="1620" b="1" i="0" spc="-16">
                 <a:solidFill>
                   <a:srgbClr val="0D145F"/>
                 </a:solidFill>
@@ -7716,13 +7419,13 @@
       </p:sp>
       <p:sp>
         <p:nvSpPr>
-          <p:cNvPr id="14" name="TextBox 13"/>
+          <p:cNvPr id="15" name="TextBox 14"/>
           <p:cNvSpPr txBox="1"/>
           <p:nvPr/>
         </p:nvSpPr>
         <p:spPr>
           <a:xfrm>
-            <a:off x="9057436" y="2459736"/>
+            <a:off x="9057436" y="2353246"/>
             <a:ext cx="2402738" cy="1163574"/>
           </a:xfrm>
           <a:prstGeom prst="rect">
@@ -7742,7 +7445,7 @@
               </a:lnSpc>
             </a:pPr>
             <a:r>
-              <a:rPr sz="1400" b="0" i="0">
+              <a:rPr sz="1260" b="0" i="0">
                 <a:solidFill>
                   <a:srgbClr val="131416"/>
                 </a:solidFill>
@@ -7755,13 +7458,13 @@
       </p:sp>
       <p:sp>
         <p:nvSpPr>
-          <p:cNvPr id="15" name="Oval 14"/>
+          <p:cNvPr id="16" name="Oval 15"/>
           <p:cNvSpPr/>
           <p:nvPr/>
         </p:nvSpPr>
         <p:spPr>
           <a:xfrm>
-            <a:off x="2595829" y="3943350"/>
+            <a:off x="2595829" y="3836860"/>
             <a:ext cx="640080" cy="640080"/>
           </a:xfrm>
           <a:prstGeom prst="ellipse">
@@ -7799,21 +7502,21 @@
       </p:sp>
       <p:pic>
         <p:nvPicPr>
-          <p:cNvPr id="16" name="Picture 15" descr="cross.png"/>
+          <p:cNvPr id="17" name="Picture 16" descr="cross.png"/>
           <p:cNvPicPr>
             <a:picLocks noChangeAspect="1"/>
           </p:cNvPicPr>
           <p:nvPr/>
         </p:nvPicPr>
         <p:blipFill>
-          <a:blip r:embed="rId5"/>
+          <a:blip r:embed="rId6"/>
           <a:stretch>
             <a:fillRect/>
           </a:stretch>
         </p:blipFill>
         <p:spPr>
           <a:xfrm>
-            <a:off x="2749448" y="4096969"/>
+            <a:off x="2749448" y="3990479"/>
             <a:ext cx="332842" cy="332842"/>
           </a:xfrm>
           <a:prstGeom prst="rect">
@@ -7823,13 +7526,13 @@
       </p:pic>
       <p:sp>
         <p:nvSpPr>
-          <p:cNvPr id="17" name="TextBox 16"/>
+          <p:cNvPr id="18" name="TextBox 17"/>
           <p:cNvSpPr txBox="1"/>
           <p:nvPr/>
         </p:nvSpPr>
         <p:spPr>
           <a:xfrm>
-            <a:off x="3464509" y="3961638"/>
+            <a:off x="3464509" y="3855148"/>
             <a:ext cx="2402738" cy="457200"/>
           </a:xfrm>
           <a:prstGeom prst="rect">
@@ -7849,7 +7552,7 @@
               </a:lnSpc>
             </a:pPr>
             <a:r>
-              <a:rPr sz="1800" b="1" i="0" spc="-18">
+              <a:rPr sz="1620" b="1" i="0" spc="-16">
                 <a:solidFill>
                   <a:srgbClr val="0D145F"/>
                 </a:solidFill>
@@ -7862,13 +7565,13 @@
       </p:sp>
       <p:sp>
         <p:nvSpPr>
-          <p:cNvPr id="18" name="TextBox 17"/>
+          <p:cNvPr id="19" name="TextBox 18"/>
           <p:cNvSpPr txBox="1"/>
           <p:nvPr/>
         </p:nvSpPr>
         <p:spPr>
           <a:xfrm>
-            <a:off x="3464509" y="4597146"/>
+            <a:off x="3464509" y="4490656"/>
             <a:ext cx="2402738" cy="900684"/>
           </a:xfrm>
           <a:prstGeom prst="rect">
@@ -7888,7 +7591,7 @@
               </a:lnSpc>
             </a:pPr>
             <a:r>
-              <a:rPr sz="1400" b="0" i="0">
+              <a:rPr sz="1260" b="0" i="0">
                 <a:solidFill>
                   <a:srgbClr val="131416"/>
                 </a:solidFill>
@@ -7901,13 +7604,13 @@
       </p:sp>
       <p:sp>
         <p:nvSpPr>
-          <p:cNvPr id="19" name="Oval 18"/>
+          <p:cNvPr id="20" name="Oval 19"/>
           <p:cNvSpPr/>
           <p:nvPr/>
         </p:nvSpPr>
         <p:spPr>
           <a:xfrm>
-            <a:off x="6324447" y="3943350"/>
+            <a:off x="6324447" y="3836860"/>
             <a:ext cx="640080" cy="640080"/>
           </a:xfrm>
           <a:prstGeom prst="ellipse">
@@ -7945,109 +7648,7 @@
       </p:sp>
       <p:pic>
         <p:nvPicPr>
-          <p:cNvPr id="20" name="Picture 19" descr="briefcase.png"/>
-          <p:cNvPicPr>
-            <a:picLocks noChangeAspect="1"/>
-          </p:cNvPicPr>
-          <p:nvPr/>
-        </p:nvPicPr>
-        <p:blipFill>
-          <a:blip r:embed="rId6"/>
-          <a:stretch>
-            <a:fillRect/>
-          </a:stretch>
-        </p:blipFill>
-        <p:spPr>
-          <a:xfrm>
-            <a:off x="6478066" y="4096969"/>
-            <a:ext cx="332842" cy="332842"/>
-          </a:xfrm>
-          <a:prstGeom prst="rect">
-            <a:avLst/>
-          </a:prstGeom>
-        </p:spPr>
-      </p:pic>
-      <p:sp>
-        <p:nvSpPr>
-          <p:cNvPr id="21" name="TextBox 20"/>
-          <p:cNvSpPr txBox="1"/>
-          <p:nvPr/>
-        </p:nvSpPr>
-        <p:spPr>
-          <a:xfrm>
-            <a:off x="7193127" y="3961638"/>
-            <a:ext cx="2402738" cy="457200"/>
-          </a:xfrm>
-          <a:prstGeom prst="rect">
-            <a:avLst/>
-          </a:prstGeom>
-          <a:noFill/>
-        </p:spPr>
-        <p:txBody>
-          <a:bodyPr wrap="square" lIns="0" rIns="0" tIns="0" bIns="0" anchor="t">
-            <a:spAutoFit/>
-          </a:bodyPr>
-          <a:lstStyle/>
-          <a:p>
-            <a:pPr algn="l">
-              <a:lnSpc>
-                <a:spcPct val="115000"/>
-              </a:lnSpc>
-            </a:pPr>
-            <a:r>
-              <a:rPr sz="1800" b="1" i="0" spc="-18">
-                <a:solidFill>
-                  <a:srgbClr val="0D145F"/>
-                </a:solidFill>
-                <a:latin typeface="DM Sans"/>
-              </a:rPr>
-              <a:t>Career support</a:t>
-            </a:r>
-          </a:p>
-        </p:txBody>
-      </p:sp>
-      <p:sp>
-        <p:nvSpPr>
-          <p:cNvPr id="22" name="TextBox 21"/>
-          <p:cNvSpPr txBox="1"/>
-          <p:nvPr/>
-        </p:nvSpPr>
-        <p:spPr>
-          <a:xfrm>
-            <a:off x="7193127" y="4334256"/>
-            <a:ext cx="2402738" cy="1163574"/>
-          </a:xfrm>
-          <a:prstGeom prst="rect">
-            <a:avLst/>
-          </a:prstGeom>
-          <a:noFill/>
-        </p:spPr>
-        <p:txBody>
-          <a:bodyPr wrap="square" lIns="0" rIns="0" tIns="0" bIns="0" anchor="t">
-            <a:spAutoFit/>
-          </a:bodyPr>
-          <a:lstStyle/>
-          <a:p>
-            <a:pPr algn="l">
-              <a:lnSpc>
-                <a:spcPct val="140000"/>
-              </a:lnSpc>
-            </a:pPr>
-            <a:r>
-              <a:rPr sz="1400" b="0" i="0">
-                <a:solidFill>
-                  <a:srgbClr val="131416"/>
-                </a:solidFill>
-                <a:latin typeface="DM Sans"/>
-              </a:rPr>
-              <a:t>Mentors for internships and work after graduation.</a:t>
-            </a:r>
-          </a:p>
-        </p:txBody>
-      </p:sp>
-      <p:pic>
-        <p:nvPicPr>
-          <p:cNvPr id="23" name="Picture 22" descr="logo-icon-deep-blue.png"/>
+          <p:cNvPr id="21" name="Picture 20" descr="briefcase.png"/>
           <p:cNvPicPr>
             <a:picLocks noChangeAspect="1"/>
           </p:cNvPicPr>
@@ -8061,8 +7662,8 @@
         </p:blipFill>
         <p:spPr>
           <a:xfrm>
-            <a:off x="11167567" y="6291072"/>
-            <a:ext cx="292608" cy="292608"/>
+            <a:off x="6478066" y="3990479"/>
+            <a:ext cx="332842" cy="332842"/>
           </a:xfrm>
           <a:prstGeom prst="rect">
             <a:avLst/>
@@ -8071,14 +7672,14 @@
       </p:pic>
       <p:sp>
         <p:nvSpPr>
-          <p:cNvPr id="24" name="TextBox 23"/>
+          <p:cNvPr id="22" name="TextBox 21"/>
           <p:cNvSpPr txBox="1"/>
           <p:nvPr/>
         </p:nvSpPr>
         <p:spPr>
           <a:xfrm>
-            <a:off x="731520" y="6327648"/>
-            <a:ext cx="5486400" cy="274320"/>
+            <a:off x="7193127" y="3855148"/>
+            <a:ext cx="2402738" cy="457200"/>
           </a:xfrm>
           <a:prstGeom prst="rect">
             <a:avLst/>
@@ -8097,13 +7698,52 @@
               </a:lnSpc>
             </a:pPr>
             <a:r>
-              <a:rPr sz="1000" b="0" i="0">
-                <a:solidFill>
-                  <a:srgbClr val="5F646D"/>
+              <a:rPr sz="1620" b="1" i="0" spc="-16">
+                <a:solidFill>
+                  <a:srgbClr val="0D145F"/>
                 </a:solidFill>
                 <a:latin typeface="DM Sans"/>
               </a:rPr>
-              <a:t>6</a:t>
+              <a:t>Career support</a:t>
+            </a:r>
+          </a:p>
+        </p:txBody>
+      </p:sp>
+      <p:sp>
+        <p:nvSpPr>
+          <p:cNvPr id="23" name="TextBox 22"/>
+          <p:cNvSpPr txBox="1"/>
+          <p:nvPr/>
+        </p:nvSpPr>
+        <p:spPr>
+          <a:xfrm>
+            <a:off x="7193127" y="4227766"/>
+            <a:ext cx="2402738" cy="1163574"/>
+          </a:xfrm>
+          <a:prstGeom prst="rect">
+            <a:avLst/>
+          </a:prstGeom>
+          <a:noFill/>
+        </p:spPr>
+        <p:txBody>
+          <a:bodyPr wrap="square" lIns="0" rIns="0" tIns="0" bIns="0" anchor="t">
+            <a:spAutoFit/>
+          </a:bodyPr>
+          <a:lstStyle/>
+          <a:p>
+            <a:pPr algn="l">
+              <a:lnSpc>
+                <a:spcPct val="140000"/>
+              </a:lnSpc>
+            </a:pPr>
+            <a:r>
+              <a:rPr sz="1260" b="0" i="0">
+                <a:solidFill>
+                  <a:srgbClr val="131416"/>
+                </a:solidFill>
+                <a:latin typeface="DM Sans"/>
+              </a:rPr>
+              <a:t>Mentors for internships and work after graduation.</a:t>
             </a:r>
           </a:p>
         </p:txBody>
@@ -8122,7 +7762,7 @@
     <p:bg>
       <p:bgPr>
         <a:solidFill>
-          <a:srgbClr val="FFEFD5"/>
+          <a:srgbClr val="FFFFFF"/>
         </a:solidFill>
         <a:effectLst/>
       </p:bgPr>
@@ -8134,16 +7774,40 @@
         <p:nvPr/>
       </p:nvGrpSpPr>
       <p:grpSpPr/>
-      <p:sp>
-        <p:nvSpPr>
-          <p:cNvPr id="2" name="TextBox 1"/>
+      <p:pic>
+        <p:nvPicPr>
+          <p:cNvPr id="2" name="Picture 1" descr="dotband-grey.png"/>
+          <p:cNvPicPr>
+            <a:picLocks noChangeAspect="1"/>
+          </p:cNvPicPr>
+          <p:nvPr/>
+        </p:nvPicPr>
+        <p:blipFill>
+          <a:blip r:embed="rId2"/>
+          <a:stretch>
+            <a:fillRect/>
+          </a:stretch>
+        </p:blipFill>
+        <p:spPr>
+          <a:xfrm>
+            <a:off x="-45720" y="0"/>
+            <a:ext cx="1444752" cy="6858000"/>
+          </a:xfrm>
+          <a:prstGeom prst="rect">
+            <a:avLst/>
+          </a:prstGeom>
+        </p:spPr>
+      </p:pic>
+      <p:sp>
+        <p:nvSpPr>
+          <p:cNvPr id="3" name="TextBox 2"/>
           <p:cNvSpPr txBox="1"/>
           <p:nvPr/>
         </p:nvSpPr>
         <p:spPr>
           <a:xfrm>
-            <a:off x="731520" y="640080"/>
-            <a:ext cx="10728655" cy="1097280"/>
+            <a:off x="758952" y="612648"/>
+            <a:ext cx="10673791" cy="1188720"/>
           </a:xfrm>
           <a:prstGeom prst="rect">
             <a:avLst/>
@@ -8158,11 +7822,11 @@
           <a:p>
             <a:pPr algn="l">
               <a:lnSpc>
-                <a:spcPct val="105000"/>
+                <a:spcPct val="100000"/>
               </a:lnSpc>
             </a:pPr>
             <a:r>
-              <a:rPr sz="3600" b="1" i="0" spc="-36">
+              <a:rPr sz="2790" b="1" i="0" spc="-98">
                 <a:solidFill>
                   <a:srgbClr val="0D145F"/>
                 </a:solidFill>
@@ -8175,13 +7839,13 @@
       </p:sp>
       <p:sp>
         <p:nvSpPr>
-          <p:cNvPr id="3" name="Rectangle 2"/>
+          <p:cNvPr id="4" name="Rectangle 3"/>
           <p:cNvSpPr/>
           <p:nvPr/>
         </p:nvSpPr>
         <p:spPr>
           <a:xfrm>
-            <a:off x="1804385" y="2609850"/>
+            <a:off x="1804385" y="2396871"/>
             <a:ext cx="8582924" cy="38100"/>
           </a:xfrm>
           <a:prstGeom prst="rect">
@@ -8219,13 +7883,13 @@
       </p:sp>
       <p:sp>
         <p:nvSpPr>
-          <p:cNvPr id="4" name="Oval 3"/>
+          <p:cNvPr id="5" name="Oval 4"/>
           <p:cNvSpPr/>
           <p:nvPr/>
         </p:nvSpPr>
         <p:spPr>
           <a:xfrm>
-            <a:off x="1392905" y="2217420"/>
+            <a:off x="1392905" y="2004441"/>
             <a:ext cx="822960" cy="822960"/>
           </a:xfrm>
           <a:prstGeom prst="ellipse">
@@ -8263,21 +7927,21 @@
       </p:sp>
       <p:pic>
         <p:nvPicPr>
-          <p:cNvPr id="5" name="Picture 4" descr="luggage.png"/>
+          <p:cNvPr id="6" name="Picture 5" descr="luggage.png"/>
           <p:cNvPicPr>
             <a:picLocks noChangeAspect="1"/>
           </p:cNvPicPr>
           <p:nvPr/>
         </p:nvPicPr>
         <p:blipFill>
-          <a:blip r:embed="rId2"/>
+          <a:blip r:embed="rId3"/>
           <a:stretch>
             <a:fillRect/>
           </a:stretch>
         </p:blipFill>
         <p:spPr>
           <a:xfrm>
-            <a:off x="1590415" y="2414930"/>
+            <a:off x="1590415" y="2201951"/>
             <a:ext cx="427940" cy="427940"/>
           </a:xfrm>
           <a:prstGeom prst="rect">
@@ -8287,13 +7951,13 @@
       </p:pic>
       <p:sp>
         <p:nvSpPr>
-          <p:cNvPr id="6" name="TextBox 5"/>
+          <p:cNvPr id="7" name="TextBox 6"/>
           <p:cNvSpPr txBox="1"/>
           <p:nvPr/>
         </p:nvSpPr>
         <p:spPr>
           <a:xfrm>
-            <a:off x="845819" y="3314700"/>
+            <a:off x="845819" y="3101721"/>
             <a:ext cx="1917131" cy="640080"/>
           </a:xfrm>
           <a:prstGeom prst="rect">
@@ -8313,7 +7977,7 @@
               </a:lnSpc>
             </a:pPr>
             <a:r>
-              <a:rPr sz="1700" b="1" i="0">
+              <a:rPr sz="1530" b="1" i="0">
                 <a:solidFill>
                   <a:srgbClr val="0D145F"/>
                 </a:solidFill>
@@ -8326,13 +7990,13 @@
       </p:sp>
       <p:sp>
         <p:nvSpPr>
-          <p:cNvPr id="7" name="TextBox 6"/>
+          <p:cNvPr id="8" name="TextBox 7"/>
           <p:cNvSpPr txBox="1"/>
           <p:nvPr/>
         </p:nvSpPr>
         <p:spPr>
           <a:xfrm>
-            <a:off x="845819" y="3954780"/>
+            <a:off x="845819" y="3741801"/>
             <a:ext cx="1917131" cy="1828800"/>
           </a:xfrm>
           <a:prstGeom prst="rect">
@@ -8352,7 +8016,7 @@
               </a:lnSpc>
             </a:pPr>
             <a:r>
-              <a:rPr sz="1400" b="0" i="0">
+              <a:rPr sz="1260" b="0" i="0">
                 <a:solidFill>
                   <a:srgbClr val="131416"/>
                 </a:solidFill>
@@ -8365,13 +8029,13 @@
       </p:sp>
       <p:sp>
         <p:nvSpPr>
-          <p:cNvPr id="8" name="Oval 7"/>
+          <p:cNvPr id="9" name="Oval 8"/>
           <p:cNvSpPr/>
           <p:nvPr/>
         </p:nvSpPr>
         <p:spPr>
           <a:xfrm>
-            <a:off x="3538636" y="2217420"/>
+            <a:off x="3538636" y="2004441"/>
             <a:ext cx="822960" cy="822960"/>
           </a:xfrm>
           <a:prstGeom prst="ellipse">
@@ -8409,21 +8073,21 @@
       </p:sp>
       <p:pic>
         <p:nvPicPr>
-          <p:cNvPr id="9" name="Picture 8" descr="plane-landing.png"/>
+          <p:cNvPr id="10" name="Picture 9" descr="plane-landing.png"/>
           <p:cNvPicPr>
             <a:picLocks noChangeAspect="1"/>
           </p:cNvPicPr>
           <p:nvPr/>
         </p:nvPicPr>
         <p:blipFill>
-          <a:blip r:embed="rId3"/>
+          <a:blip r:embed="rId4"/>
           <a:stretch>
             <a:fillRect/>
           </a:stretch>
         </p:blipFill>
         <p:spPr>
           <a:xfrm>
-            <a:off x="3736146" y="2414930"/>
+            <a:off x="3736146" y="2201951"/>
             <a:ext cx="427940" cy="427940"/>
           </a:xfrm>
           <a:prstGeom prst="rect">
@@ -8433,13 +8097,13 @@
       </p:pic>
       <p:sp>
         <p:nvSpPr>
-          <p:cNvPr id="10" name="TextBox 9"/>
+          <p:cNvPr id="11" name="TextBox 10"/>
           <p:cNvSpPr txBox="1"/>
           <p:nvPr/>
         </p:nvSpPr>
         <p:spPr>
           <a:xfrm>
-            <a:off x="2991550" y="3314700"/>
+            <a:off x="2991550" y="3101721"/>
             <a:ext cx="1917131" cy="640080"/>
           </a:xfrm>
           <a:prstGeom prst="rect">
@@ -8459,7 +8123,7 @@
               </a:lnSpc>
             </a:pPr>
             <a:r>
-              <a:rPr sz="1700" b="1" i="0">
+              <a:rPr sz="1530" b="1" i="0">
                 <a:solidFill>
                   <a:srgbClr val="0D145F"/>
                 </a:solidFill>
@@ -8472,13 +8136,13 @@
       </p:sp>
       <p:sp>
         <p:nvSpPr>
-          <p:cNvPr id="11" name="TextBox 10"/>
+          <p:cNvPr id="12" name="TextBox 11"/>
           <p:cNvSpPr txBox="1"/>
           <p:nvPr/>
         </p:nvSpPr>
         <p:spPr>
           <a:xfrm>
-            <a:off x="2991550" y="3954780"/>
+            <a:off x="2991550" y="3741801"/>
             <a:ext cx="1917131" cy="1828800"/>
           </a:xfrm>
           <a:prstGeom prst="rect">
@@ -8498,7 +8162,7 @@
               </a:lnSpc>
             </a:pPr>
             <a:r>
-              <a:rPr sz="1400" b="0" i="0">
+              <a:rPr sz="1260" b="0" i="0">
                 <a:solidFill>
                   <a:srgbClr val="131416"/>
                 </a:solidFill>
@@ -8511,13 +8175,13 @@
       </p:sp>
       <p:sp>
         <p:nvSpPr>
-          <p:cNvPr id="12" name="Oval 11"/>
+          <p:cNvPr id="13" name="Oval 12"/>
           <p:cNvSpPr/>
           <p:nvPr/>
         </p:nvSpPr>
         <p:spPr>
           <a:xfrm>
-            <a:off x="5684367" y="2217420"/>
+            <a:off x="5684367" y="2004441"/>
             <a:ext cx="822960" cy="822960"/>
           </a:xfrm>
           <a:prstGeom prst="ellipse">
@@ -8555,21 +8219,21 @@
       </p:sp>
       <p:pic>
         <p:nvPicPr>
-          <p:cNvPr id="13" name="Picture 12" descr="puzzle.png"/>
+          <p:cNvPr id="14" name="Picture 13" descr="puzzle.png"/>
           <p:cNvPicPr>
             <a:picLocks noChangeAspect="1"/>
           </p:cNvPicPr>
           <p:nvPr/>
         </p:nvPicPr>
         <p:blipFill>
-          <a:blip r:embed="rId4"/>
+          <a:blip r:embed="rId5"/>
           <a:stretch>
             <a:fillRect/>
           </a:stretch>
         </p:blipFill>
         <p:spPr>
           <a:xfrm>
-            <a:off x="5881877" y="2414930"/>
+            <a:off x="5881877" y="2201951"/>
             <a:ext cx="427940" cy="427940"/>
           </a:xfrm>
           <a:prstGeom prst="rect">
@@ -8579,13 +8243,13 @@
       </p:pic>
       <p:sp>
         <p:nvSpPr>
-          <p:cNvPr id="14" name="TextBox 13"/>
+          <p:cNvPr id="15" name="TextBox 14"/>
           <p:cNvSpPr txBox="1"/>
           <p:nvPr/>
         </p:nvSpPr>
         <p:spPr>
           <a:xfrm>
-            <a:off x="5137281" y="3314700"/>
+            <a:off x="5137281" y="3101721"/>
             <a:ext cx="1917131" cy="640080"/>
           </a:xfrm>
           <a:prstGeom prst="rect">
@@ -8605,7 +8269,7 @@
               </a:lnSpc>
             </a:pPr>
             <a:r>
-              <a:rPr sz="1700" b="1" i="0">
+              <a:rPr sz="1530" b="1" i="0">
                 <a:solidFill>
                   <a:srgbClr val="0D145F"/>
                 </a:solidFill>
@@ -8618,13 +8282,13 @@
       </p:sp>
       <p:sp>
         <p:nvSpPr>
-          <p:cNvPr id="15" name="TextBox 14"/>
+          <p:cNvPr id="16" name="TextBox 15"/>
           <p:cNvSpPr txBox="1"/>
           <p:nvPr/>
         </p:nvSpPr>
         <p:spPr>
           <a:xfrm>
-            <a:off x="5137281" y="3954780"/>
+            <a:off x="5137281" y="3741801"/>
             <a:ext cx="1917131" cy="1828800"/>
           </a:xfrm>
           <a:prstGeom prst="rect">
@@ -8644,7 +8308,7 @@
               </a:lnSpc>
             </a:pPr>
             <a:r>
-              <a:rPr sz="1400" b="0" i="0">
+              <a:rPr sz="1260" b="0" i="0">
                 <a:solidFill>
                   <a:srgbClr val="131416"/>
                 </a:solidFill>
@@ -8657,13 +8321,13 @@
       </p:sp>
       <p:sp>
         <p:nvSpPr>
-          <p:cNvPr id="16" name="Oval 15"/>
+          <p:cNvPr id="17" name="Oval 16"/>
           <p:cNvSpPr/>
           <p:nvPr/>
         </p:nvSpPr>
         <p:spPr>
           <a:xfrm>
-            <a:off x="7830098" y="2217420"/>
+            <a:off x="7830098" y="2004441"/>
             <a:ext cx="822960" cy="822960"/>
           </a:xfrm>
           <a:prstGeom prst="ellipse">
@@ -8701,21 +8365,21 @@
       </p:sp>
       <p:pic>
         <p:nvPicPr>
-          <p:cNvPr id="17" name="Picture 16" descr="flag.png"/>
+          <p:cNvPr id="18" name="Picture 17" descr="flag.png"/>
           <p:cNvPicPr>
             <a:picLocks noChangeAspect="1"/>
           </p:cNvPicPr>
           <p:nvPr/>
         </p:nvPicPr>
         <p:blipFill>
-          <a:blip r:embed="rId5"/>
+          <a:blip r:embed="rId6"/>
           <a:stretch>
             <a:fillRect/>
           </a:stretch>
         </p:blipFill>
         <p:spPr>
           <a:xfrm>
-            <a:off x="8027608" y="2414930"/>
+            <a:off x="8027608" y="2201951"/>
             <a:ext cx="427940" cy="427940"/>
           </a:xfrm>
           <a:prstGeom prst="rect">
@@ -8725,13 +8389,13 @@
       </p:pic>
       <p:sp>
         <p:nvSpPr>
-          <p:cNvPr id="18" name="TextBox 17"/>
+          <p:cNvPr id="19" name="TextBox 18"/>
           <p:cNvSpPr txBox="1"/>
           <p:nvPr/>
         </p:nvSpPr>
         <p:spPr>
           <a:xfrm>
-            <a:off x="7283012" y="3314700"/>
+            <a:off x="7283012" y="3101721"/>
             <a:ext cx="1917131" cy="640080"/>
           </a:xfrm>
           <a:prstGeom prst="rect">
@@ -8751,7 +8415,7 @@
               </a:lnSpc>
             </a:pPr>
             <a:r>
-              <a:rPr sz="1700" b="1" i="0">
+              <a:rPr sz="1530" b="1" i="0">
                 <a:solidFill>
                   <a:srgbClr val="0D145F"/>
                 </a:solidFill>
@@ -8764,13 +8428,13 @@
       </p:sp>
       <p:sp>
         <p:nvSpPr>
-          <p:cNvPr id="19" name="TextBox 18"/>
+          <p:cNvPr id="20" name="TextBox 19"/>
           <p:cNvSpPr txBox="1"/>
           <p:nvPr/>
         </p:nvSpPr>
         <p:spPr>
           <a:xfrm>
-            <a:off x="7283012" y="3954780"/>
+            <a:off x="7283012" y="3741801"/>
             <a:ext cx="1917131" cy="1828800"/>
           </a:xfrm>
           <a:prstGeom prst="rect">
@@ -8790,7 +8454,7 @@
               </a:lnSpc>
             </a:pPr>
             <a:r>
-              <a:rPr sz="1400" b="0" i="0">
+              <a:rPr sz="1260" b="0" i="0">
                 <a:solidFill>
                   <a:srgbClr val="131416"/>
                 </a:solidFill>
@@ -8803,13 +8467,13 @@
       </p:sp>
       <p:sp>
         <p:nvSpPr>
-          <p:cNvPr id="20" name="Oval 19"/>
+          <p:cNvPr id="21" name="Oval 20"/>
           <p:cNvSpPr/>
           <p:nvPr/>
         </p:nvSpPr>
         <p:spPr>
           <a:xfrm>
-            <a:off x="9975829" y="2217420"/>
+            <a:off x="9975829" y="2004441"/>
             <a:ext cx="822960" cy="822960"/>
           </a:xfrm>
           <a:prstGeom prst="ellipse">
@@ -8847,109 +8511,7 @@
       </p:sp>
       <p:pic>
         <p:nvPicPr>
-          <p:cNvPr id="21" name="Picture 20" descr="plane-takeoff.png"/>
-          <p:cNvPicPr>
-            <a:picLocks noChangeAspect="1"/>
-          </p:cNvPicPr>
-          <p:nvPr/>
-        </p:nvPicPr>
-        <p:blipFill>
-          <a:blip r:embed="rId6"/>
-          <a:stretch>
-            <a:fillRect/>
-          </a:stretch>
-        </p:blipFill>
-        <p:spPr>
-          <a:xfrm>
-            <a:off x="10173339" y="2414930"/>
-            <a:ext cx="427940" cy="427940"/>
-          </a:xfrm>
-          <a:prstGeom prst="rect">
-            <a:avLst/>
-          </a:prstGeom>
-        </p:spPr>
-      </p:pic>
-      <p:sp>
-        <p:nvSpPr>
-          <p:cNvPr id="22" name="TextBox 21"/>
-          <p:cNvSpPr txBox="1"/>
-          <p:nvPr/>
-        </p:nvSpPr>
-        <p:spPr>
-          <a:xfrm>
-            <a:off x="9428743" y="3314700"/>
-            <a:ext cx="1917131" cy="640080"/>
-          </a:xfrm>
-          <a:prstGeom prst="rect">
-            <a:avLst/>
-          </a:prstGeom>
-          <a:noFill/>
-        </p:spPr>
-        <p:txBody>
-          <a:bodyPr wrap="square" lIns="0" rIns="0" tIns="0" bIns="0" anchor="t">
-            <a:spAutoFit/>
-          </a:bodyPr>
-          <a:lstStyle/>
-          <a:p>
-            <a:pPr algn="ctr">
-              <a:lnSpc>
-                <a:spcPct val="115000"/>
-              </a:lnSpc>
-            </a:pPr>
-            <a:r>
-              <a:rPr sz="1700" b="1" i="0">
-                <a:solidFill>
-                  <a:srgbClr val="0D145F"/>
-                </a:solidFill>
-                <a:latin typeface="DM Sans"/>
-              </a:rPr>
-              <a:t>5. Re-Entry Home</a:t>
-            </a:r>
-          </a:p>
-        </p:txBody>
-      </p:sp>
-      <p:sp>
-        <p:nvSpPr>
-          <p:cNvPr id="23" name="TextBox 22"/>
-          <p:cNvSpPr txBox="1"/>
-          <p:nvPr/>
-        </p:nvSpPr>
-        <p:spPr>
-          <a:xfrm>
-            <a:off x="9428743" y="3954780"/>
-            <a:ext cx="1917131" cy="1828800"/>
-          </a:xfrm>
-          <a:prstGeom prst="rect">
-            <a:avLst/>
-          </a:prstGeom>
-          <a:noFill/>
-        </p:spPr>
-        <p:txBody>
-          <a:bodyPr wrap="square" lIns="0" rIns="0" tIns="0" bIns="0" anchor="t">
-            <a:spAutoFit/>
-          </a:bodyPr>
-          <a:lstStyle/>
-          <a:p>
-            <a:pPr algn="ctr">
-              <a:lnSpc>
-                <a:spcPct val="140000"/>
-              </a:lnSpc>
-            </a:pPr>
-            <a:r>
-              <a:rPr sz="1400" b="0" i="0">
-                <a:solidFill>
-                  <a:srgbClr val="131416"/>
-                </a:solidFill>
-                <a:latin typeface="DM Sans"/>
-              </a:rPr>
-              <a:t>Reverse culture shock, determination</a:t>
-            </a:r>
-          </a:p>
-        </p:txBody>
-      </p:sp>
-      <p:pic>
-        <p:nvPicPr>
-          <p:cNvPr id="24" name="Picture 23" descr="logo-icon-deep-blue.png"/>
+          <p:cNvPr id="22" name="Picture 21" descr="plane-takeoff.png"/>
           <p:cNvPicPr>
             <a:picLocks noChangeAspect="1"/>
           </p:cNvPicPr>
@@ -8963,8 +8525,8 @@
         </p:blipFill>
         <p:spPr>
           <a:xfrm>
-            <a:off x="11167567" y="6291072"/>
-            <a:ext cx="292608" cy="292608"/>
+            <a:off x="10173339" y="2201951"/>
+            <a:ext cx="427940" cy="427940"/>
           </a:xfrm>
           <a:prstGeom prst="rect">
             <a:avLst/>
@@ -8973,14 +8535,14 @@
       </p:pic>
       <p:sp>
         <p:nvSpPr>
-          <p:cNvPr id="25" name="TextBox 24"/>
+          <p:cNvPr id="23" name="TextBox 22"/>
           <p:cNvSpPr txBox="1"/>
           <p:nvPr/>
         </p:nvSpPr>
         <p:spPr>
           <a:xfrm>
-            <a:off x="731520" y="6327648"/>
-            <a:ext cx="5486400" cy="274320"/>
+            <a:off x="9428743" y="3101721"/>
+            <a:ext cx="1917131" cy="640080"/>
           </a:xfrm>
           <a:prstGeom prst="rect">
             <a:avLst/>
@@ -8993,19 +8555,58 @@
           </a:bodyPr>
           <a:lstStyle/>
           <a:p>
-            <a:pPr algn="l">
+            <a:pPr algn="ctr">
               <a:lnSpc>
                 <a:spcPct val="115000"/>
               </a:lnSpc>
             </a:pPr>
             <a:r>
-              <a:rPr sz="1000" b="0" i="0">
-                <a:solidFill>
-                  <a:srgbClr val="5F646D"/>
+              <a:rPr sz="1530" b="1" i="0">
+                <a:solidFill>
+                  <a:srgbClr val="0D145F"/>
                 </a:solidFill>
                 <a:latin typeface="DM Sans"/>
               </a:rPr>
-              <a:t>7</a:t>
+              <a:t>5. Re-Entry Home</a:t>
+            </a:r>
+          </a:p>
+        </p:txBody>
+      </p:sp>
+      <p:sp>
+        <p:nvSpPr>
+          <p:cNvPr id="24" name="TextBox 23"/>
+          <p:cNvSpPr txBox="1"/>
+          <p:nvPr/>
+        </p:nvSpPr>
+        <p:spPr>
+          <a:xfrm>
+            <a:off x="9428743" y="3741801"/>
+            <a:ext cx="1917131" cy="1828800"/>
+          </a:xfrm>
+          <a:prstGeom prst="rect">
+            <a:avLst/>
+          </a:prstGeom>
+          <a:noFill/>
+        </p:spPr>
+        <p:txBody>
+          <a:bodyPr wrap="square" lIns="0" rIns="0" tIns="0" bIns="0" anchor="t">
+            <a:spAutoFit/>
+          </a:bodyPr>
+          <a:lstStyle/>
+          <a:p>
+            <a:pPr algn="ctr">
+              <a:lnSpc>
+                <a:spcPct val="140000"/>
+              </a:lnSpc>
+            </a:pPr>
+            <a:r>
+              <a:rPr sz="1260" b="0" i="0">
+                <a:solidFill>
+                  <a:srgbClr val="131416"/>
+                </a:solidFill>
+                <a:latin typeface="DM Sans"/>
+              </a:rPr>
+              <a:t>Reverse culture shock, determination</a:t>
             </a:r>
           </a:p>
         </p:txBody>
@@ -9044,8 +8645,8 @@
         </p:nvSpPr>
         <p:spPr>
           <a:xfrm>
-            <a:off x="731520" y="640080"/>
-            <a:ext cx="10728655" cy="1097280"/>
+            <a:off x="758952" y="612648"/>
+            <a:ext cx="10673791" cy="1188720"/>
           </a:xfrm>
           <a:prstGeom prst="rect">
             <a:avLst/>
@@ -9060,11 +8661,11 @@
           <a:p>
             <a:pPr algn="l">
               <a:lnSpc>
-                <a:spcPct val="105000"/>
+                <a:spcPct val="100000"/>
               </a:lnSpc>
             </a:pPr>
             <a:r>
-              <a:rPr sz="3600" b="1" i="0" spc="-36">
+              <a:rPr sz="2790" b="1" i="0" spc="-98">
                 <a:solidFill>
                   <a:srgbClr val="0D145F"/>
                 </a:solidFill>
@@ -9083,8 +8684,8 @@
         </p:nvSpPr>
         <p:spPr>
           <a:xfrm>
-            <a:off x="731520" y="1577340"/>
-            <a:ext cx="2442133" cy="4366260"/>
+            <a:off x="731520" y="1364361"/>
+            <a:ext cx="2442133" cy="4579239"/>
           </a:xfrm>
           <a:prstGeom prst="roundRect">
             <a:avLst>
@@ -9129,7 +8730,7 @@
         </p:nvSpPr>
         <p:spPr>
           <a:xfrm>
-            <a:off x="1005840" y="1988820"/>
+            <a:off x="1005840" y="1775841"/>
             <a:ext cx="1893493" cy="457200"/>
           </a:xfrm>
           <a:prstGeom prst="rect">
@@ -9149,7 +8750,7 @@
               </a:lnSpc>
             </a:pPr>
             <a:r>
-              <a:rPr sz="2200" b="1" i="0">
+              <a:rPr sz="1980" b="1" i="0">
                 <a:solidFill>
                   <a:srgbClr val="131416"/>
                 </a:solidFill>
@@ -9168,7 +8769,7 @@
         </p:nvSpPr>
         <p:spPr>
           <a:xfrm>
-            <a:off x="1083906" y="2491740"/>
+            <a:off x="1083906" y="2278761"/>
             <a:ext cx="1737360" cy="31750"/>
           </a:xfrm>
           <a:prstGeom prst="rect">
@@ -9212,7 +8813,7 @@
         </p:nvSpPr>
         <p:spPr>
           <a:xfrm>
-            <a:off x="1005840" y="2674620"/>
+            <a:off x="1005840" y="2461641"/>
             <a:ext cx="1893493" cy="731520"/>
           </a:xfrm>
           <a:prstGeom prst="rect">
@@ -9232,7 +8833,7 @@
               </a:lnSpc>
             </a:pPr>
             <a:r>
-              <a:rPr sz="1800" b="0" i="0">
+              <a:rPr sz="1620" b="0" i="0">
                 <a:solidFill>
                   <a:srgbClr val="131416"/>
                 </a:solidFill>
@@ -9259,7 +8860,7 @@
         </p:blipFill>
         <p:spPr>
           <a:xfrm>
-            <a:off x="1609686" y="3497580"/>
+            <a:off x="1609686" y="3284601"/>
             <a:ext cx="685800" cy="685800"/>
           </a:xfrm>
           <a:prstGeom prst="rect">
@@ -9275,8 +8876,8 @@
         </p:nvSpPr>
         <p:spPr>
           <a:xfrm>
-            <a:off x="1005840" y="4457700"/>
-            <a:ext cx="1893493" cy="1257300"/>
+            <a:off x="1005840" y="4244721"/>
+            <a:ext cx="1893493" cy="1470279"/>
           </a:xfrm>
           <a:prstGeom prst="rect">
             <a:avLst/>
@@ -9295,7 +8896,7 @@
               </a:lnSpc>
             </a:pPr>
             <a:r>
-              <a:rPr sz="1500" b="0" i="0">
+              <a:rPr sz="1350" b="0" i="0">
                 <a:solidFill>
                   <a:srgbClr val="131416"/>
                 </a:solidFill>
@@ -9314,8 +8915,8 @@
         </p:nvSpPr>
         <p:spPr>
           <a:xfrm>
-            <a:off x="3493693" y="1577340"/>
-            <a:ext cx="2442133" cy="4366260"/>
+            <a:off x="3493693" y="1364361"/>
+            <a:ext cx="2442133" cy="4579239"/>
           </a:xfrm>
           <a:prstGeom prst="roundRect">
             <a:avLst>
@@ -9360,7 +8961,7 @@
         </p:nvSpPr>
         <p:spPr>
           <a:xfrm>
-            <a:off x="3768013" y="1988820"/>
+            <a:off x="3768013" y="1775841"/>
             <a:ext cx="1893493" cy="457200"/>
           </a:xfrm>
           <a:prstGeom prst="rect">
@@ -9380,7 +8981,7 @@
               </a:lnSpc>
             </a:pPr>
             <a:r>
-              <a:rPr sz="2200" b="1" i="0">
+              <a:rPr sz="1980" b="1" i="0">
                 <a:solidFill>
                   <a:srgbClr val="131416"/>
                 </a:solidFill>
@@ -9399,7 +9000,7 @@
         </p:nvSpPr>
         <p:spPr>
           <a:xfrm>
-            <a:off x="3846079" y="2491740"/>
+            <a:off x="3846079" y="2278761"/>
             <a:ext cx="1737360" cy="31750"/>
           </a:xfrm>
           <a:prstGeom prst="rect">
@@ -9443,7 +9044,7 @@
         </p:nvSpPr>
         <p:spPr>
           <a:xfrm>
-            <a:off x="3768013" y="2674620"/>
+            <a:off x="3768013" y="2461641"/>
             <a:ext cx="1893493" cy="731520"/>
           </a:xfrm>
           <a:prstGeom prst="rect">
@@ -9463,7 +9064,7 @@
               </a:lnSpc>
             </a:pPr>
             <a:r>
-              <a:rPr sz="1800" b="0" i="0">
+              <a:rPr sz="1620" b="0" i="0">
                 <a:solidFill>
                   <a:srgbClr val="131416"/>
                 </a:solidFill>
@@ -9490,7 +9091,7 @@
         </p:blipFill>
         <p:spPr>
           <a:xfrm>
-            <a:off x="4371859" y="3497580"/>
+            <a:off x="4371859" y="3284601"/>
             <a:ext cx="685800" cy="685800"/>
           </a:xfrm>
           <a:prstGeom prst="rect">
@@ -9506,8 +9107,8 @@
         </p:nvSpPr>
         <p:spPr>
           <a:xfrm>
-            <a:off x="3768013" y="4457700"/>
-            <a:ext cx="1893493" cy="1257300"/>
+            <a:off x="3768013" y="4244721"/>
+            <a:ext cx="1893493" cy="1470279"/>
           </a:xfrm>
           <a:prstGeom prst="rect">
             <a:avLst/>
@@ -9526,7 +9127,7 @@
               </a:lnSpc>
             </a:pPr>
             <a:r>
-              <a:rPr sz="1500" b="0" i="0">
+              <a:rPr sz="1350" b="0" i="0">
                 <a:solidFill>
                   <a:srgbClr val="131416"/>
                 </a:solidFill>
@@ -9545,8 +9146,8 @@
         </p:nvSpPr>
         <p:spPr>
           <a:xfrm>
-            <a:off x="6255867" y="1577340"/>
-            <a:ext cx="2442133" cy="4366260"/>
+            <a:off x="6255867" y="1364361"/>
+            <a:ext cx="2442133" cy="4579239"/>
           </a:xfrm>
           <a:prstGeom prst="roundRect">
             <a:avLst>
@@ -9591,7 +9192,7 @@
         </p:nvSpPr>
         <p:spPr>
           <a:xfrm>
-            <a:off x="6530187" y="1988820"/>
+            <a:off x="6530187" y="1775841"/>
             <a:ext cx="1893493" cy="457200"/>
           </a:xfrm>
           <a:prstGeom prst="rect">
@@ -9611,7 +9212,7 @@
               </a:lnSpc>
             </a:pPr>
             <a:r>
-              <a:rPr sz="2200" b="1" i="0">
+              <a:rPr sz="1980" b="1" i="0">
                 <a:solidFill>
                   <a:srgbClr val="131416"/>
                 </a:solidFill>
@@ -9630,7 +9231,7 @@
         </p:nvSpPr>
         <p:spPr>
           <a:xfrm>
-            <a:off x="6608253" y="2491740"/>
+            <a:off x="6608253" y="2278761"/>
             <a:ext cx="1737360" cy="31750"/>
           </a:xfrm>
           <a:prstGeom prst="rect">
@@ -9674,7 +9275,7 @@
         </p:nvSpPr>
         <p:spPr>
           <a:xfrm>
-            <a:off x="6530187" y="2674620"/>
+            <a:off x="6530187" y="2461641"/>
             <a:ext cx="1893493" cy="731520"/>
           </a:xfrm>
           <a:prstGeom prst="rect">
@@ -9694,7 +9295,7 @@
               </a:lnSpc>
             </a:pPr>
             <a:r>
-              <a:rPr sz="1800" b="0" i="0">
+              <a:rPr sz="1620" b="0" i="0">
                 <a:solidFill>
                   <a:srgbClr val="131416"/>
                 </a:solidFill>
@@ -9721,7 +9322,7 @@
         </p:blipFill>
         <p:spPr>
           <a:xfrm>
-            <a:off x="7134033" y="3497580"/>
+            <a:off x="7134033" y="3284601"/>
             <a:ext cx="685800" cy="685800"/>
           </a:xfrm>
           <a:prstGeom prst="rect">
@@ -9737,8 +9338,8 @@
         </p:nvSpPr>
         <p:spPr>
           <a:xfrm>
-            <a:off x="6530187" y="4457700"/>
-            <a:ext cx="1893493" cy="1257300"/>
+            <a:off x="6530187" y="4244721"/>
+            <a:ext cx="1893493" cy="1470279"/>
           </a:xfrm>
           <a:prstGeom prst="rect">
             <a:avLst/>
@@ -9757,7 +9358,7 @@
               </a:lnSpc>
             </a:pPr>
             <a:r>
-              <a:rPr sz="1500" b="0" i="0">
+              <a:rPr sz="1350" b="0" i="0">
                 <a:solidFill>
                   <a:srgbClr val="131416"/>
                 </a:solidFill>
@@ -9776,8 +9377,8 @@
         </p:nvSpPr>
         <p:spPr>
           <a:xfrm>
-            <a:off x="9018041" y="1577340"/>
-            <a:ext cx="2442133" cy="4366260"/>
+            <a:off x="9018041" y="1364361"/>
+            <a:ext cx="2442133" cy="4579239"/>
           </a:xfrm>
           <a:prstGeom prst="roundRect">
             <a:avLst>
@@ -9822,7 +9423,7 @@
         </p:nvSpPr>
         <p:spPr>
           <a:xfrm>
-            <a:off x="9292361" y="1988820"/>
+            <a:off x="9292361" y="1775841"/>
             <a:ext cx="1893493" cy="457200"/>
           </a:xfrm>
           <a:prstGeom prst="rect">
@@ -9842,7 +9443,7 @@
               </a:lnSpc>
             </a:pPr>
             <a:r>
-              <a:rPr sz="2200" b="1" i="0">
+              <a:rPr sz="1980" b="1" i="0">
                 <a:solidFill>
                   <a:srgbClr val="131416"/>
                 </a:solidFill>
@@ -9861,7 +9462,7 @@
         </p:nvSpPr>
         <p:spPr>
           <a:xfrm>
-            <a:off x="9370427" y="2491740"/>
+            <a:off x="9370427" y="2278761"/>
             <a:ext cx="1737360" cy="31750"/>
           </a:xfrm>
           <a:prstGeom prst="rect">
@@ -9905,7 +9506,7 @@
         </p:nvSpPr>
         <p:spPr>
           <a:xfrm>
-            <a:off x="9292361" y="2674620"/>
+            <a:off x="9292361" y="2461641"/>
             <a:ext cx="1893493" cy="731520"/>
           </a:xfrm>
           <a:prstGeom prst="rect">
@@ -9925,7 +9526,7 @@
               </a:lnSpc>
             </a:pPr>
             <a:r>
-              <a:rPr sz="1800" b="0" i="0">
+              <a:rPr sz="1620" b="0" i="0">
                 <a:solidFill>
                   <a:srgbClr val="131416"/>
                 </a:solidFill>
@@ -9952,7 +9553,7 @@
         </p:blipFill>
         <p:spPr>
           <a:xfrm>
-            <a:off x="9896207" y="3497580"/>
+            <a:off x="9896207" y="3284601"/>
             <a:ext cx="685800" cy="685800"/>
           </a:xfrm>
           <a:prstGeom prst="rect">
@@ -9968,8 +9569,8 @@
         </p:nvSpPr>
         <p:spPr>
           <a:xfrm>
-            <a:off x="9292361" y="4457700"/>
-            <a:ext cx="1893493" cy="1257300"/>
+            <a:off x="9292361" y="4244721"/>
+            <a:ext cx="1893493" cy="1470279"/>
           </a:xfrm>
           <a:prstGeom prst="rect">
             <a:avLst/>
@@ -9988,76 +9589,13 @@
               </a:lnSpc>
             </a:pPr>
             <a:r>
-              <a:rPr sz="1500" b="0" i="0">
+              <a:rPr sz="1350" b="0" i="0">
                 <a:solidFill>
                   <a:srgbClr val="131416"/>
                 </a:solidFill>
                 <a:latin typeface="DM Sans"/>
               </a:rPr>
               <a:t>Grounded in the realities of 7M students worldwide.</a:t>
-            </a:r>
-          </a:p>
-        </p:txBody>
-      </p:sp>
-      <p:pic>
-        <p:nvPicPr>
-          <p:cNvPr id="27" name="Picture 26" descr="logo-icon-deep-blue.png"/>
-          <p:cNvPicPr>
-            <a:picLocks noChangeAspect="1"/>
-          </p:cNvPicPr>
-          <p:nvPr/>
-        </p:nvPicPr>
-        <p:blipFill>
-          <a:blip r:embed="rId6"/>
-          <a:stretch>
-            <a:fillRect/>
-          </a:stretch>
-        </p:blipFill>
-        <p:spPr>
-          <a:xfrm>
-            <a:off x="11167567" y="6291072"/>
-            <a:ext cx="292608" cy="292608"/>
-          </a:xfrm>
-          <a:prstGeom prst="rect">
-            <a:avLst/>
-          </a:prstGeom>
-        </p:spPr>
-      </p:pic>
-      <p:sp>
-        <p:nvSpPr>
-          <p:cNvPr id="28" name="TextBox 27"/>
-          <p:cNvSpPr txBox="1"/>
-          <p:nvPr/>
-        </p:nvSpPr>
-        <p:spPr>
-          <a:xfrm>
-            <a:off x="731520" y="6327648"/>
-            <a:ext cx="5486400" cy="274320"/>
-          </a:xfrm>
-          <a:prstGeom prst="rect">
-            <a:avLst/>
-          </a:prstGeom>
-          <a:noFill/>
-        </p:spPr>
-        <p:txBody>
-          <a:bodyPr wrap="square" lIns="0" rIns="0" tIns="0" bIns="0" anchor="t">
-            <a:spAutoFit/>
-          </a:bodyPr>
-          <a:lstStyle/>
-          <a:p>
-            <a:pPr algn="l">
-              <a:lnSpc>
-                <a:spcPct val="115000"/>
-              </a:lnSpc>
-            </a:pPr>
-            <a:r>
-              <a:rPr sz="1000" b="0" i="0">
-                <a:solidFill>
-                  <a:srgbClr val="5F646D"/>
-                </a:solidFill>
-                <a:latin typeface="DM Sans"/>
-              </a:rPr>
-              <a:t>8</a:t>
             </a:r>
           </a:p>
         </p:txBody>
@@ -10076,7 +9614,7 @@
     <p:bg>
       <p:bgPr>
         <a:solidFill>
-          <a:srgbClr val="F3F4FA"/>
+          <a:srgbClr val="FFFFFF"/>
         </a:solidFill>
         <a:effectLst/>
       </p:bgPr>
@@ -10090,59 +9628,22 @@
       <p:grpSpPr/>
       <p:sp>
         <p:nvSpPr>
-          <p:cNvPr id="2" name="TextBox 1"/>
-          <p:cNvSpPr txBox="1"/>
-          <p:nvPr/>
-        </p:nvSpPr>
-        <p:spPr>
-          <a:xfrm>
-            <a:off x="731520" y="640080"/>
-            <a:ext cx="10728655" cy="1097280"/>
-          </a:xfrm>
-          <a:prstGeom prst="rect">
-            <a:avLst/>
-          </a:prstGeom>
-          <a:noFill/>
-        </p:spPr>
-        <p:txBody>
-          <a:bodyPr wrap="square" lIns="0" rIns="0" tIns="0" bIns="0" anchor="t">
-            <a:spAutoFit/>
-          </a:bodyPr>
-          <a:lstStyle/>
-          <a:p>
-            <a:pPr algn="l">
-              <a:lnSpc>
-                <a:spcPct val="105000"/>
-              </a:lnSpc>
-            </a:pPr>
-            <a:r>
-              <a:rPr sz="3600" b="1" i="0" spc="-36">
-                <a:solidFill>
-                  <a:srgbClr val="0D145F"/>
-                </a:solidFill>
-                <a:latin typeface="Inter"/>
-              </a:rPr>
-              <a:t>What partners can expect</a:t>
-            </a:r>
-          </a:p>
-        </p:txBody>
-      </p:sp>
-      <p:sp>
-        <p:nvSpPr>
-          <p:cNvPr id="3" name="Rectangle 2"/>
+          <p:cNvPr id="2" name="Rounded Rectangle 1"/>
           <p:cNvSpPr/>
           <p:nvPr/>
         </p:nvSpPr>
         <p:spPr>
           <a:xfrm>
-            <a:off x="731520" y="1348740"/>
-            <a:ext cx="822960" cy="38100"/>
-          </a:xfrm>
-          <a:prstGeom prst="rect">
-            <a:avLst/>
+            <a:off x="-731520" y="0"/>
+            <a:ext cx="5175504" cy="6858000"/>
+          </a:xfrm>
+          <a:prstGeom prst="roundRect">
+            <a:avLst>
+              <a:gd name="adj" fmla="val 10000"/>
+            </a:avLst>
           </a:prstGeom>
           <a:solidFill>
-            <a:srgbClr val="0D145F"/>
+            <a:srgbClr val="FFEFD5"/>
           </a:solidFill>
           <a:ln>
             <a:noFill/>
@@ -10173,14 +9674,14 @@
       </p:sp>
       <p:sp>
         <p:nvSpPr>
-          <p:cNvPr id="4" name="TextBox 3"/>
+          <p:cNvPr id="3" name="TextBox 2"/>
           <p:cNvSpPr txBox="1"/>
           <p:nvPr/>
         </p:nvSpPr>
         <p:spPr>
           <a:xfrm>
-            <a:off x="731520" y="1577340"/>
-            <a:ext cx="5090007" cy="4366260"/>
+            <a:off x="694944" y="694944"/>
+            <a:ext cx="3255264" cy="2926080"/>
           </a:xfrm>
           <a:prstGeom prst="rect">
             <a:avLst/>
@@ -10188,230 +9689,75 @@
           <a:noFill/>
         </p:spPr>
         <p:txBody>
-          <a:bodyPr wrap="square" lIns="0" rIns="0" tIns="0" bIns="0">
+          <a:bodyPr wrap="square" lIns="0" rIns="0" tIns="0" bIns="0" anchor="t">
             <a:spAutoFit/>
           </a:bodyPr>
           <a:lstStyle/>
           <a:p>
-            <a:pPr marL="251460" indent="-251460">
+            <a:pPr algn="l">
               <a:lnSpc>
-                <a:spcPct val="130000"/>
+                <a:spcPct val="100000"/>
               </a:lnSpc>
-              <a:spcAft>
-                <a:spcPts val="1000"/>
-              </a:spcAft>
-              <a:buClr>
-                <a:srgbClr val="0D145F"/>
-              </a:buClr>
-              <a:buFont typeface="Arial"/>
-              <a:buChar char="•"/>
             </a:pPr>
             <a:r>
-              <a:rPr sz="1800" b="0" i="0" spc="-18">
-                <a:solidFill>
-                  <a:srgbClr val="131416"/>
-                </a:solidFill>
-                <a:latin typeface="DM Sans"/>
+              <a:rPr sz="3420" b="1" i="0" spc="-120">
+                <a:solidFill>
+                  <a:srgbClr val="0D145F"/>
+                </a:solidFill>
+                <a:latin typeface="Inter"/>
               </a:rPr>
-              <a:t>Shared research on the needs of international students</a:t>
-            </a:r>
-          </a:p>
-          <a:p>
-            <a:pPr marL="251460" indent="-251460">
-              <a:lnSpc>
-                <a:spcPct val="130000"/>
-              </a:lnSpc>
-              <a:spcAft>
-                <a:spcPts val="1000"/>
-              </a:spcAft>
-              <a:buClr>
-                <a:srgbClr val="0D145F"/>
-              </a:buClr>
-              <a:buFont typeface="Arial"/>
-              <a:buChar char="•"/>
-            </a:pPr>
-            <a:r>
-              <a:rPr sz="1800" b="0" i="0" spc="-18">
-                <a:solidFill>
-                  <a:srgbClr val="131416"/>
-                </a:solidFill>
-                <a:latin typeface="DM Sans"/>
-              </a:rPr>
-              <a:t>Introductions to ministries already serving your campus</a:t>
-            </a:r>
-          </a:p>
-          <a:p>
-            <a:pPr marL="251460" indent="-251460">
-              <a:lnSpc>
-                <a:spcPct val="130000"/>
-              </a:lnSpc>
-              <a:spcAft>
-                <a:spcPts val="1000"/>
-              </a:spcAft>
-              <a:buClr>
-                <a:srgbClr val="0D145F"/>
-              </a:buClr>
-              <a:buFont typeface="Arial"/>
-              <a:buChar char="•"/>
-            </a:pPr>
-            <a:r>
-              <a:rPr sz="1800" b="0" i="0" spc="-18">
-                <a:solidFill>
-                  <a:srgbClr val="131416"/>
-                </a:solidFill>
-                <a:latin typeface="DM Sans"/>
-              </a:rPr>
-              <a:t>Coordinated calendars so events don't compete</a:t>
-            </a:r>
-          </a:p>
-          <a:p>
-            <a:pPr marL="251460" indent="-251460">
-              <a:lnSpc>
-                <a:spcPct val="130000"/>
-              </a:lnSpc>
-              <a:spcAft>
-                <a:spcPts val="1000"/>
-              </a:spcAft>
-              <a:buClr>
-                <a:srgbClr val="0D145F"/>
-              </a:buClr>
-              <a:buFont typeface="Arial"/>
-              <a:buChar char="•"/>
-            </a:pPr>
-            <a:r>
-              <a:rPr sz="1800" b="0" i="0" spc="-18">
-                <a:solidFill>
-                  <a:srgbClr val="131416"/>
-                </a:solidFill>
-                <a:latin typeface="DM Sans"/>
-              </a:rPr>
-              <a:t>Training that doesn't assume previous experience</a:t>
-            </a:r>
-          </a:p>
-        </p:txBody>
-      </p:sp>
-      <p:sp>
-        <p:nvSpPr>
-          <p:cNvPr id="5" name="TextBox 4"/>
-          <p:cNvSpPr txBox="1"/>
-          <p:nvPr/>
-        </p:nvSpPr>
-        <p:spPr>
-          <a:xfrm>
-            <a:off x="6370167" y="1577340"/>
-            <a:ext cx="5090007" cy="4366260"/>
-          </a:xfrm>
-          <a:prstGeom prst="rect">
-            <a:avLst/>
-          </a:prstGeom>
-          <a:noFill/>
-        </p:spPr>
-        <p:txBody>
-          <a:bodyPr wrap="square" lIns="0" rIns="0" tIns="0" bIns="0">
-            <a:spAutoFit/>
-          </a:bodyPr>
-          <a:lstStyle/>
-          <a:p>
-            <a:pPr marL="251460" indent="-251460">
-              <a:lnSpc>
-                <a:spcPct val="130000"/>
-              </a:lnSpc>
-              <a:spcAft>
-                <a:spcPts val="1000"/>
-              </a:spcAft>
-              <a:buClr>
-                <a:srgbClr val="0D145F"/>
-              </a:buClr>
-              <a:buFont typeface="Arial"/>
-              <a:buChar char="•"/>
-            </a:pPr>
-            <a:r>
-              <a:rPr sz="1800" b="0" i="0" spc="-18">
-                <a:solidFill>
-                  <a:srgbClr val="131416"/>
-                </a:solidFill>
-                <a:latin typeface="DM Sans"/>
-              </a:rPr>
-              <a:t>A place to test new ideas with other ministries</a:t>
-            </a:r>
-          </a:p>
-          <a:p>
-            <a:pPr marL="251460" indent="-251460">
-              <a:lnSpc>
-                <a:spcPct val="130000"/>
-              </a:lnSpc>
-              <a:spcAft>
-                <a:spcPts val="1000"/>
-              </a:spcAft>
-              <a:buClr>
-                <a:srgbClr val="0D145F"/>
-              </a:buClr>
-              <a:buFont typeface="Arial"/>
-              <a:buChar char="•"/>
-            </a:pPr>
-            <a:r>
-              <a:rPr sz="1800" b="0" i="0" spc="-18">
-                <a:solidFill>
-                  <a:srgbClr val="131416"/>
-                </a:solidFill>
-                <a:latin typeface="DM Sans"/>
-              </a:rPr>
-              <a:t>Regular gatherings to learn from each other</a:t>
-            </a:r>
-          </a:p>
-          <a:p>
-            <a:pPr marL="251460" indent="-251460">
-              <a:lnSpc>
-                <a:spcPct val="130000"/>
-              </a:lnSpc>
-              <a:spcAft>
-                <a:spcPts val="1000"/>
-              </a:spcAft>
-              <a:buClr>
-                <a:srgbClr val="0D145F"/>
-              </a:buClr>
-              <a:buFont typeface="Arial"/>
-              <a:buChar char="•"/>
-            </a:pPr>
-            <a:r>
-              <a:rPr sz="1800" b="0" i="0" spc="-18">
-                <a:solidFill>
-                  <a:srgbClr val="131416"/>
-                </a:solidFill>
-                <a:latin typeface="DM Sans"/>
-              </a:rPr>
-              <a:t>Simple tools to follow up with students</a:t>
-            </a:r>
-          </a:p>
-          <a:p>
-            <a:pPr marL="251460" indent="-251460">
-              <a:lnSpc>
-                <a:spcPct val="130000"/>
-              </a:lnSpc>
-              <a:spcAft>
-                <a:spcPts val="1000"/>
-              </a:spcAft>
-              <a:buClr>
-                <a:srgbClr val="0D145F"/>
-              </a:buClr>
-              <a:buFont typeface="Arial"/>
-              <a:buChar char="•"/>
-            </a:pPr>
-            <a:r>
-              <a:rPr sz="1800" b="0" i="0" spc="-18">
-                <a:solidFill>
-                  <a:srgbClr val="131416"/>
-                </a:solidFill>
-                <a:latin typeface="DM Sans"/>
-              </a:rPr>
-              <a:t>Support for students returning home</a:t>
-            </a:r>
+              <a:t>What partners can expect</a:t>
+            </a:r>
+          </a:p>
+        </p:txBody>
+      </p:sp>
+      <p:sp>
+        <p:nvSpPr>
+          <p:cNvPr id="4" name="Oval 3"/>
+          <p:cNvSpPr/>
+          <p:nvPr/>
+        </p:nvSpPr>
+        <p:spPr>
+          <a:xfrm>
+            <a:off x="822960" y="3749040"/>
+            <a:ext cx="2286000" cy="2286000"/>
+          </a:xfrm>
+          <a:prstGeom prst="ellipse">
+            <a:avLst/>
+          </a:prstGeom>
+          <a:solidFill>
+            <a:srgbClr val="FABC20"/>
+          </a:solidFill>
+          <a:ln>
+            <a:noFill/>
+          </a:ln>
+          <a:effectLst/>
+        </p:spPr>
+        <p:style>
+          <a:lnRef idx="1">
+            <a:schemeClr val="accent1"/>
+          </a:lnRef>
+          <a:fillRef idx="3">
+            <a:schemeClr val="accent1"/>
+          </a:fillRef>
+          <a:effectRef idx="2">
+            <a:schemeClr val="accent1"/>
+          </a:effectRef>
+          <a:fontRef idx="minor">
+            <a:schemeClr val="lt1"/>
+          </a:fontRef>
+        </p:style>
+        <p:txBody>
+          <a:bodyPr rtlCol="0" anchor="ctr"/>
+          <a:lstStyle/>
+          <a:p>
+            <a:pPr algn="ctr"/>
           </a:p>
         </p:txBody>
       </p:sp>
       <p:pic>
         <p:nvPicPr>
-          <p:cNvPr id="6" name="Picture 5" descr="logo-icon-deep-blue.png"/>
+          <p:cNvPr id="5" name="Picture 4" descr="handshake.png"/>
           <p:cNvPicPr>
             <a:picLocks noChangeAspect="1"/>
           </p:cNvPicPr>
@@ -10425,8 +9771,32 @@
         </p:blipFill>
         <p:spPr>
           <a:xfrm>
-            <a:off x="11167567" y="6291072"/>
-            <a:ext cx="292608" cy="292608"/>
+            <a:off x="1211580" y="3474720"/>
+            <a:ext cx="2286000" cy="2286000"/>
+          </a:xfrm>
+          <a:prstGeom prst="rect">
+            <a:avLst/>
+          </a:prstGeom>
+        </p:spPr>
+      </p:pic>
+      <p:pic>
+        <p:nvPicPr>
+          <p:cNvPr id="6" name="Picture 5" descr="spark.png"/>
+          <p:cNvPicPr>
+            <a:picLocks noChangeAspect="1"/>
+          </p:cNvPicPr>
+          <p:nvPr/>
+        </p:nvPicPr>
+        <p:blipFill>
+          <a:blip r:embed="rId3"/>
+          <a:stretch>
+            <a:fillRect/>
+          </a:stretch>
+        </p:blipFill>
+        <p:spPr>
+          <a:xfrm>
+            <a:off x="5084064" y="1041908"/>
+            <a:ext cx="274320" cy="274320"/>
           </a:xfrm>
           <a:prstGeom prst="rect">
             <a:avLst/>
@@ -10441,8 +9811,8 @@
         </p:nvSpPr>
         <p:spPr>
           <a:xfrm>
-            <a:off x="731520" y="6327648"/>
-            <a:ext cx="5486400" cy="274320"/>
+            <a:off x="5559552" y="1000760"/>
+            <a:ext cx="5964631" cy="685800"/>
           </a:xfrm>
           <a:prstGeom prst="rect">
             <a:avLst/>
@@ -10457,17 +9827,458 @@
           <a:p>
             <a:pPr algn="l">
               <a:lnSpc>
-                <a:spcPct val="115000"/>
+                <a:spcPct val="130000"/>
               </a:lnSpc>
             </a:pPr>
             <a:r>
-              <a:rPr sz="1000" b="0" i="0">
-                <a:solidFill>
-                  <a:srgbClr val="5F646D"/>
+              <a:rPr sz="1620" b="0" i="0">
+                <a:solidFill>
+                  <a:srgbClr val="131416"/>
                 </a:solidFill>
                 <a:latin typeface="DM Sans"/>
               </a:rPr>
-              <a:t>9</a:t>
+              <a:t>Shared research on the needs of international students</a:t>
+            </a:r>
+          </a:p>
+        </p:txBody>
+      </p:sp>
+      <p:pic>
+        <p:nvPicPr>
+          <p:cNvPr id="8" name="Picture 7" descr="spark.png"/>
+          <p:cNvPicPr>
+            <a:picLocks noChangeAspect="1"/>
+          </p:cNvPicPr>
+          <p:nvPr/>
+        </p:nvPicPr>
+        <p:blipFill>
+          <a:blip r:embed="rId3"/>
+          <a:stretch>
+            <a:fillRect/>
+          </a:stretch>
+        </p:blipFill>
+        <p:spPr>
+          <a:xfrm>
+            <a:off x="5084064" y="1905508"/>
+            <a:ext cx="274320" cy="274320"/>
+          </a:xfrm>
+          <a:prstGeom prst="rect">
+            <a:avLst/>
+          </a:prstGeom>
+        </p:spPr>
+      </p:pic>
+      <p:sp>
+        <p:nvSpPr>
+          <p:cNvPr id="9" name="TextBox 8"/>
+          <p:cNvSpPr txBox="1"/>
+          <p:nvPr/>
+        </p:nvSpPr>
+        <p:spPr>
+          <a:xfrm>
+            <a:off x="5559552" y="1864360"/>
+            <a:ext cx="5964631" cy="685800"/>
+          </a:xfrm>
+          <a:prstGeom prst="rect">
+            <a:avLst/>
+          </a:prstGeom>
+          <a:noFill/>
+        </p:spPr>
+        <p:txBody>
+          <a:bodyPr wrap="square" lIns="0" rIns="0" tIns="0" bIns="0" anchor="t">
+            <a:spAutoFit/>
+          </a:bodyPr>
+          <a:lstStyle/>
+          <a:p>
+            <a:pPr algn="l">
+              <a:lnSpc>
+                <a:spcPct val="130000"/>
+              </a:lnSpc>
+            </a:pPr>
+            <a:r>
+              <a:rPr sz="1620" b="0" i="0">
+                <a:solidFill>
+                  <a:srgbClr val="131416"/>
+                </a:solidFill>
+                <a:latin typeface="DM Sans"/>
+              </a:rPr>
+              <a:t>Introductions to ministries already serving your campus</a:t>
+            </a:r>
+          </a:p>
+        </p:txBody>
+      </p:sp>
+      <p:pic>
+        <p:nvPicPr>
+          <p:cNvPr id="10" name="Picture 9" descr="spark.png"/>
+          <p:cNvPicPr>
+            <a:picLocks noChangeAspect="1"/>
+          </p:cNvPicPr>
+          <p:nvPr/>
+        </p:nvPicPr>
+        <p:blipFill>
+          <a:blip r:embed="rId3"/>
+          <a:stretch>
+            <a:fillRect/>
+          </a:stretch>
+        </p:blipFill>
+        <p:spPr>
+          <a:xfrm>
+            <a:off x="5084064" y="2769108"/>
+            <a:ext cx="274320" cy="274320"/>
+          </a:xfrm>
+          <a:prstGeom prst="rect">
+            <a:avLst/>
+          </a:prstGeom>
+        </p:spPr>
+      </p:pic>
+      <p:sp>
+        <p:nvSpPr>
+          <p:cNvPr id="11" name="TextBox 10"/>
+          <p:cNvSpPr txBox="1"/>
+          <p:nvPr/>
+        </p:nvSpPr>
+        <p:spPr>
+          <a:xfrm>
+            <a:off x="5559552" y="2727960"/>
+            <a:ext cx="5964631" cy="388620"/>
+          </a:xfrm>
+          <a:prstGeom prst="rect">
+            <a:avLst/>
+          </a:prstGeom>
+          <a:noFill/>
+        </p:spPr>
+        <p:txBody>
+          <a:bodyPr wrap="square" lIns="0" rIns="0" tIns="0" bIns="0" anchor="t">
+            <a:spAutoFit/>
+          </a:bodyPr>
+          <a:lstStyle/>
+          <a:p>
+            <a:pPr algn="l">
+              <a:lnSpc>
+                <a:spcPct val="130000"/>
+              </a:lnSpc>
+            </a:pPr>
+            <a:r>
+              <a:rPr sz="1620" b="0" i="0">
+                <a:solidFill>
+                  <a:srgbClr val="131416"/>
+                </a:solidFill>
+                <a:latin typeface="DM Sans"/>
+              </a:rPr>
+              <a:t>Coordinated calendars so events don't compete</a:t>
+            </a:r>
+          </a:p>
+        </p:txBody>
+      </p:sp>
+      <p:pic>
+        <p:nvPicPr>
+          <p:cNvPr id="12" name="Picture 11" descr="spark.png"/>
+          <p:cNvPicPr>
+            <a:picLocks noChangeAspect="1"/>
+          </p:cNvPicPr>
+          <p:nvPr/>
+        </p:nvPicPr>
+        <p:blipFill>
+          <a:blip r:embed="rId3"/>
+          <a:stretch>
+            <a:fillRect/>
+          </a:stretch>
+        </p:blipFill>
+        <p:spPr>
+          <a:xfrm>
+            <a:off x="5084064" y="3335528"/>
+            <a:ext cx="274320" cy="274320"/>
+          </a:xfrm>
+          <a:prstGeom prst="rect">
+            <a:avLst/>
+          </a:prstGeom>
+        </p:spPr>
+      </p:pic>
+      <p:sp>
+        <p:nvSpPr>
+          <p:cNvPr id="13" name="TextBox 12"/>
+          <p:cNvSpPr txBox="1"/>
+          <p:nvPr/>
+        </p:nvSpPr>
+        <p:spPr>
+          <a:xfrm>
+            <a:off x="5559552" y="3294380"/>
+            <a:ext cx="5964631" cy="388620"/>
+          </a:xfrm>
+          <a:prstGeom prst="rect">
+            <a:avLst/>
+          </a:prstGeom>
+          <a:noFill/>
+        </p:spPr>
+        <p:txBody>
+          <a:bodyPr wrap="square" lIns="0" rIns="0" tIns="0" bIns="0" anchor="t">
+            <a:spAutoFit/>
+          </a:bodyPr>
+          <a:lstStyle/>
+          <a:p>
+            <a:pPr algn="l">
+              <a:lnSpc>
+                <a:spcPct val="130000"/>
+              </a:lnSpc>
+            </a:pPr>
+            <a:r>
+              <a:rPr sz="1620" b="0" i="0">
+                <a:solidFill>
+                  <a:srgbClr val="131416"/>
+                </a:solidFill>
+                <a:latin typeface="DM Sans"/>
+              </a:rPr>
+              <a:t>Training that doesn't assume previous experience</a:t>
+            </a:r>
+          </a:p>
+        </p:txBody>
+      </p:sp>
+      <p:pic>
+        <p:nvPicPr>
+          <p:cNvPr id="14" name="Picture 13" descr="spark.png"/>
+          <p:cNvPicPr>
+            <a:picLocks noChangeAspect="1"/>
+          </p:cNvPicPr>
+          <p:nvPr/>
+        </p:nvPicPr>
+        <p:blipFill>
+          <a:blip r:embed="rId3"/>
+          <a:stretch>
+            <a:fillRect/>
+          </a:stretch>
+        </p:blipFill>
+        <p:spPr>
+          <a:xfrm>
+            <a:off x="5084064" y="3901948"/>
+            <a:ext cx="274320" cy="274320"/>
+          </a:xfrm>
+          <a:prstGeom prst="rect">
+            <a:avLst/>
+          </a:prstGeom>
+        </p:spPr>
+      </p:pic>
+      <p:sp>
+        <p:nvSpPr>
+          <p:cNvPr id="15" name="TextBox 14"/>
+          <p:cNvSpPr txBox="1"/>
+          <p:nvPr/>
+        </p:nvSpPr>
+        <p:spPr>
+          <a:xfrm>
+            <a:off x="5559552" y="3860800"/>
+            <a:ext cx="5964631" cy="388620"/>
+          </a:xfrm>
+          <a:prstGeom prst="rect">
+            <a:avLst/>
+          </a:prstGeom>
+          <a:noFill/>
+        </p:spPr>
+        <p:txBody>
+          <a:bodyPr wrap="square" lIns="0" rIns="0" tIns="0" bIns="0" anchor="t">
+            <a:spAutoFit/>
+          </a:bodyPr>
+          <a:lstStyle/>
+          <a:p>
+            <a:pPr algn="l">
+              <a:lnSpc>
+                <a:spcPct val="130000"/>
+              </a:lnSpc>
+            </a:pPr>
+            <a:r>
+              <a:rPr sz="1620" b="0" i="0">
+                <a:solidFill>
+                  <a:srgbClr val="131416"/>
+                </a:solidFill>
+                <a:latin typeface="DM Sans"/>
+              </a:rPr>
+              <a:t>A place to test new ideas with other ministries</a:t>
+            </a:r>
+          </a:p>
+        </p:txBody>
+      </p:sp>
+      <p:pic>
+        <p:nvPicPr>
+          <p:cNvPr id="16" name="Picture 15" descr="spark.png"/>
+          <p:cNvPicPr>
+            <a:picLocks noChangeAspect="1"/>
+          </p:cNvPicPr>
+          <p:nvPr/>
+        </p:nvPicPr>
+        <p:blipFill>
+          <a:blip r:embed="rId3"/>
+          <a:stretch>
+            <a:fillRect/>
+          </a:stretch>
+        </p:blipFill>
+        <p:spPr>
+          <a:xfrm>
+            <a:off x="5084064" y="4468368"/>
+            <a:ext cx="274320" cy="274320"/>
+          </a:xfrm>
+          <a:prstGeom prst="rect">
+            <a:avLst/>
+          </a:prstGeom>
+        </p:spPr>
+      </p:pic>
+      <p:sp>
+        <p:nvSpPr>
+          <p:cNvPr id="17" name="TextBox 16"/>
+          <p:cNvSpPr txBox="1"/>
+          <p:nvPr/>
+        </p:nvSpPr>
+        <p:spPr>
+          <a:xfrm>
+            <a:off x="5559552" y="4427220"/>
+            <a:ext cx="5964631" cy="388620"/>
+          </a:xfrm>
+          <a:prstGeom prst="rect">
+            <a:avLst/>
+          </a:prstGeom>
+          <a:noFill/>
+        </p:spPr>
+        <p:txBody>
+          <a:bodyPr wrap="square" lIns="0" rIns="0" tIns="0" bIns="0" anchor="t">
+            <a:spAutoFit/>
+          </a:bodyPr>
+          <a:lstStyle/>
+          <a:p>
+            <a:pPr algn="l">
+              <a:lnSpc>
+                <a:spcPct val="130000"/>
+              </a:lnSpc>
+            </a:pPr>
+            <a:r>
+              <a:rPr sz="1620" b="0" i="0">
+                <a:solidFill>
+                  <a:srgbClr val="131416"/>
+                </a:solidFill>
+                <a:latin typeface="DM Sans"/>
+              </a:rPr>
+              <a:t>Regular gatherings to learn from each other</a:t>
+            </a:r>
+          </a:p>
+        </p:txBody>
+      </p:sp>
+      <p:pic>
+        <p:nvPicPr>
+          <p:cNvPr id="18" name="Picture 17" descr="spark.png"/>
+          <p:cNvPicPr>
+            <a:picLocks noChangeAspect="1"/>
+          </p:cNvPicPr>
+          <p:nvPr/>
+        </p:nvPicPr>
+        <p:blipFill>
+          <a:blip r:embed="rId3"/>
+          <a:stretch>
+            <a:fillRect/>
+          </a:stretch>
+        </p:blipFill>
+        <p:spPr>
+          <a:xfrm>
+            <a:off x="5084064" y="5034788"/>
+            <a:ext cx="274320" cy="274320"/>
+          </a:xfrm>
+          <a:prstGeom prst="rect">
+            <a:avLst/>
+          </a:prstGeom>
+        </p:spPr>
+      </p:pic>
+      <p:sp>
+        <p:nvSpPr>
+          <p:cNvPr id="19" name="TextBox 18"/>
+          <p:cNvSpPr txBox="1"/>
+          <p:nvPr/>
+        </p:nvSpPr>
+        <p:spPr>
+          <a:xfrm>
+            <a:off x="5559552" y="4993640"/>
+            <a:ext cx="5964631" cy="388620"/>
+          </a:xfrm>
+          <a:prstGeom prst="rect">
+            <a:avLst/>
+          </a:prstGeom>
+          <a:noFill/>
+        </p:spPr>
+        <p:txBody>
+          <a:bodyPr wrap="square" lIns="0" rIns="0" tIns="0" bIns="0" anchor="t">
+            <a:spAutoFit/>
+          </a:bodyPr>
+          <a:lstStyle/>
+          <a:p>
+            <a:pPr algn="l">
+              <a:lnSpc>
+                <a:spcPct val="130000"/>
+              </a:lnSpc>
+            </a:pPr>
+            <a:r>
+              <a:rPr sz="1620" b="0" i="0">
+                <a:solidFill>
+                  <a:srgbClr val="131416"/>
+                </a:solidFill>
+                <a:latin typeface="DM Sans"/>
+              </a:rPr>
+              <a:t>Simple tools to follow up with students</a:t>
+            </a:r>
+          </a:p>
+        </p:txBody>
+      </p:sp>
+      <p:pic>
+        <p:nvPicPr>
+          <p:cNvPr id="20" name="Picture 19" descr="spark.png"/>
+          <p:cNvPicPr>
+            <a:picLocks noChangeAspect="1"/>
+          </p:cNvPicPr>
+          <p:nvPr/>
+        </p:nvPicPr>
+        <p:blipFill>
+          <a:blip r:embed="rId3"/>
+          <a:stretch>
+            <a:fillRect/>
+          </a:stretch>
+        </p:blipFill>
+        <p:spPr>
+          <a:xfrm>
+            <a:off x="5084064" y="5601208"/>
+            <a:ext cx="274320" cy="274320"/>
+          </a:xfrm>
+          <a:prstGeom prst="rect">
+            <a:avLst/>
+          </a:prstGeom>
+        </p:spPr>
+      </p:pic>
+      <p:sp>
+        <p:nvSpPr>
+          <p:cNvPr id="21" name="TextBox 20"/>
+          <p:cNvSpPr txBox="1"/>
+          <p:nvPr/>
+        </p:nvSpPr>
+        <p:spPr>
+          <a:xfrm>
+            <a:off x="5559552" y="5560060"/>
+            <a:ext cx="5964631" cy="388620"/>
+          </a:xfrm>
+          <a:prstGeom prst="rect">
+            <a:avLst/>
+          </a:prstGeom>
+          <a:noFill/>
+        </p:spPr>
+        <p:txBody>
+          <a:bodyPr wrap="square" lIns="0" rIns="0" tIns="0" bIns="0" anchor="t">
+            <a:spAutoFit/>
+          </a:bodyPr>
+          <a:lstStyle/>
+          <a:p>
+            <a:pPr algn="l">
+              <a:lnSpc>
+                <a:spcPct val="130000"/>
+              </a:lnSpc>
+            </a:pPr>
+            <a:r>
+              <a:rPr sz="1620" b="0" i="0">
+                <a:solidFill>
+                  <a:srgbClr val="131416"/>
+                </a:solidFill>
+                <a:latin typeface="DM Sans"/>
+              </a:rPr>
+              <a:t>Support for students returning home</a:t>
             </a:r>
           </a:p>
         </p:txBody>
